--- a/presentation/Video2Knowledge_Requirements.pptx
+++ b/presentation/Video2Knowledge_Requirements.pptx
@@ -3090,7 +3090,7 @@
     <p:bg>
       <p:bgPr>
         <a:solidFill>
-          <a:srgbClr val="1B1B2F"/>
+          <a:srgbClr val="003D7C"/>
         </a:solidFill>
         <a:effectLst/>
       </p:bgPr>
@@ -3104,16 +3104,243 @@
       <p:grpSpPr/>
       <p:sp>
         <p:nvSpPr>
-          <p:cNvPr id="2" name="Rectangle 1"/>
+          <p:cNvPr id="2" name="TextBox 1"/>
+          <p:cNvSpPr txBox="1"/>
+          <p:nvPr/>
+        </p:nvSpPr>
+        <p:spPr>
+          <a:xfrm>
+            <a:off x="10332720" y="137160"/>
+            <a:ext cx="1645920" cy="457200"/>
+          </a:xfrm>
+          <a:prstGeom prst="rect">
+            <a:avLst/>
+          </a:prstGeom>
+          <a:noFill/>
+        </p:spPr>
+        <p:txBody>
+          <a:bodyPr wrap="square">
+            <a:spAutoFit/>
+          </a:bodyPr>
+          <a:lstStyle/>
+          <a:p>
+            <a:pPr algn="r">
+              <a:defRPr sz="2400" b="1">
+                <a:solidFill>
+                  <a:srgbClr val="FFFFFF"/>
+                </a:solidFill>
+                <a:latin typeface="Arial"/>
+              </a:defRPr>
+            </a:pPr>
+            <a:r>
+              <a:t>NUS</a:t>
+            </a:r>
+          </a:p>
+        </p:txBody>
+      </p:sp>
+      <p:sp>
+        <p:nvSpPr>
+          <p:cNvPr id="3" name="TextBox 2"/>
+          <p:cNvSpPr txBox="1"/>
+          <p:nvPr/>
+        </p:nvSpPr>
+        <p:spPr>
+          <a:xfrm>
+            <a:off x="10332720" y="457200"/>
+            <a:ext cx="1645920" cy="320040"/>
+          </a:xfrm>
+          <a:prstGeom prst="rect">
+            <a:avLst/>
+          </a:prstGeom>
+          <a:noFill/>
+        </p:spPr>
+        <p:txBody>
+          <a:bodyPr wrap="square">
+            <a:spAutoFit/>
+          </a:bodyPr>
+          <a:lstStyle/>
+          <a:p>
+            <a:pPr algn="r">
+              <a:defRPr sz="800" b="0">
+                <a:solidFill>
+                  <a:srgbClr val="FFFFFF"/>
+                </a:solidFill>
+                <a:latin typeface="Arial"/>
+              </a:defRPr>
+            </a:pPr>
+            <a:r>
+              <a:t>National University</a:t>
+            </a:r>
+            <a:br/>
+            <a:r>
+              <a:t>of Singapore</a:t>
+            </a:r>
+          </a:p>
+        </p:txBody>
+      </p:sp>
+      <p:sp>
+        <p:nvSpPr>
+          <p:cNvPr id="4" name="TextBox 3"/>
+          <p:cNvSpPr txBox="1"/>
+          <p:nvPr/>
+        </p:nvSpPr>
+        <p:spPr>
+          <a:xfrm>
+            <a:off x="914400" y="1645920"/>
+            <a:ext cx="10058400" cy="1371600"/>
+          </a:xfrm>
+          <a:prstGeom prst="rect">
+            <a:avLst/>
+          </a:prstGeom>
+          <a:noFill/>
+        </p:spPr>
+        <p:txBody>
+          <a:bodyPr wrap="square">
+            <a:spAutoFit/>
+          </a:bodyPr>
+          <a:lstStyle/>
+          <a:p>
+            <a:pPr algn="l">
+              <a:defRPr sz="4400" b="1">
+                <a:solidFill>
+                  <a:srgbClr val="FFFFFF"/>
+                </a:solidFill>
+                <a:latin typeface="Calibri"/>
+              </a:defRPr>
+            </a:pPr>
+            <a:r>
+              <a:t>NUS ISS Practice Module</a:t>
+            </a:r>
+          </a:p>
+        </p:txBody>
+      </p:sp>
+      <p:sp>
+        <p:nvSpPr>
+          <p:cNvPr id="5" name="TextBox 4"/>
+          <p:cNvSpPr txBox="1"/>
+          <p:nvPr/>
+        </p:nvSpPr>
+        <p:spPr>
+          <a:xfrm>
+            <a:off x="914400" y="3200400"/>
+            <a:ext cx="10058400" cy="914400"/>
+          </a:xfrm>
+          <a:prstGeom prst="rect">
+            <a:avLst/>
+          </a:prstGeom>
+          <a:noFill/>
+        </p:spPr>
+        <p:txBody>
+          <a:bodyPr wrap="square">
+            <a:spAutoFit/>
+          </a:bodyPr>
+          <a:lstStyle/>
+          <a:p>
+            <a:pPr algn="l">
+              <a:defRPr sz="2200" b="0">
+                <a:solidFill>
+                  <a:srgbClr val="FFFFFF"/>
+                </a:solidFill>
+                <a:latin typeface="Calibri"/>
+              </a:defRPr>
+            </a:pPr>
+            <a:r>
+              <a:t>Requirements Mapping — How Video2Knowledge meets all 4 project requirements</a:t>
+            </a:r>
+          </a:p>
+        </p:txBody>
+      </p:sp>
+      <p:sp>
+        <p:nvSpPr>
+          <p:cNvPr id="6" name="Rectangle 5"/>
           <p:cNvSpPr/>
           <p:nvPr/>
         </p:nvSpPr>
         <p:spPr>
           <a:xfrm>
-            <a:off x="0" y="0"/>
+            <a:off x="0" y="6172200"/>
             <a:ext cx="12191695" cy="54864"/>
           </a:xfrm>
           <a:prstGeom prst="rect">
+            <a:avLst/>
+          </a:prstGeom>
+          <a:solidFill>
+            <a:srgbClr val="EF7C00"/>
+          </a:solidFill>
+          <a:ln>
+            <a:noFill/>
+          </a:ln>
+        </p:spPr>
+        <p:style>
+          <a:lnRef idx="1">
+            <a:schemeClr val="accent1"/>
+          </a:lnRef>
+          <a:fillRef idx="3">
+            <a:schemeClr val="accent1"/>
+          </a:fillRef>
+          <a:effectRef idx="2">
+            <a:schemeClr val="accent1"/>
+          </a:effectRef>
+          <a:fontRef idx="minor">
+            <a:schemeClr val="lt1"/>
+          </a:fontRef>
+        </p:style>
+        <p:txBody>
+          <a:bodyPr rtlCol="0" anchor="ctr"/>
+          <a:lstStyle/>
+          <a:p>
+            <a:pPr algn="ctr"/>
+          </a:p>
+        </p:txBody>
+      </p:sp>
+      <p:sp>
+        <p:nvSpPr>
+          <p:cNvPr id="7" name="TextBox 6"/>
+          <p:cNvSpPr txBox="1"/>
+          <p:nvPr/>
+        </p:nvSpPr>
+        <p:spPr>
+          <a:xfrm>
+            <a:off x="274320" y="6400800"/>
+            <a:ext cx="7315200" cy="274320"/>
+          </a:xfrm>
+          <a:prstGeom prst="rect">
+            <a:avLst/>
+          </a:prstGeom>
+          <a:noFill/>
+        </p:spPr>
+        <p:txBody>
+          <a:bodyPr wrap="square">
+            <a:spAutoFit/>
+          </a:bodyPr>
+          <a:lstStyle/>
+          <a:p>
+            <a:pPr algn="l">
+              <a:defRPr sz="800" b="0">
+                <a:solidFill>
+                  <a:srgbClr val="FFFFFF"/>
+                </a:solidFill>
+                <a:latin typeface="Calibri"/>
+              </a:defRPr>
+            </a:pPr>
+            <a:r>
+              <a:t>© Copyright National University of Singapore. All Rights Reserved.</a:t>
+            </a:r>
+          </a:p>
+        </p:txBody>
+      </p:sp>
+      <p:sp>
+        <p:nvSpPr>
+          <p:cNvPr id="8" name="Rounded Rectangle 7"/>
+          <p:cNvSpPr/>
+          <p:nvPr/>
+        </p:nvSpPr>
+        <p:spPr>
+          <a:xfrm>
+            <a:off x="2286000" y="5029200"/>
+            <a:ext cx="1645920" cy="822960"/>
+          </a:xfrm>
+          <a:prstGeom prst="roundRect">
             <a:avLst/>
           </a:prstGeom>
           <a:solidFill>
@@ -3138,157 +3365,6 @@
           </a:fontRef>
         </p:style>
         <p:txBody>
-          <a:bodyPr rtlCol="0" anchor="ctr"/>
-          <a:lstStyle/>
-          <a:p>
-            <a:pPr algn="ctr"/>
-          </a:p>
-        </p:txBody>
-      </p:sp>
-      <p:sp>
-        <p:nvSpPr>
-          <p:cNvPr id="3" name="TextBox 2"/>
-          <p:cNvSpPr txBox="1"/>
-          <p:nvPr/>
-        </p:nvSpPr>
-        <p:spPr>
-          <a:xfrm>
-            <a:off x="1371600" y="1828800"/>
-            <a:ext cx="9448495" cy="1097280"/>
-          </a:xfrm>
-          <a:prstGeom prst="rect">
-            <a:avLst/>
-          </a:prstGeom>
-          <a:noFill/>
-        </p:spPr>
-        <p:txBody>
-          <a:bodyPr wrap="square">
-            <a:spAutoFit/>
-          </a:bodyPr>
-          <a:lstStyle/>
-          <a:p>
-            <a:pPr algn="ctr">
-              <a:defRPr sz="4400" b="1">
-                <a:solidFill>
-                  <a:srgbClr val="FFFFFF"/>
-                </a:solidFill>
-                <a:latin typeface="Calibri"/>
-              </a:defRPr>
-            </a:pPr>
-            <a:r>
-              <a:t>NUS ISS Practice Module</a:t>
-            </a:r>
-          </a:p>
-        </p:txBody>
-      </p:sp>
-      <p:sp>
-        <p:nvSpPr>
-          <p:cNvPr id="4" name="TextBox 3"/>
-          <p:cNvSpPr txBox="1"/>
-          <p:nvPr/>
-        </p:nvSpPr>
-        <p:spPr>
-          <a:xfrm>
-            <a:off x="1371600" y="2743200"/>
-            <a:ext cx="9448495" cy="731520"/>
-          </a:xfrm>
-          <a:prstGeom prst="rect">
-            <a:avLst/>
-          </a:prstGeom>
-          <a:noFill/>
-        </p:spPr>
-        <p:txBody>
-          <a:bodyPr wrap="square">
-            <a:spAutoFit/>
-          </a:bodyPr>
-          <a:lstStyle/>
-          <a:p>
-            <a:pPr algn="ctr">
-              <a:defRPr sz="4000" b="1">
-                <a:solidFill>
-                  <a:srgbClr val="007ACC"/>
-                </a:solidFill>
-                <a:latin typeface="Calibri"/>
-              </a:defRPr>
-            </a:pPr>
-            <a:r>
-              <a:t>Requirements Mapping</a:t>
-            </a:r>
-          </a:p>
-        </p:txBody>
-      </p:sp>
-      <p:sp>
-        <p:nvSpPr>
-          <p:cNvPr id="5" name="TextBox 4"/>
-          <p:cNvSpPr txBox="1"/>
-          <p:nvPr/>
-        </p:nvSpPr>
-        <p:spPr>
-          <a:xfrm>
-            <a:off x="2286000" y="3931920"/>
-            <a:ext cx="7619695" cy="548640"/>
-          </a:xfrm>
-          <a:prstGeom prst="rect">
-            <a:avLst/>
-          </a:prstGeom>
-          <a:noFill/>
-        </p:spPr>
-        <p:txBody>
-          <a:bodyPr wrap="square">
-            <a:spAutoFit/>
-          </a:bodyPr>
-          <a:lstStyle/>
-          <a:p>
-            <a:pPr algn="ctr">
-              <a:defRPr sz="2200" b="0">
-                <a:solidFill>
-                  <a:srgbClr val="666666"/>
-                </a:solidFill>
-                <a:latin typeface="Calibri"/>
-              </a:defRPr>
-            </a:pPr>
-            <a:r>
-              <a:t>How Video2Knowledge meets all 4 project requirements</a:t>
-            </a:r>
-          </a:p>
-        </p:txBody>
-      </p:sp>
-      <p:sp>
-        <p:nvSpPr>
-          <p:cNvPr id="6" name="Rounded Rectangle 5"/>
-          <p:cNvSpPr/>
-          <p:nvPr/>
-        </p:nvSpPr>
-        <p:spPr>
-          <a:xfrm>
-            <a:off x="2286000" y="5029200"/>
-            <a:ext cx="1645920" cy="822960"/>
-          </a:xfrm>
-          <a:prstGeom prst="roundRect">
-            <a:avLst/>
-          </a:prstGeom>
-          <a:solidFill>
-            <a:srgbClr val="007ACC"/>
-          </a:solidFill>
-          <a:ln>
-            <a:noFill/>
-          </a:ln>
-        </p:spPr>
-        <p:style>
-          <a:lnRef idx="1">
-            <a:schemeClr val="accent1"/>
-          </a:lnRef>
-          <a:fillRef idx="3">
-            <a:schemeClr val="accent1"/>
-          </a:fillRef>
-          <a:effectRef idx="2">
-            <a:schemeClr val="accent1"/>
-          </a:effectRef>
-          <a:fontRef idx="minor">
-            <a:schemeClr val="lt1"/>
-          </a:fontRef>
-        </p:style>
-        <p:txBody>
           <a:bodyPr rtlCol="0" anchor="ctr" wrap="square"/>
           <a:lstStyle/>
           <a:p>
@@ -3311,7 +3387,7 @@
       </p:sp>
       <p:sp>
         <p:nvSpPr>
-          <p:cNvPr id="7" name="Rounded Rectangle 6"/>
+          <p:cNvPr id="9" name="Rounded Rectangle 8"/>
           <p:cNvSpPr/>
           <p:nvPr/>
         </p:nvSpPr>
@@ -3367,7 +3443,7 @@
       </p:sp>
       <p:sp>
         <p:nvSpPr>
-          <p:cNvPr id="8" name="Rounded Rectangle 7"/>
+          <p:cNvPr id="10" name="Rounded Rectangle 9"/>
           <p:cNvSpPr/>
           <p:nvPr/>
         </p:nvSpPr>
@@ -3380,7 +3456,7 @@
             <a:avLst/>
           </a:prstGeom>
           <a:solidFill>
-            <a:srgbClr val="F57C00"/>
+            <a:srgbClr val="EF7C00"/>
           </a:solidFill>
           <a:ln>
             <a:noFill/>
@@ -3423,7 +3499,7 @@
       </p:sp>
       <p:sp>
         <p:nvSpPr>
-          <p:cNvPr id="9" name="Rounded Rectangle 8"/>
+          <p:cNvPr id="11" name="Rounded Rectangle 10"/>
           <p:cNvSpPr/>
           <p:nvPr/>
         </p:nvSpPr>
@@ -3474,49 +3550,6 @@
             <a:r>
               <a:t>Sensing</a:t>
             </a:r>
-          </a:p>
-        </p:txBody>
-      </p:sp>
-      <p:sp>
-        <p:nvSpPr>
-          <p:cNvPr id="10" name="Rectangle 9"/>
-          <p:cNvSpPr/>
-          <p:nvPr/>
-        </p:nvSpPr>
-        <p:spPr>
-          <a:xfrm>
-            <a:off x="0" y="6803136"/>
-            <a:ext cx="12191695" cy="54864"/>
-          </a:xfrm>
-          <a:prstGeom prst="rect">
-            <a:avLst/>
-          </a:prstGeom>
-          <a:solidFill>
-            <a:srgbClr val="007ACC"/>
-          </a:solidFill>
-          <a:ln>
-            <a:noFill/>
-          </a:ln>
-        </p:spPr>
-        <p:style>
-          <a:lnRef idx="1">
-            <a:schemeClr val="accent1"/>
-          </a:lnRef>
-          <a:fillRef idx="3">
-            <a:schemeClr val="accent1"/>
-          </a:fillRef>
-          <a:effectRef idx="2">
-            <a:schemeClr val="accent1"/>
-          </a:effectRef>
-          <a:fontRef idx="minor">
-            <a:schemeClr val="lt1"/>
-          </a:fontRef>
-        </p:style>
-        <p:txBody>
-          <a:bodyPr rtlCol="0" anchor="ctr"/>
-          <a:lstStyle/>
-          <a:p>
-            <a:pPr algn="ctr"/>
           </a:p>
         </p:txBody>
       </p:sp>
@@ -3534,7 +3567,7 @@
     <p:bg>
       <p:bgPr>
         <a:solidFill>
-          <a:srgbClr val="FFFFFF"/>
+          <a:srgbClr val="003D7C"/>
         </a:solidFill>
         <a:effectLst/>
       </p:bgPr>
@@ -3555,13 +3588,13 @@
         <p:spPr>
           <a:xfrm>
             <a:off x="0" y="0"/>
-            <a:ext cx="12191695" cy="914400"/>
+            <a:ext cx="1005840" cy="822960"/>
           </a:xfrm>
           <a:prstGeom prst="rect">
             <a:avLst/>
           </a:prstGeom>
           <a:solidFill>
-            <a:srgbClr val="007ACC"/>
+            <a:srgbClr val="FFE033"/>
           </a:solidFill>
           <a:ln>
             <a:noFill/>
@@ -3591,14 +3624,57 @@
       </p:sp>
       <p:sp>
         <p:nvSpPr>
-          <p:cNvPr id="3" name="TextBox 2"/>
+          <p:cNvPr id="3" name="Rectangle 2"/>
+          <p:cNvSpPr/>
+          <p:nvPr/>
+        </p:nvSpPr>
+        <p:spPr>
+          <a:xfrm>
+            <a:off x="457200" y="822960"/>
+            <a:ext cx="54864" cy="5303520"/>
+          </a:xfrm>
+          <a:prstGeom prst="rect">
+            <a:avLst/>
+          </a:prstGeom>
+          <a:solidFill>
+            <a:srgbClr val="EF7C00"/>
+          </a:solidFill>
+          <a:ln>
+            <a:noFill/>
+          </a:ln>
+        </p:spPr>
+        <p:style>
+          <a:lnRef idx="1">
+            <a:schemeClr val="accent1"/>
+          </a:lnRef>
+          <a:fillRef idx="3">
+            <a:schemeClr val="accent1"/>
+          </a:fillRef>
+          <a:effectRef idx="2">
+            <a:schemeClr val="accent1"/>
+          </a:effectRef>
+          <a:fontRef idx="minor">
+            <a:schemeClr val="lt1"/>
+          </a:fontRef>
+        </p:style>
+        <p:txBody>
+          <a:bodyPr rtlCol="0" anchor="ctr"/>
+          <a:lstStyle/>
+          <a:p>
+            <a:pPr algn="ctr"/>
+          </a:p>
+        </p:txBody>
+      </p:sp>
+      <p:sp>
+        <p:nvSpPr>
+          <p:cNvPr id="4" name="TextBox 3"/>
           <p:cNvSpPr txBox="1"/>
           <p:nvPr/>
         </p:nvSpPr>
         <p:spPr>
           <a:xfrm>
-            <a:off x="457200" y="137160"/>
-            <a:ext cx="11277295" cy="640080"/>
+            <a:off x="10332720" y="137160"/>
+            <a:ext cx="1645920" cy="457200"/>
           </a:xfrm>
           <a:prstGeom prst="rect">
             <a:avLst/>
@@ -3611,11 +3687,87 @@
           </a:bodyPr>
           <a:lstStyle/>
           <a:p>
-            <a:pPr algn="ctr">
-              <a:defRPr sz="3000" b="1">
+            <a:pPr algn="r">
+              <a:defRPr sz="2400" b="1">
                 <a:solidFill>
                   <a:srgbClr val="FFFFFF"/>
                 </a:solidFill>
+                <a:latin typeface="Arial"/>
+              </a:defRPr>
+            </a:pPr>
+            <a:r>
+              <a:t>NUS</a:t>
+            </a:r>
+          </a:p>
+        </p:txBody>
+      </p:sp>
+      <p:sp>
+        <p:nvSpPr>
+          <p:cNvPr id="5" name="TextBox 4"/>
+          <p:cNvSpPr txBox="1"/>
+          <p:nvPr/>
+        </p:nvSpPr>
+        <p:spPr>
+          <a:xfrm>
+            <a:off x="10332720" y="457200"/>
+            <a:ext cx="1645920" cy="320040"/>
+          </a:xfrm>
+          <a:prstGeom prst="rect">
+            <a:avLst/>
+          </a:prstGeom>
+          <a:noFill/>
+        </p:spPr>
+        <p:txBody>
+          <a:bodyPr wrap="square">
+            <a:spAutoFit/>
+          </a:bodyPr>
+          <a:lstStyle/>
+          <a:p>
+            <a:pPr algn="r">
+              <a:defRPr sz="800" b="0">
+                <a:solidFill>
+                  <a:srgbClr val="FFFFFF"/>
+                </a:solidFill>
+                <a:latin typeface="Arial"/>
+              </a:defRPr>
+            </a:pPr>
+            <a:r>
+              <a:t>National University</a:t>
+            </a:r>
+            <a:br/>
+            <a:r>
+              <a:t>of Singapore</a:t>
+            </a:r>
+          </a:p>
+        </p:txBody>
+      </p:sp>
+      <p:sp>
+        <p:nvSpPr>
+          <p:cNvPr id="6" name="TextBox 5"/>
+          <p:cNvSpPr txBox="1"/>
+          <p:nvPr/>
+        </p:nvSpPr>
+        <p:spPr>
+          <a:xfrm>
+            <a:off x="1188720" y="91440"/>
+            <a:ext cx="8686800" cy="640080"/>
+          </a:xfrm>
+          <a:prstGeom prst="rect">
+            <a:avLst/>
+          </a:prstGeom>
+          <a:noFill/>
+        </p:spPr>
+        <p:txBody>
+          <a:bodyPr wrap="square">
+            <a:spAutoFit/>
+          </a:bodyPr>
+          <a:lstStyle/>
+          <a:p>
+            <a:pPr algn="l">
+              <a:defRPr sz="3200" b="1">
+                <a:solidFill>
+                  <a:srgbClr val="FFFFFF"/>
+                </a:solidFill>
                 <a:latin typeface="Calibri"/>
               </a:defRPr>
             </a:pPr>
@@ -3627,13 +3779,92 @@
       </p:sp>
       <p:sp>
         <p:nvSpPr>
-          <p:cNvPr id="4" name="Oval 3"/>
+          <p:cNvPr id="7" name="Rectangle 6"/>
           <p:cNvSpPr/>
           <p:nvPr/>
         </p:nvSpPr>
         <p:spPr>
           <a:xfrm>
-            <a:off x="1371600" y="1280160"/>
+            <a:off x="0" y="6172200"/>
+            <a:ext cx="12191695" cy="54864"/>
+          </a:xfrm>
+          <a:prstGeom prst="rect">
+            <a:avLst/>
+          </a:prstGeom>
+          <a:solidFill>
+            <a:srgbClr val="EF7C00"/>
+          </a:solidFill>
+          <a:ln>
+            <a:noFill/>
+          </a:ln>
+        </p:spPr>
+        <p:style>
+          <a:lnRef idx="1">
+            <a:schemeClr val="accent1"/>
+          </a:lnRef>
+          <a:fillRef idx="3">
+            <a:schemeClr val="accent1"/>
+          </a:fillRef>
+          <a:effectRef idx="2">
+            <a:schemeClr val="accent1"/>
+          </a:effectRef>
+          <a:fontRef idx="minor">
+            <a:schemeClr val="lt1"/>
+          </a:fontRef>
+        </p:style>
+        <p:txBody>
+          <a:bodyPr rtlCol="0" anchor="ctr"/>
+          <a:lstStyle/>
+          <a:p>
+            <a:pPr algn="ctr"/>
+          </a:p>
+        </p:txBody>
+      </p:sp>
+      <p:sp>
+        <p:nvSpPr>
+          <p:cNvPr id="8" name="TextBox 7"/>
+          <p:cNvSpPr txBox="1"/>
+          <p:nvPr/>
+        </p:nvSpPr>
+        <p:spPr>
+          <a:xfrm>
+            <a:off x="274320" y="6400800"/>
+            <a:ext cx="7315200" cy="274320"/>
+          </a:xfrm>
+          <a:prstGeom prst="rect">
+            <a:avLst/>
+          </a:prstGeom>
+          <a:noFill/>
+        </p:spPr>
+        <p:txBody>
+          <a:bodyPr wrap="square">
+            <a:spAutoFit/>
+          </a:bodyPr>
+          <a:lstStyle/>
+          <a:p>
+            <a:pPr algn="l">
+              <a:defRPr sz="800" b="0">
+                <a:solidFill>
+                  <a:srgbClr val="FFFFFF"/>
+                </a:solidFill>
+                <a:latin typeface="Calibri"/>
+              </a:defRPr>
+            </a:pPr>
+            <a:r>
+              <a:t>© Copyright National University of Singapore. All Rights Reserved.</a:t>
+            </a:r>
+          </a:p>
+        </p:txBody>
+      </p:sp>
+      <p:sp>
+        <p:nvSpPr>
+          <p:cNvPr id="9" name="Oval 8"/>
+          <p:cNvSpPr/>
+          <p:nvPr/>
+        </p:nvSpPr>
+        <p:spPr>
+          <a:xfrm>
+            <a:off x="1188720" y="1188720"/>
             <a:ext cx="457200" cy="457200"/>
           </a:xfrm>
           <a:prstGeom prst="ellipse">
@@ -3679,13 +3910,13 @@
       </p:sp>
       <p:sp>
         <p:nvSpPr>
-          <p:cNvPr id="5" name="TextBox 4"/>
+          <p:cNvPr id="10" name="TextBox 9"/>
           <p:cNvSpPr txBox="1"/>
           <p:nvPr/>
         </p:nvSpPr>
         <p:spPr>
           <a:xfrm>
-            <a:off x="2011680" y="1325880"/>
+            <a:off x="1828800" y="1234440"/>
             <a:ext cx="8229600" cy="411480"/>
           </a:xfrm>
           <a:prstGeom prst="rect">
@@ -3702,7 +3933,7 @@
             <a:pPr algn="l">
               <a:defRPr sz="2000" b="0">
                 <a:solidFill>
-                  <a:srgbClr val="2D2D2D"/>
+                  <a:srgbClr val="EF7C00"/>
                 </a:solidFill>
                 <a:latin typeface="Calibri"/>
               </a:defRPr>
@@ -3715,13 +3946,13 @@
       </p:sp>
       <p:sp>
         <p:nvSpPr>
-          <p:cNvPr id="6" name="Oval 5"/>
+          <p:cNvPr id="11" name="Oval 10"/>
           <p:cNvSpPr/>
           <p:nvPr/>
         </p:nvSpPr>
         <p:spPr>
           <a:xfrm>
-            <a:off x="1371600" y="2057400"/>
+            <a:off x="1188720" y="1965960"/>
             <a:ext cx="457200" cy="457200"/>
           </a:xfrm>
           <a:prstGeom prst="ellipse">
@@ -3767,13 +3998,13 @@
       </p:sp>
       <p:sp>
         <p:nvSpPr>
-          <p:cNvPr id="7" name="TextBox 6"/>
+          <p:cNvPr id="12" name="TextBox 11"/>
           <p:cNvSpPr txBox="1"/>
           <p:nvPr/>
         </p:nvSpPr>
         <p:spPr>
           <a:xfrm>
-            <a:off x="2011680" y="2103120"/>
+            <a:off x="1828800" y="2011680"/>
             <a:ext cx="8229600" cy="411480"/>
           </a:xfrm>
           <a:prstGeom prst="rect">
@@ -3790,7 +4021,7 @@
             <a:pPr algn="l">
               <a:defRPr sz="2000" b="0">
                 <a:solidFill>
-                  <a:srgbClr val="2D2D2D"/>
+                  <a:srgbClr val="EF7C00"/>
                 </a:solidFill>
                 <a:latin typeface="Calibri"/>
               </a:defRPr>
@@ -3803,13 +4034,13 @@
       </p:sp>
       <p:sp>
         <p:nvSpPr>
-          <p:cNvPr id="8" name="Oval 7"/>
+          <p:cNvPr id="13" name="Oval 12"/>
           <p:cNvSpPr/>
           <p:nvPr/>
         </p:nvSpPr>
         <p:spPr>
           <a:xfrm>
-            <a:off x="1371600" y="2834640"/>
+            <a:off x="1188720" y="2743200"/>
             <a:ext cx="457200" cy="457200"/>
           </a:xfrm>
           <a:prstGeom prst="ellipse">
@@ -3855,13 +4086,13 @@
       </p:sp>
       <p:sp>
         <p:nvSpPr>
-          <p:cNvPr id="9" name="TextBox 8"/>
+          <p:cNvPr id="14" name="TextBox 13"/>
           <p:cNvSpPr txBox="1"/>
           <p:nvPr/>
         </p:nvSpPr>
         <p:spPr>
           <a:xfrm>
-            <a:off x="2011680" y="2880360"/>
+            <a:off x="1828800" y="2788920"/>
             <a:ext cx="8229600" cy="411480"/>
           </a:xfrm>
           <a:prstGeom prst="rect">
@@ -3878,7 +4109,7 @@
             <a:pPr algn="l">
               <a:defRPr sz="2000" b="0">
                 <a:solidFill>
-                  <a:srgbClr val="2D2D2D"/>
+                  <a:srgbClr val="EF7C00"/>
                 </a:solidFill>
                 <a:latin typeface="Calibri"/>
               </a:defRPr>
@@ -3891,13 +4122,13 @@
       </p:sp>
       <p:sp>
         <p:nvSpPr>
-          <p:cNvPr id="10" name="Oval 9"/>
+          <p:cNvPr id="15" name="Oval 14"/>
           <p:cNvSpPr/>
           <p:nvPr/>
         </p:nvSpPr>
         <p:spPr>
           <a:xfrm>
-            <a:off x="1371600" y="3611880"/>
+            <a:off x="1188720" y="3520440"/>
             <a:ext cx="457200" cy="457200"/>
           </a:xfrm>
           <a:prstGeom prst="ellipse">
@@ -3943,13 +4174,13 @@
       </p:sp>
       <p:sp>
         <p:nvSpPr>
-          <p:cNvPr id="11" name="TextBox 10"/>
+          <p:cNvPr id="16" name="TextBox 15"/>
           <p:cNvSpPr txBox="1"/>
           <p:nvPr/>
         </p:nvSpPr>
         <p:spPr>
           <a:xfrm>
-            <a:off x="2011680" y="3657600"/>
+            <a:off x="1828800" y="3566160"/>
             <a:ext cx="8229600" cy="411480"/>
           </a:xfrm>
           <a:prstGeom prst="rect">
@@ -3966,7 +4197,7 @@
             <a:pPr algn="l">
               <a:defRPr sz="2000" b="0">
                 <a:solidFill>
-                  <a:srgbClr val="2D2D2D"/>
+                  <a:srgbClr val="EF7C00"/>
                 </a:solidFill>
                 <a:latin typeface="Calibri"/>
               </a:defRPr>
@@ -3979,13 +4210,13 @@
       </p:sp>
       <p:sp>
         <p:nvSpPr>
-          <p:cNvPr id="12" name="Rounded Rectangle 11"/>
+          <p:cNvPr id="17" name="Rounded Rectangle 16"/>
           <p:cNvSpPr/>
           <p:nvPr/>
         </p:nvSpPr>
         <p:spPr>
           <a:xfrm>
-            <a:off x="1828800" y="4572000"/>
+            <a:off x="1188720" y="4389120"/>
             <a:ext cx="8534095" cy="731520"/>
           </a:xfrm>
           <a:prstGeom prst="roundRect">
@@ -4031,13 +4262,13 @@
       </p:sp>
       <p:sp>
         <p:nvSpPr>
-          <p:cNvPr id="13" name="TextBox 12"/>
+          <p:cNvPr id="18" name="TextBox 17"/>
           <p:cNvSpPr txBox="1"/>
           <p:nvPr/>
         </p:nvSpPr>
         <p:spPr>
           <a:xfrm>
-            <a:off x="1371600" y="5577840"/>
+            <a:off x="1188720" y="5394960"/>
             <a:ext cx="9448495" cy="548640"/>
           </a:xfrm>
           <a:prstGeom prst="rect">
@@ -4054,7 +4285,7 @@
             <a:pPr algn="ctr">
               <a:defRPr sz="1600" b="0">
                 <a:solidFill>
-                  <a:srgbClr val="666666"/>
+                  <a:srgbClr val="CCCCCC"/>
                 </a:solidFill>
                 <a:latin typeface="Calibri"/>
               </a:defRPr>
@@ -4062,49 +4293,6 @@
             <a:r>
               <a:t>A practical application demonstrating pattern recognition and ML techniques to solve a real-world problem</a:t>
             </a:r>
-          </a:p>
-        </p:txBody>
-      </p:sp>
-      <p:sp>
-        <p:nvSpPr>
-          <p:cNvPr id="14" name="Rectangle 13"/>
-          <p:cNvSpPr/>
-          <p:nvPr/>
-        </p:nvSpPr>
-        <p:spPr>
-          <a:xfrm>
-            <a:off x="0" y="6803136"/>
-            <a:ext cx="12191695" cy="54864"/>
-          </a:xfrm>
-          <a:prstGeom prst="rect">
-            <a:avLst/>
-          </a:prstGeom>
-          <a:solidFill>
-            <a:srgbClr val="007ACC"/>
-          </a:solidFill>
-          <a:ln>
-            <a:noFill/>
-          </a:ln>
-        </p:spPr>
-        <p:style>
-          <a:lnRef idx="1">
-            <a:schemeClr val="accent1"/>
-          </a:lnRef>
-          <a:fillRef idx="3">
-            <a:schemeClr val="accent1"/>
-          </a:fillRef>
-          <a:effectRef idx="2">
-            <a:schemeClr val="accent1"/>
-          </a:effectRef>
-          <a:fontRef idx="minor">
-            <a:schemeClr val="lt1"/>
-          </a:fontRef>
-        </p:style>
-        <p:txBody>
-          <a:bodyPr rtlCol="0" anchor="ctr"/>
-          <a:lstStyle/>
-          <a:p>
-            <a:pPr algn="ctr"/>
           </a:p>
         </p:txBody>
       </p:sp>
@@ -4122,7 +4310,7 @@
     <p:bg>
       <p:bgPr>
         <a:solidFill>
-          <a:srgbClr val="FFFFFF"/>
+          <a:srgbClr val="003D7C"/>
         </a:solidFill>
         <a:effectLst/>
       </p:bgPr>
@@ -4143,13 +4331,13 @@
         <p:spPr>
           <a:xfrm>
             <a:off x="0" y="0"/>
-            <a:ext cx="12191695" cy="914400"/>
+            <a:ext cx="1005840" cy="822960"/>
           </a:xfrm>
           <a:prstGeom prst="rect">
             <a:avLst/>
           </a:prstGeom>
           <a:solidFill>
-            <a:srgbClr val="28A745"/>
+            <a:srgbClr val="FFE033"/>
           </a:solidFill>
           <a:ln>
             <a:noFill/>
@@ -4179,14 +4367,57 @@
       </p:sp>
       <p:sp>
         <p:nvSpPr>
-          <p:cNvPr id="3" name="TextBox 2"/>
+          <p:cNvPr id="3" name="Rectangle 2"/>
+          <p:cNvSpPr/>
+          <p:nvPr/>
+        </p:nvSpPr>
+        <p:spPr>
+          <a:xfrm>
+            <a:off x="457200" y="822960"/>
+            <a:ext cx="54864" cy="5303520"/>
+          </a:xfrm>
+          <a:prstGeom prst="rect">
+            <a:avLst/>
+          </a:prstGeom>
+          <a:solidFill>
+            <a:srgbClr val="EF7C00"/>
+          </a:solidFill>
+          <a:ln>
+            <a:noFill/>
+          </a:ln>
+        </p:spPr>
+        <p:style>
+          <a:lnRef idx="1">
+            <a:schemeClr val="accent1"/>
+          </a:lnRef>
+          <a:fillRef idx="3">
+            <a:schemeClr val="accent1"/>
+          </a:fillRef>
+          <a:effectRef idx="2">
+            <a:schemeClr val="accent1"/>
+          </a:effectRef>
+          <a:fontRef idx="minor">
+            <a:schemeClr val="lt1"/>
+          </a:fontRef>
+        </p:style>
+        <p:txBody>
+          <a:bodyPr rtlCol="0" anchor="ctr"/>
+          <a:lstStyle/>
+          <a:p>
+            <a:pPr algn="ctr"/>
+          </a:p>
+        </p:txBody>
+      </p:sp>
+      <p:sp>
+        <p:nvSpPr>
+          <p:cNvPr id="4" name="TextBox 3"/>
           <p:cNvSpPr txBox="1"/>
           <p:nvPr/>
         </p:nvSpPr>
         <p:spPr>
           <a:xfrm>
-            <a:off x="457200" y="137160"/>
-            <a:ext cx="11277295" cy="640080"/>
+            <a:off x="10332720" y="137160"/>
+            <a:ext cx="1645920" cy="457200"/>
           </a:xfrm>
           <a:prstGeom prst="rect">
             <a:avLst/>
@@ -4199,11 +4430,87 @@
           </a:bodyPr>
           <a:lstStyle/>
           <a:p>
-            <a:pPr algn="ctr">
-              <a:defRPr sz="2800" b="1">
+            <a:pPr algn="r">
+              <a:defRPr sz="2400" b="1">
                 <a:solidFill>
                   <a:srgbClr val="FFFFFF"/>
                 </a:solidFill>
+                <a:latin typeface="Arial"/>
+              </a:defRPr>
+            </a:pPr>
+            <a:r>
+              <a:t>NUS</a:t>
+            </a:r>
+          </a:p>
+        </p:txBody>
+      </p:sp>
+      <p:sp>
+        <p:nvSpPr>
+          <p:cNvPr id="5" name="TextBox 4"/>
+          <p:cNvSpPr txBox="1"/>
+          <p:nvPr/>
+        </p:nvSpPr>
+        <p:spPr>
+          <a:xfrm>
+            <a:off x="10332720" y="457200"/>
+            <a:ext cx="1645920" cy="320040"/>
+          </a:xfrm>
+          <a:prstGeom prst="rect">
+            <a:avLst/>
+          </a:prstGeom>
+          <a:noFill/>
+        </p:spPr>
+        <p:txBody>
+          <a:bodyPr wrap="square">
+            <a:spAutoFit/>
+          </a:bodyPr>
+          <a:lstStyle/>
+          <a:p>
+            <a:pPr algn="r">
+              <a:defRPr sz="800" b="0">
+                <a:solidFill>
+                  <a:srgbClr val="FFFFFF"/>
+                </a:solidFill>
+                <a:latin typeface="Arial"/>
+              </a:defRPr>
+            </a:pPr>
+            <a:r>
+              <a:t>National University</a:t>
+            </a:r>
+            <a:br/>
+            <a:r>
+              <a:t>of Singapore</a:t>
+            </a:r>
+          </a:p>
+        </p:txBody>
+      </p:sp>
+      <p:sp>
+        <p:nvSpPr>
+          <p:cNvPr id="6" name="TextBox 5"/>
+          <p:cNvSpPr txBox="1"/>
+          <p:nvPr/>
+        </p:nvSpPr>
+        <p:spPr>
+          <a:xfrm>
+            <a:off x="1188720" y="91440"/>
+            <a:ext cx="8686800" cy="640080"/>
+          </a:xfrm>
+          <a:prstGeom prst="rect">
+            <a:avLst/>
+          </a:prstGeom>
+          <a:noFill/>
+        </p:spPr>
+        <p:txBody>
+          <a:bodyPr wrap="square">
+            <a:spAutoFit/>
+          </a:bodyPr>
+          <a:lstStyle/>
+          <a:p>
+            <a:pPr algn="l">
+              <a:defRPr sz="3200" b="1">
+                <a:solidFill>
+                  <a:srgbClr val="FFFFFF"/>
+                </a:solidFill>
                 <a:latin typeface="Calibri"/>
               </a:defRPr>
             </a:pPr>
@@ -4215,7 +4522,86 @@
       </p:sp>
       <p:sp>
         <p:nvSpPr>
-          <p:cNvPr id="4" name="Oval 3"/>
+          <p:cNvPr id="7" name="Rectangle 6"/>
+          <p:cNvSpPr/>
+          <p:nvPr/>
+        </p:nvSpPr>
+        <p:spPr>
+          <a:xfrm>
+            <a:off x="0" y="6172200"/>
+            <a:ext cx="12191695" cy="54864"/>
+          </a:xfrm>
+          <a:prstGeom prst="rect">
+            <a:avLst/>
+          </a:prstGeom>
+          <a:solidFill>
+            <a:srgbClr val="EF7C00"/>
+          </a:solidFill>
+          <a:ln>
+            <a:noFill/>
+          </a:ln>
+        </p:spPr>
+        <p:style>
+          <a:lnRef idx="1">
+            <a:schemeClr val="accent1"/>
+          </a:lnRef>
+          <a:fillRef idx="3">
+            <a:schemeClr val="accent1"/>
+          </a:fillRef>
+          <a:effectRef idx="2">
+            <a:schemeClr val="accent1"/>
+          </a:effectRef>
+          <a:fontRef idx="minor">
+            <a:schemeClr val="lt1"/>
+          </a:fontRef>
+        </p:style>
+        <p:txBody>
+          <a:bodyPr rtlCol="0" anchor="ctr"/>
+          <a:lstStyle/>
+          <a:p>
+            <a:pPr algn="ctr"/>
+          </a:p>
+        </p:txBody>
+      </p:sp>
+      <p:sp>
+        <p:nvSpPr>
+          <p:cNvPr id="8" name="TextBox 7"/>
+          <p:cNvSpPr txBox="1"/>
+          <p:nvPr/>
+        </p:nvSpPr>
+        <p:spPr>
+          <a:xfrm>
+            <a:off x="274320" y="6400800"/>
+            <a:ext cx="7315200" cy="274320"/>
+          </a:xfrm>
+          <a:prstGeom prst="rect">
+            <a:avLst/>
+          </a:prstGeom>
+          <a:noFill/>
+        </p:spPr>
+        <p:txBody>
+          <a:bodyPr wrap="square">
+            <a:spAutoFit/>
+          </a:bodyPr>
+          <a:lstStyle/>
+          <a:p>
+            <a:pPr algn="l">
+              <a:defRPr sz="800" b="0">
+                <a:solidFill>
+                  <a:srgbClr val="FFFFFF"/>
+                </a:solidFill>
+                <a:latin typeface="Calibri"/>
+              </a:defRPr>
+            </a:pPr>
+            <a:r>
+              <a:t>© Copyright National University of Singapore. All Rights Reserved.</a:t>
+            </a:r>
+          </a:p>
+        </p:txBody>
+      </p:sp>
+      <p:sp>
+        <p:nvSpPr>
+          <p:cNvPr id="9" name="Oval 8"/>
           <p:cNvSpPr/>
           <p:nvPr/>
         </p:nvSpPr>
@@ -4267,13 +4653,13 @@
       </p:sp>
       <p:sp>
         <p:nvSpPr>
-          <p:cNvPr id="5" name="TextBox 4"/>
+          <p:cNvPr id="10" name="TextBox 9"/>
           <p:cNvSpPr txBox="1"/>
           <p:nvPr/>
         </p:nvSpPr>
         <p:spPr>
           <a:xfrm>
-            <a:off x="457200" y="1097280"/>
+            <a:off x="1188720" y="1188720"/>
             <a:ext cx="5029200" cy="365760"/>
           </a:xfrm>
           <a:prstGeom prst="rect">
@@ -4303,13 +4689,13 @@
       </p:sp>
       <p:sp>
         <p:nvSpPr>
-          <p:cNvPr id="6" name="Rounded Rectangle 5"/>
+          <p:cNvPr id="11" name="Rounded Rectangle 10"/>
           <p:cNvSpPr/>
           <p:nvPr/>
         </p:nvSpPr>
         <p:spPr>
           <a:xfrm>
-            <a:off x="457200" y="1554480"/>
+            <a:off x="1188720" y="1645920"/>
             <a:ext cx="5029200" cy="914400"/>
           </a:xfrm>
           <a:prstGeom prst="roundRect">
@@ -4346,7 +4732,7 @@
               </a:spcAft>
               <a:defRPr sz="1400">
                 <a:solidFill>
-                  <a:srgbClr val="2D2D2D"/>
+                  <a:srgbClr val="EF7C00"/>
                 </a:solidFill>
                 <a:latin typeface="Calibri"/>
               </a:defRPr>
@@ -4362,7 +4748,7 @@
               </a:spcAft>
               <a:defRPr sz="1400">
                 <a:solidFill>
-                  <a:srgbClr val="2D2D2D"/>
+                  <a:srgbClr val="EF7C00"/>
                 </a:solidFill>
                 <a:latin typeface="Calibri"/>
               </a:defRPr>
@@ -4378,7 +4764,7 @@
               </a:spcAft>
               <a:defRPr sz="1400">
                 <a:solidFill>
-                  <a:srgbClr val="2D2D2D"/>
+                  <a:srgbClr val="EF7C00"/>
                 </a:solidFill>
                 <a:latin typeface="Calibri"/>
               </a:defRPr>
@@ -4391,13 +4777,13 @@
       </p:sp>
       <p:sp>
         <p:nvSpPr>
-          <p:cNvPr id="7" name="TextBox 6"/>
+          <p:cNvPr id="12" name="TextBox 11"/>
           <p:cNvSpPr txBox="1"/>
           <p:nvPr/>
         </p:nvSpPr>
         <p:spPr>
           <a:xfrm>
-            <a:off x="457200" y="2651760"/>
+            <a:off x="1188720" y="2743200"/>
             <a:ext cx="5029200" cy="365760"/>
           </a:xfrm>
           <a:prstGeom prst="rect">
@@ -4427,13 +4813,13 @@
       </p:sp>
       <p:sp>
         <p:nvSpPr>
-          <p:cNvPr id="8" name="Rounded Rectangle 7"/>
+          <p:cNvPr id="13" name="Rounded Rectangle 12"/>
           <p:cNvSpPr/>
           <p:nvPr/>
         </p:nvSpPr>
         <p:spPr>
           <a:xfrm>
-            <a:off x="457200" y="3108960"/>
+            <a:off x="1188720" y="3200400"/>
             <a:ext cx="5029200" cy="2011680"/>
           </a:xfrm>
           <a:prstGeom prst="roundRect">
@@ -4470,7 +4856,7 @@
               </a:spcAft>
               <a:defRPr sz="1300">
                 <a:solidFill>
-                  <a:srgbClr val="2D2D2D"/>
+                  <a:srgbClr val="EF7C00"/>
                 </a:solidFill>
                 <a:latin typeface="Calibri"/>
               </a:defRPr>
@@ -4486,7 +4872,7 @@
               </a:spcAft>
               <a:defRPr sz="1300">
                 <a:solidFill>
-                  <a:srgbClr val="2D2D2D"/>
+                  <a:srgbClr val="EF7C00"/>
                 </a:solidFill>
                 <a:latin typeface="Calibri"/>
               </a:defRPr>
@@ -4502,7 +4888,7 @@
               </a:spcAft>
               <a:defRPr sz="1300">
                 <a:solidFill>
-                  <a:srgbClr val="2D2D2D"/>
+                  <a:srgbClr val="EF7C00"/>
                 </a:solidFill>
                 <a:latin typeface="Calibri"/>
               </a:defRPr>
@@ -4518,7 +4904,7 @@
               </a:spcAft>
               <a:defRPr sz="1300">
                 <a:solidFill>
-                  <a:srgbClr val="2D2D2D"/>
+                  <a:srgbClr val="EF7C00"/>
                 </a:solidFill>
                 <a:latin typeface="Calibri"/>
               </a:defRPr>
@@ -4534,7 +4920,7 @@
               </a:spcAft>
               <a:defRPr sz="1300">
                 <a:solidFill>
-                  <a:srgbClr val="2D2D2D"/>
+                  <a:srgbClr val="EF7C00"/>
                 </a:solidFill>
                 <a:latin typeface="Calibri"/>
               </a:defRPr>
@@ -4550,7 +4936,7 @@
               </a:spcAft>
               <a:defRPr sz="1300">
                 <a:solidFill>
-                  <a:srgbClr val="2D2D2D"/>
+                  <a:srgbClr val="EF7C00"/>
                 </a:solidFill>
                 <a:latin typeface="Calibri"/>
               </a:defRPr>
@@ -4566,7 +4952,7 @@
               </a:spcAft>
               <a:defRPr sz="1300">
                 <a:solidFill>
-                  <a:srgbClr val="2D2D2D"/>
+                  <a:srgbClr val="EF7C00"/>
                 </a:solidFill>
                 <a:latin typeface="Calibri"/>
               </a:defRPr>
@@ -4579,14 +4965,14 @@
       </p:sp>
       <p:sp>
         <p:nvSpPr>
-          <p:cNvPr id="9" name="TextBox 8"/>
+          <p:cNvPr id="14" name="TextBox 13"/>
           <p:cNvSpPr txBox="1"/>
           <p:nvPr/>
         </p:nvSpPr>
         <p:spPr>
           <a:xfrm>
-            <a:off x="6217920" y="1097280"/>
-            <a:ext cx="5486400" cy="365760"/>
+            <a:off x="6675120" y="1188720"/>
+            <a:ext cx="5029200" cy="365760"/>
           </a:xfrm>
           <a:prstGeom prst="rect">
             <a:avLst/>
@@ -4615,14 +5001,14 @@
       </p:sp>
       <p:sp>
         <p:nvSpPr>
-          <p:cNvPr id="10" name="Rounded Rectangle 9"/>
+          <p:cNvPr id="15" name="Rounded Rectangle 14"/>
           <p:cNvSpPr/>
           <p:nvPr/>
         </p:nvSpPr>
         <p:spPr>
           <a:xfrm>
-            <a:off x="6217920" y="1554480"/>
-            <a:ext cx="5029200" cy="365760"/>
+            <a:off x="6675120" y="1645920"/>
+            <a:ext cx="4572000" cy="365760"/>
           </a:xfrm>
           <a:prstGeom prst="roundRect">
             <a:avLst/>
@@ -4667,14 +5053,14 @@
       </p:sp>
       <p:sp>
         <p:nvSpPr>
-          <p:cNvPr id="11" name="Rounded Rectangle 10"/>
+          <p:cNvPr id="16" name="Rounded Rectangle 15"/>
           <p:cNvSpPr/>
           <p:nvPr/>
         </p:nvSpPr>
         <p:spPr>
           <a:xfrm>
-            <a:off x="6217920" y="1965960"/>
-            <a:ext cx="5029200" cy="502920"/>
+            <a:off x="6675120" y="2057400"/>
+            <a:ext cx="4572000" cy="502920"/>
           </a:xfrm>
           <a:prstGeom prst="roundRect">
             <a:avLst/>
@@ -4710,7 +5096,7 @@
               </a:spcAft>
               <a:defRPr sz="1300">
                 <a:solidFill>
-                  <a:srgbClr val="2D2D2D"/>
+                  <a:srgbClr val="EF7C00"/>
                 </a:solidFill>
                 <a:latin typeface="Calibri"/>
               </a:defRPr>
@@ -4726,7 +5112,7 @@
               </a:spcAft>
               <a:defRPr sz="1300">
                 <a:solidFill>
-                  <a:srgbClr val="2D2D2D"/>
+                  <a:srgbClr val="EF7C00"/>
                 </a:solidFill>
                 <a:latin typeface="Calibri"/>
               </a:defRPr>
@@ -4739,20 +5125,20 @@
       </p:sp>
       <p:sp>
         <p:nvSpPr>
-          <p:cNvPr id="12" name="Rounded Rectangle 11"/>
+          <p:cNvPr id="17" name="Rounded Rectangle 16"/>
           <p:cNvSpPr/>
           <p:nvPr/>
         </p:nvSpPr>
         <p:spPr>
           <a:xfrm>
-            <a:off x="6217920" y="2606040"/>
-            <a:ext cx="5029200" cy="365760"/>
+            <a:off x="6675120" y="2697480"/>
+            <a:ext cx="4572000" cy="365760"/>
           </a:xfrm>
           <a:prstGeom prst="roundRect">
             <a:avLst/>
           </a:prstGeom>
           <a:solidFill>
-            <a:srgbClr val="F57C00"/>
+            <a:srgbClr val="EF7C00"/>
           </a:solidFill>
           <a:ln>
             <a:noFill/>
@@ -4791,14 +5177,14 @@
       </p:sp>
       <p:sp>
         <p:nvSpPr>
-          <p:cNvPr id="13" name="Rounded Rectangle 12"/>
+          <p:cNvPr id="18" name="Rounded Rectangle 17"/>
           <p:cNvSpPr/>
           <p:nvPr/>
         </p:nvSpPr>
         <p:spPr>
           <a:xfrm>
-            <a:off x="6217920" y="3017520"/>
-            <a:ext cx="5029200" cy="502920"/>
+            <a:off x="6675120" y="3108960"/>
+            <a:ext cx="4572000" cy="502920"/>
           </a:xfrm>
           <a:prstGeom prst="roundRect">
             <a:avLst/>
@@ -4834,7 +5220,7 @@
               </a:spcAft>
               <a:defRPr sz="1300">
                 <a:solidFill>
-                  <a:srgbClr val="2D2D2D"/>
+                  <a:srgbClr val="EF7C00"/>
                 </a:solidFill>
                 <a:latin typeface="Calibri"/>
               </a:defRPr>
@@ -4847,14 +5233,14 @@
       </p:sp>
       <p:sp>
         <p:nvSpPr>
-          <p:cNvPr id="14" name="Rounded Rectangle 13"/>
+          <p:cNvPr id="19" name="Rounded Rectangle 18"/>
           <p:cNvSpPr/>
           <p:nvPr/>
         </p:nvSpPr>
         <p:spPr>
           <a:xfrm>
-            <a:off x="6217920" y="3657600"/>
-            <a:ext cx="5029200" cy="365760"/>
+            <a:off x="6675120" y="3749040"/>
+            <a:ext cx="4572000" cy="365760"/>
           </a:xfrm>
           <a:prstGeom prst="roundRect">
             <a:avLst/>
@@ -4899,14 +5285,14 @@
       </p:sp>
       <p:sp>
         <p:nvSpPr>
-          <p:cNvPr id="15" name="Rounded Rectangle 14"/>
+          <p:cNvPr id="20" name="Rounded Rectangle 19"/>
           <p:cNvSpPr/>
           <p:nvPr/>
         </p:nvSpPr>
         <p:spPr>
           <a:xfrm>
-            <a:off x="6217920" y="4069080"/>
-            <a:ext cx="5029200" cy="502920"/>
+            <a:off x="6675120" y="4160520"/>
+            <a:ext cx="4572000" cy="502920"/>
           </a:xfrm>
           <a:prstGeom prst="roundRect">
             <a:avLst/>
@@ -4942,7 +5328,7 @@
               </a:spcAft>
               <a:defRPr sz="1300">
                 <a:solidFill>
-                  <a:srgbClr val="2D2D2D"/>
+                  <a:srgbClr val="EF7C00"/>
                 </a:solidFill>
                 <a:latin typeface="Calibri"/>
               </a:defRPr>
@@ -4955,14 +5341,14 @@
       </p:sp>
       <p:sp>
         <p:nvSpPr>
-          <p:cNvPr id="16" name="TextBox 15"/>
+          <p:cNvPr id="21" name="TextBox 20"/>
           <p:cNvSpPr txBox="1"/>
           <p:nvPr/>
         </p:nvSpPr>
         <p:spPr>
           <a:xfrm>
-            <a:off x="6217920" y="4206240"/>
-            <a:ext cx="5029200" cy="274320"/>
+            <a:off x="6675120" y="4206240"/>
+            <a:ext cx="4572000" cy="274320"/>
           </a:xfrm>
           <a:prstGeom prst="rect">
             <a:avLst/>
@@ -4991,14 +5377,14 @@
       </p:sp>
       <p:sp>
         <p:nvSpPr>
-          <p:cNvPr id="17" name="TextBox 16"/>
+          <p:cNvPr id="22" name="TextBox 21"/>
           <p:cNvSpPr txBox="1"/>
           <p:nvPr/>
         </p:nvSpPr>
         <p:spPr>
           <a:xfrm>
-            <a:off x="6217920" y="4480560"/>
-            <a:ext cx="5029200" cy="685800"/>
+            <a:off x="6675120" y="4480560"/>
+            <a:ext cx="4572000" cy="685800"/>
           </a:xfrm>
           <a:prstGeom prst="rect">
             <a:avLst/>
@@ -5017,7 +5403,7 @@
               </a:spcAft>
               <a:defRPr sz="1100">
                 <a:solidFill>
-                  <a:srgbClr val="666666"/>
+                  <a:srgbClr val="CCCCCC"/>
                 </a:solidFill>
                 <a:latin typeface="Consolas"/>
               </a:defRPr>
@@ -5033,7 +5419,7 @@
               </a:spcAft>
               <a:defRPr sz="1100">
                 <a:solidFill>
-                  <a:srgbClr val="666666"/>
+                  <a:srgbClr val="CCCCCC"/>
                 </a:solidFill>
                 <a:latin typeface="Consolas"/>
               </a:defRPr>
@@ -5049,7 +5435,7 @@
               </a:spcAft>
               <a:defRPr sz="1100">
                 <a:solidFill>
-                  <a:srgbClr val="666666"/>
+                  <a:srgbClr val="CCCCCC"/>
                 </a:solidFill>
                 <a:latin typeface="Consolas"/>
               </a:defRPr>
@@ -5057,49 +5443,6 @@
             <a:r>
               <a:t>dataset_loader.py: derive_activity_label() assigns labels</a:t>
             </a:r>
-          </a:p>
-        </p:txBody>
-      </p:sp>
-      <p:sp>
-        <p:nvSpPr>
-          <p:cNvPr id="18" name="Rectangle 17"/>
-          <p:cNvSpPr/>
-          <p:nvPr/>
-        </p:nvSpPr>
-        <p:spPr>
-          <a:xfrm>
-            <a:off x="0" y="6803136"/>
-            <a:ext cx="12191695" cy="54864"/>
-          </a:xfrm>
-          <a:prstGeom prst="rect">
-            <a:avLst/>
-          </a:prstGeom>
-          <a:solidFill>
-            <a:srgbClr val="28A745"/>
-          </a:solidFill>
-          <a:ln>
-            <a:noFill/>
-          </a:ln>
-        </p:spPr>
-        <p:style>
-          <a:lnRef idx="1">
-            <a:schemeClr val="accent1"/>
-          </a:lnRef>
-          <a:fillRef idx="3">
-            <a:schemeClr val="accent1"/>
-          </a:fillRef>
-          <a:effectRef idx="2">
-            <a:schemeClr val="accent1"/>
-          </a:effectRef>
-          <a:fontRef idx="minor">
-            <a:schemeClr val="lt1"/>
-          </a:fontRef>
-        </p:style>
-        <p:txBody>
-          <a:bodyPr rtlCol="0" anchor="ctr"/>
-          <a:lstStyle/>
-          <a:p>
-            <a:pPr algn="ctr"/>
           </a:p>
         </p:txBody>
       </p:sp>
@@ -5117,7 +5460,7 @@
     <p:bg>
       <p:bgPr>
         <a:solidFill>
-          <a:srgbClr val="FFFFFF"/>
+          <a:srgbClr val="003D7C"/>
         </a:solidFill>
         <a:effectLst/>
       </p:bgPr>
@@ -5138,9 +5481,338 @@
         <p:spPr>
           <a:xfrm>
             <a:off x="0" y="0"/>
-            <a:ext cx="12191695" cy="914400"/>
+            <a:ext cx="1005840" cy="822960"/>
           </a:xfrm>
           <a:prstGeom prst="rect">
+            <a:avLst/>
+          </a:prstGeom>
+          <a:solidFill>
+            <a:srgbClr val="FFE033"/>
+          </a:solidFill>
+          <a:ln>
+            <a:noFill/>
+          </a:ln>
+        </p:spPr>
+        <p:style>
+          <a:lnRef idx="1">
+            <a:schemeClr val="accent1"/>
+          </a:lnRef>
+          <a:fillRef idx="3">
+            <a:schemeClr val="accent1"/>
+          </a:fillRef>
+          <a:effectRef idx="2">
+            <a:schemeClr val="accent1"/>
+          </a:effectRef>
+          <a:fontRef idx="minor">
+            <a:schemeClr val="lt1"/>
+          </a:fontRef>
+        </p:style>
+        <p:txBody>
+          <a:bodyPr rtlCol="0" anchor="ctr"/>
+          <a:lstStyle/>
+          <a:p>
+            <a:pPr algn="ctr"/>
+          </a:p>
+        </p:txBody>
+      </p:sp>
+      <p:sp>
+        <p:nvSpPr>
+          <p:cNvPr id="3" name="Rectangle 2"/>
+          <p:cNvSpPr/>
+          <p:nvPr/>
+        </p:nvSpPr>
+        <p:spPr>
+          <a:xfrm>
+            <a:off x="457200" y="822960"/>
+            <a:ext cx="54864" cy="5303520"/>
+          </a:xfrm>
+          <a:prstGeom prst="rect">
+            <a:avLst/>
+          </a:prstGeom>
+          <a:solidFill>
+            <a:srgbClr val="EF7C00"/>
+          </a:solidFill>
+          <a:ln>
+            <a:noFill/>
+          </a:ln>
+        </p:spPr>
+        <p:style>
+          <a:lnRef idx="1">
+            <a:schemeClr val="accent1"/>
+          </a:lnRef>
+          <a:fillRef idx="3">
+            <a:schemeClr val="accent1"/>
+          </a:fillRef>
+          <a:effectRef idx="2">
+            <a:schemeClr val="accent1"/>
+          </a:effectRef>
+          <a:fontRef idx="minor">
+            <a:schemeClr val="lt1"/>
+          </a:fontRef>
+        </p:style>
+        <p:txBody>
+          <a:bodyPr rtlCol="0" anchor="ctr"/>
+          <a:lstStyle/>
+          <a:p>
+            <a:pPr algn="ctr"/>
+          </a:p>
+        </p:txBody>
+      </p:sp>
+      <p:sp>
+        <p:nvSpPr>
+          <p:cNvPr id="4" name="TextBox 3"/>
+          <p:cNvSpPr txBox="1"/>
+          <p:nvPr/>
+        </p:nvSpPr>
+        <p:spPr>
+          <a:xfrm>
+            <a:off x="10332720" y="137160"/>
+            <a:ext cx="1645920" cy="457200"/>
+          </a:xfrm>
+          <a:prstGeom prst="rect">
+            <a:avLst/>
+          </a:prstGeom>
+          <a:noFill/>
+        </p:spPr>
+        <p:txBody>
+          <a:bodyPr wrap="square">
+            <a:spAutoFit/>
+          </a:bodyPr>
+          <a:lstStyle/>
+          <a:p>
+            <a:pPr algn="r">
+              <a:defRPr sz="2400" b="1">
+                <a:solidFill>
+                  <a:srgbClr val="FFFFFF"/>
+                </a:solidFill>
+                <a:latin typeface="Arial"/>
+              </a:defRPr>
+            </a:pPr>
+            <a:r>
+              <a:t>NUS</a:t>
+            </a:r>
+          </a:p>
+        </p:txBody>
+      </p:sp>
+      <p:sp>
+        <p:nvSpPr>
+          <p:cNvPr id="5" name="TextBox 4"/>
+          <p:cNvSpPr txBox="1"/>
+          <p:nvPr/>
+        </p:nvSpPr>
+        <p:spPr>
+          <a:xfrm>
+            <a:off x="10332720" y="457200"/>
+            <a:ext cx="1645920" cy="320040"/>
+          </a:xfrm>
+          <a:prstGeom prst="rect">
+            <a:avLst/>
+          </a:prstGeom>
+          <a:noFill/>
+        </p:spPr>
+        <p:txBody>
+          <a:bodyPr wrap="square">
+            <a:spAutoFit/>
+          </a:bodyPr>
+          <a:lstStyle/>
+          <a:p>
+            <a:pPr algn="r">
+              <a:defRPr sz="800" b="0">
+                <a:solidFill>
+                  <a:srgbClr val="FFFFFF"/>
+                </a:solidFill>
+                <a:latin typeface="Arial"/>
+              </a:defRPr>
+            </a:pPr>
+            <a:r>
+              <a:t>National University</a:t>
+            </a:r>
+            <a:br/>
+            <a:r>
+              <a:t>of Singapore</a:t>
+            </a:r>
+          </a:p>
+        </p:txBody>
+      </p:sp>
+      <p:sp>
+        <p:nvSpPr>
+          <p:cNvPr id="6" name="TextBox 5"/>
+          <p:cNvSpPr txBox="1"/>
+          <p:nvPr/>
+        </p:nvSpPr>
+        <p:spPr>
+          <a:xfrm>
+            <a:off x="1188720" y="91440"/>
+            <a:ext cx="8686800" cy="640080"/>
+          </a:xfrm>
+          <a:prstGeom prst="rect">
+            <a:avLst/>
+          </a:prstGeom>
+          <a:noFill/>
+        </p:spPr>
+        <p:txBody>
+          <a:bodyPr wrap="square">
+            <a:spAutoFit/>
+          </a:bodyPr>
+          <a:lstStyle/>
+          <a:p>
+            <a:pPr algn="l">
+              <a:defRPr sz="3200" b="1">
+                <a:solidFill>
+                  <a:srgbClr val="FFFFFF"/>
+                </a:solidFill>
+                <a:latin typeface="Calibri"/>
+              </a:defRPr>
+            </a:pPr>
+            <a:r>
+              <a:t>2. Machine Learning / Deep Learning Techniques</a:t>
+            </a:r>
+          </a:p>
+        </p:txBody>
+      </p:sp>
+      <p:sp>
+        <p:nvSpPr>
+          <p:cNvPr id="7" name="Rectangle 6"/>
+          <p:cNvSpPr/>
+          <p:nvPr/>
+        </p:nvSpPr>
+        <p:spPr>
+          <a:xfrm>
+            <a:off x="0" y="6172200"/>
+            <a:ext cx="12191695" cy="54864"/>
+          </a:xfrm>
+          <a:prstGeom prst="rect">
+            <a:avLst/>
+          </a:prstGeom>
+          <a:solidFill>
+            <a:srgbClr val="EF7C00"/>
+          </a:solidFill>
+          <a:ln>
+            <a:noFill/>
+          </a:ln>
+        </p:spPr>
+        <p:style>
+          <a:lnRef idx="1">
+            <a:schemeClr val="accent1"/>
+          </a:lnRef>
+          <a:fillRef idx="3">
+            <a:schemeClr val="accent1"/>
+          </a:fillRef>
+          <a:effectRef idx="2">
+            <a:schemeClr val="accent1"/>
+          </a:effectRef>
+          <a:fontRef idx="minor">
+            <a:schemeClr val="lt1"/>
+          </a:fontRef>
+        </p:style>
+        <p:txBody>
+          <a:bodyPr rtlCol="0" anchor="ctr"/>
+          <a:lstStyle/>
+          <a:p>
+            <a:pPr algn="ctr"/>
+          </a:p>
+        </p:txBody>
+      </p:sp>
+      <p:sp>
+        <p:nvSpPr>
+          <p:cNvPr id="8" name="TextBox 7"/>
+          <p:cNvSpPr txBox="1"/>
+          <p:nvPr/>
+        </p:nvSpPr>
+        <p:spPr>
+          <a:xfrm>
+            <a:off x="274320" y="6400800"/>
+            <a:ext cx="7315200" cy="274320"/>
+          </a:xfrm>
+          <a:prstGeom prst="rect">
+            <a:avLst/>
+          </a:prstGeom>
+          <a:noFill/>
+        </p:spPr>
+        <p:txBody>
+          <a:bodyPr wrap="square">
+            <a:spAutoFit/>
+          </a:bodyPr>
+          <a:lstStyle/>
+          <a:p>
+            <a:pPr algn="l">
+              <a:defRPr sz="800" b="0">
+                <a:solidFill>
+                  <a:srgbClr val="FFFFFF"/>
+                </a:solidFill>
+                <a:latin typeface="Calibri"/>
+              </a:defRPr>
+            </a:pPr>
+            <a:r>
+              <a:t>© Copyright National University of Singapore. All Rights Reserved.</a:t>
+            </a:r>
+          </a:p>
+        </p:txBody>
+      </p:sp>
+      <p:sp>
+        <p:nvSpPr>
+          <p:cNvPr id="9" name="Oval 8"/>
+          <p:cNvSpPr/>
+          <p:nvPr/>
+        </p:nvSpPr>
+        <p:spPr>
+          <a:xfrm>
+            <a:off x="274320" y="137160"/>
+            <a:ext cx="548640" cy="548640"/>
+          </a:xfrm>
+          <a:prstGeom prst="ellipse">
+            <a:avLst/>
+          </a:prstGeom>
+          <a:solidFill>
+            <a:srgbClr val="28A745"/>
+          </a:solidFill>
+          <a:ln>
+            <a:noFill/>
+          </a:ln>
+        </p:spPr>
+        <p:style>
+          <a:lnRef idx="1">
+            <a:schemeClr val="accent1"/>
+          </a:lnRef>
+          <a:fillRef idx="3">
+            <a:schemeClr val="accent1"/>
+          </a:fillRef>
+          <a:effectRef idx="2">
+            <a:schemeClr val="accent1"/>
+          </a:effectRef>
+          <a:fontRef idx="minor">
+            <a:schemeClr val="lt1"/>
+          </a:fontRef>
+        </p:style>
+        <p:txBody>
+          <a:bodyPr rtlCol="0" anchor="ctr"/>
+          <a:lstStyle/>
+          <a:p>
+            <a:pPr algn="ctr">
+              <a:defRPr sz="2800" b="1">
+                <a:solidFill>
+                  <a:srgbClr val="FFFFFF"/>
+                </a:solidFill>
+              </a:defRPr>
+            </a:pPr>
+            <a:r>
+              <a:t>✓</a:t>
+            </a:r>
+          </a:p>
+        </p:txBody>
+      </p:sp>
+      <p:sp>
+        <p:nvSpPr>
+          <p:cNvPr id="10" name="Rounded Rectangle 9"/>
+          <p:cNvSpPr/>
+          <p:nvPr/>
+        </p:nvSpPr>
+        <p:spPr>
+          <a:xfrm>
+            <a:off x="1188720" y="1188720"/>
+            <a:ext cx="4572000" cy="457200"/>
+          </a:xfrm>
+          <a:prstGeom prst="roundRect">
             <a:avLst/>
           </a:prstGeom>
           <a:solidFill>
@@ -5165,65 +5837,38 @@
           </a:fontRef>
         </p:style>
         <p:txBody>
-          <a:bodyPr rtlCol="0" anchor="ctr"/>
-          <a:lstStyle/>
-          <a:p>
-            <a:pPr algn="ctr"/>
-          </a:p>
-        </p:txBody>
-      </p:sp>
-      <p:sp>
-        <p:nvSpPr>
-          <p:cNvPr id="3" name="TextBox 2"/>
-          <p:cNvSpPr txBox="1"/>
-          <p:nvPr/>
-        </p:nvSpPr>
-        <p:spPr>
-          <a:xfrm>
-            <a:off x="457200" y="137160"/>
-            <a:ext cx="11277295" cy="640080"/>
-          </a:xfrm>
-          <a:prstGeom prst="rect">
-            <a:avLst/>
-          </a:prstGeom>
-          <a:noFill/>
-        </p:spPr>
-        <p:txBody>
-          <a:bodyPr wrap="square">
-            <a:spAutoFit/>
-          </a:bodyPr>
+          <a:bodyPr rtlCol="0" anchor="ctr" wrap="square"/>
           <a:lstStyle/>
           <a:p>
             <a:pPr algn="ctr">
-              <a:defRPr sz="2800" b="1">
+              <a:defRPr sz="1800" b="1">
                 <a:solidFill>
                   <a:srgbClr val="FFFFFF"/>
                 </a:solidFill>
-                <a:latin typeface="Calibri"/>
-              </a:defRPr>
-            </a:pPr>
-            <a:r>
-              <a:t>2. Machine Learning / Deep Learning Techniques</a:t>
-            </a:r>
-          </a:p>
-        </p:txBody>
-      </p:sp>
-      <p:sp>
-        <p:nvSpPr>
-          <p:cNvPr id="4" name="Oval 3"/>
+              </a:defRPr>
+            </a:pPr>
+            <a:r>
+              <a:t>Machine Learning  —  Tier 1 (7 Models)</a:t>
+            </a:r>
+          </a:p>
+        </p:txBody>
+      </p:sp>
+      <p:sp>
+        <p:nvSpPr>
+          <p:cNvPr id="11" name="Rounded Rectangle 10"/>
           <p:cNvSpPr/>
           <p:nvPr/>
         </p:nvSpPr>
         <p:spPr>
           <a:xfrm>
-            <a:off x="274320" y="137160"/>
-            <a:ext cx="548640" cy="548640"/>
-          </a:xfrm>
-          <a:prstGeom prst="ellipse">
+            <a:off x="1188720" y="1783080"/>
+            <a:ext cx="4572000" cy="2468880"/>
+          </a:xfrm>
+          <a:prstGeom prst="roundRect">
             <a:avLst/>
           </a:prstGeom>
           <a:solidFill>
-            <a:srgbClr val="28A745"/>
+            <a:srgbClr val="E8F4FD"/>
           </a:solidFill>
           <a:ln>
             <a:noFill/>
@@ -5244,32 +5889,132 @@
           </a:fontRef>
         </p:style>
         <p:txBody>
-          <a:bodyPr rtlCol="0" anchor="ctr"/>
-          <a:lstStyle/>
-          <a:p>
-            <a:pPr algn="ctr">
-              <a:defRPr sz="2800" b="1">
-                <a:solidFill>
-                  <a:srgbClr val="FFFFFF"/>
-                </a:solidFill>
-              </a:defRPr>
-            </a:pPr>
-            <a:r>
-              <a:t>✓</a:t>
-            </a:r>
-          </a:p>
-        </p:txBody>
-      </p:sp>
-      <p:sp>
-        <p:nvSpPr>
-          <p:cNvPr id="5" name="Rounded Rectangle 4"/>
+          <a:bodyPr rtlCol="0" anchor="ctr" wrap="square" lIns="137160" rIns="137160" tIns="91440" bIns="91440"/>
+          <a:lstStyle/>
+          <a:p>
+            <a:pPr algn="l">
+              <a:spcAft>
+                <a:spcPts val="200"/>
+              </a:spcAft>
+              <a:defRPr sz="1500">
+                <a:solidFill>
+                  <a:srgbClr val="EF7C00"/>
+                </a:solidFill>
+                <a:latin typeface="Calibri"/>
+              </a:defRPr>
+            </a:pPr>
+            <a:r>
+              <a:t>• SVM (Support Vector Machine)</a:t>
+            </a:r>
+          </a:p>
+          <a:p>
+            <a:pPr algn="l">
+              <a:spcAft>
+                <a:spcPts val="200"/>
+              </a:spcAft>
+              <a:defRPr sz="1500">
+                <a:solidFill>
+                  <a:srgbClr val="EF7C00"/>
+                </a:solidFill>
+                <a:latin typeface="Calibri"/>
+              </a:defRPr>
+            </a:pPr>
+            <a:r>
+              <a:t>• Naive Bayes</a:t>
+            </a:r>
+          </a:p>
+          <a:p>
+            <a:pPr algn="l">
+              <a:spcAft>
+                <a:spcPts val="200"/>
+              </a:spcAft>
+              <a:defRPr sz="1500">
+                <a:solidFill>
+                  <a:srgbClr val="EF7C00"/>
+                </a:solidFill>
+                <a:latin typeface="Calibri"/>
+              </a:defRPr>
+            </a:pPr>
+            <a:r>
+              <a:t>• Decision Tree</a:t>
+            </a:r>
+          </a:p>
+          <a:p>
+            <a:pPr algn="l">
+              <a:spcAft>
+                <a:spcPts val="200"/>
+              </a:spcAft>
+              <a:defRPr sz="1500">
+                <a:solidFill>
+                  <a:srgbClr val="EF7C00"/>
+                </a:solidFill>
+                <a:latin typeface="Calibri"/>
+              </a:defRPr>
+            </a:pPr>
+            <a:r>
+              <a:t>• Random Forest</a:t>
+            </a:r>
+          </a:p>
+          <a:p>
+            <a:pPr algn="l">
+              <a:spcAft>
+                <a:spcPts val="200"/>
+              </a:spcAft>
+              <a:defRPr sz="1500">
+                <a:solidFill>
+                  <a:srgbClr val="EF7C00"/>
+                </a:solidFill>
+                <a:latin typeface="Calibri"/>
+              </a:defRPr>
+            </a:pPr>
+            <a:r>
+              <a:t>• KNN (K-Nearest Neighbors)</a:t>
+            </a:r>
+          </a:p>
+          <a:p>
+            <a:pPr algn="l">
+              <a:spcAft>
+                <a:spcPts val="200"/>
+              </a:spcAft>
+              <a:defRPr sz="1500">
+                <a:solidFill>
+                  <a:srgbClr val="EF7C00"/>
+                </a:solidFill>
+                <a:latin typeface="Calibri"/>
+              </a:defRPr>
+            </a:pPr>
+            <a:r>
+              <a:t>• XGBoost (Gradient Boosting)</a:t>
+            </a:r>
+          </a:p>
+          <a:p>
+            <a:pPr algn="l">
+              <a:spcAft>
+                <a:spcPts val="200"/>
+              </a:spcAft>
+              <a:defRPr sz="1500">
+                <a:solidFill>
+                  <a:srgbClr val="EF7C00"/>
+                </a:solidFill>
+                <a:latin typeface="Calibri"/>
+              </a:defRPr>
+            </a:pPr>
+            <a:r>
+              <a:t>• LightGBM (Gradient Boosting)</a:t>
+            </a:r>
+          </a:p>
+        </p:txBody>
+      </p:sp>
+      <p:sp>
+        <p:nvSpPr>
+          <p:cNvPr id="12" name="Rounded Rectangle 11"/>
           <p:cNvSpPr/>
           <p:nvPr/>
         </p:nvSpPr>
         <p:spPr>
           <a:xfrm>
-            <a:off x="457200" y="1097280"/>
-            <a:ext cx="5303520" cy="457200"/>
+            <a:off x="1828800" y="4389120"/>
+            <a:ext cx="3200400" cy="411480"/>
           </a:xfrm>
           <a:prstGeom prst="roundRect">
             <a:avLst/>
@@ -5300,34 +6045,34 @@
           <a:lstStyle/>
           <a:p>
             <a:pPr algn="ctr">
-              <a:defRPr sz="1800" b="1">
+              <a:defRPr sz="1500" b="1">
                 <a:solidFill>
                   <a:srgbClr val="FFFFFF"/>
                 </a:solidFill>
               </a:defRPr>
             </a:pPr>
             <a:r>
-              <a:t>Machine Learning  —  Tier 1 (7 Models)</a:t>
-            </a:r>
-          </a:p>
-        </p:txBody>
-      </p:sp>
-      <p:sp>
-        <p:nvSpPr>
-          <p:cNvPr id="6" name="Rounded Rectangle 5"/>
+              <a:t>scikit-learn library</a:t>
+            </a:r>
+          </a:p>
+        </p:txBody>
+      </p:sp>
+      <p:sp>
+        <p:nvSpPr>
+          <p:cNvPr id="13" name="Rounded Rectangle 12"/>
           <p:cNvSpPr/>
           <p:nvPr/>
         </p:nvSpPr>
         <p:spPr>
           <a:xfrm>
-            <a:off x="457200" y="1691640"/>
-            <a:ext cx="5303520" cy="2468880"/>
+            <a:off x="6675120" y="1188720"/>
+            <a:ext cx="4572000" cy="457200"/>
           </a:xfrm>
           <a:prstGeom prst="roundRect">
             <a:avLst/>
           </a:prstGeom>
           <a:solidFill>
-            <a:srgbClr val="E8F4FD"/>
+            <a:srgbClr val="EF7C00"/>
           </a:solidFill>
           <a:ln>
             <a:noFill/>
@@ -5348,210 +6093,6 @@
           </a:fontRef>
         </p:style>
         <p:txBody>
-          <a:bodyPr rtlCol="0" anchor="ctr" wrap="square" lIns="137160" rIns="137160" tIns="91440" bIns="91440"/>
-          <a:lstStyle/>
-          <a:p>
-            <a:pPr algn="l">
-              <a:spcAft>
-                <a:spcPts val="200"/>
-              </a:spcAft>
-              <a:defRPr sz="1500">
-                <a:solidFill>
-                  <a:srgbClr val="2D2D2D"/>
-                </a:solidFill>
-                <a:latin typeface="Calibri"/>
-              </a:defRPr>
-            </a:pPr>
-            <a:r>
-              <a:t>• SVM (Support Vector Machine)</a:t>
-            </a:r>
-          </a:p>
-          <a:p>
-            <a:pPr algn="l">
-              <a:spcAft>
-                <a:spcPts val="200"/>
-              </a:spcAft>
-              <a:defRPr sz="1500">
-                <a:solidFill>
-                  <a:srgbClr val="2D2D2D"/>
-                </a:solidFill>
-                <a:latin typeface="Calibri"/>
-              </a:defRPr>
-            </a:pPr>
-            <a:r>
-              <a:t>• Naive Bayes</a:t>
-            </a:r>
-          </a:p>
-          <a:p>
-            <a:pPr algn="l">
-              <a:spcAft>
-                <a:spcPts val="200"/>
-              </a:spcAft>
-              <a:defRPr sz="1500">
-                <a:solidFill>
-                  <a:srgbClr val="2D2D2D"/>
-                </a:solidFill>
-                <a:latin typeface="Calibri"/>
-              </a:defRPr>
-            </a:pPr>
-            <a:r>
-              <a:t>• Decision Tree</a:t>
-            </a:r>
-          </a:p>
-          <a:p>
-            <a:pPr algn="l">
-              <a:spcAft>
-                <a:spcPts val="200"/>
-              </a:spcAft>
-              <a:defRPr sz="1500">
-                <a:solidFill>
-                  <a:srgbClr val="2D2D2D"/>
-                </a:solidFill>
-                <a:latin typeface="Calibri"/>
-              </a:defRPr>
-            </a:pPr>
-            <a:r>
-              <a:t>• Random Forest</a:t>
-            </a:r>
-          </a:p>
-          <a:p>
-            <a:pPr algn="l">
-              <a:spcAft>
-                <a:spcPts val="200"/>
-              </a:spcAft>
-              <a:defRPr sz="1500">
-                <a:solidFill>
-                  <a:srgbClr val="2D2D2D"/>
-                </a:solidFill>
-                <a:latin typeface="Calibri"/>
-              </a:defRPr>
-            </a:pPr>
-            <a:r>
-              <a:t>• KNN (K-Nearest Neighbors)</a:t>
-            </a:r>
-          </a:p>
-          <a:p>
-            <a:pPr algn="l">
-              <a:spcAft>
-                <a:spcPts val="200"/>
-              </a:spcAft>
-              <a:defRPr sz="1500">
-                <a:solidFill>
-                  <a:srgbClr val="2D2D2D"/>
-                </a:solidFill>
-                <a:latin typeface="Calibri"/>
-              </a:defRPr>
-            </a:pPr>
-            <a:r>
-              <a:t>• XGBoost (Gradient Boosting)</a:t>
-            </a:r>
-          </a:p>
-          <a:p>
-            <a:pPr algn="l">
-              <a:spcAft>
-                <a:spcPts val="200"/>
-              </a:spcAft>
-              <a:defRPr sz="1500">
-                <a:solidFill>
-                  <a:srgbClr val="2D2D2D"/>
-                </a:solidFill>
-                <a:latin typeface="Calibri"/>
-              </a:defRPr>
-            </a:pPr>
-            <a:r>
-              <a:t>• LightGBM (Gradient Boosting)</a:t>
-            </a:r>
-          </a:p>
-        </p:txBody>
-      </p:sp>
-      <p:sp>
-        <p:nvSpPr>
-          <p:cNvPr id="7" name="Rounded Rectangle 6"/>
-          <p:cNvSpPr/>
-          <p:nvPr/>
-        </p:nvSpPr>
-        <p:spPr>
-          <a:xfrm>
-            <a:off x="1371600" y="4297680"/>
-            <a:ext cx="3474720" cy="411480"/>
-          </a:xfrm>
-          <a:prstGeom prst="roundRect">
-            <a:avLst/>
-          </a:prstGeom>
-          <a:solidFill>
-            <a:srgbClr val="007ACC"/>
-          </a:solidFill>
-          <a:ln>
-            <a:noFill/>
-          </a:ln>
-        </p:spPr>
-        <p:style>
-          <a:lnRef idx="1">
-            <a:schemeClr val="accent1"/>
-          </a:lnRef>
-          <a:fillRef idx="3">
-            <a:schemeClr val="accent1"/>
-          </a:fillRef>
-          <a:effectRef idx="2">
-            <a:schemeClr val="accent1"/>
-          </a:effectRef>
-          <a:fontRef idx="minor">
-            <a:schemeClr val="lt1"/>
-          </a:fontRef>
-        </p:style>
-        <p:txBody>
-          <a:bodyPr rtlCol="0" anchor="ctr" wrap="square"/>
-          <a:lstStyle/>
-          <a:p>
-            <a:pPr algn="ctr">
-              <a:defRPr sz="1500" b="1">
-                <a:solidFill>
-                  <a:srgbClr val="FFFFFF"/>
-                </a:solidFill>
-              </a:defRPr>
-            </a:pPr>
-            <a:r>
-              <a:t>scikit-learn library</a:t>
-            </a:r>
-          </a:p>
-        </p:txBody>
-      </p:sp>
-      <p:sp>
-        <p:nvSpPr>
-          <p:cNvPr id="8" name="Rounded Rectangle 7"/>
-          <p:cNvSpPr/>
-          <p:nvPr/>
-        </p:nvSpPr>
-        <p:spPr>
-          <a:xfrm>
-            <a:off x="6400800" y="1097280"/>
-            <a:ext cx="5303520" cy="457200"/>
-          </a:xfrm>
-          <a:prstGeom prst="roundRect">
-            <a:avLst/>
-          </a:prstGeom>
-          <a:solidFill>
-            <a:srgbClr val="F57C00"/>
-          </a:solidFill>
-          <a:ln>
-            <a:noFill/>
-          </a:ln>
-        </p:spPr>
-        <p:style>
-          <a:lnRef idx="1">
-            <a:schemeClr val="accent1"/>
-          </a:lnRef>
-          <a:fillRef idx="3">
-            <a:schemeClr val="accent1"/>
-          </a:fillRef>
-          <a:effectRef idx="2">
-            <a:schemeClr val="accent1"/>
-          </a:effectRef>
-          <a:fontRef idx="minor">
-            <a:schemeClr val="lt1"/>
-          </a:fontRef>
-        </p:style>
-        <p:txBody>
           <a:bodyPr rtlCol="0" anchor="ctr" wrap="square"/>
           <a:lstStyle/>
           <a:p>
@@ -5570,14 +6111,14 @@
       </p:sp>
       <p:sp>
         <p:nvSpPr>
-          <p:cNvPr id="9" name="Rounded Rectangle 8"/>
+          <p:cNvPr id="14" name="Rounded Rectangle 13"/>
           <p:cNvSpPr/>
           <p:nvPr/>
         </p:nvSpPr>
         <p:spPr>
           <a:xfrm>
-            <a:off x="6400800" y="1691640"/>
-            <a:ext cx="5303520" cy="2468880"/>
+            <a:off x="6675120" y="1783080"/>
+            <a:ext cx="4572000" cy="2468880"/>
           </a:xfrm>
           <a:prstGeom prst="roundRect">
             <a:avLst/>
@@ -5613,7 +6154,7 @@
               </a:spcAft>
               <a:defRPr sz="1500">
                 <a:solidFill>
-                  <a:srgbClr val="2D2D2D"/>
+                  <a:srgbClr val="EF7C00"/>
                 </a:solidFill>
                 <a:latin typeface="Calibri"/>
               </a:defRPr>
@@ -5629,7 +6170,7 @@
               </a:spcAft>
               <a:defRPr sz="1500">
                 <a:solidFill>
-                  <a:srgbClr val="2D2D2D"/>
+                  <a:srgbClr val="EF7C00"/>
                 </a:solidFill>
                 <a:latin typeface="Calibri"/>
               </a:defRPr>
@@ -5645,7 +6186,7 @@
               </a:spcAft>
               <a:defRPr sz="1500">
                 <a:solidFill>
-                  <a:srgbClr val="2D2D2D"/>
+                  <a:srgbClr val="EF7C00"/>
                 </a:solidFill>
                 <a:latin typeface="Calibri"/>
               </a:defRPr>
@@ -5661,7 +6202,7 @@
               </a:spcAft>
               <a:defRPr sz="1500">
                 <a:solidFill>
-                  <a:srgbClr val="2D2D2D"/>
+                  <a:srgbClr val="EF7C00"/>
                 </a:solidFill>
                 <a:latin typeface="Calibri"/>
               </a:defRPr>
@@ -5677,7 +6218,7 @@
               </a:spcAft>
               <a:defRPr sz="1500">
                 <a:solidFill>
-                  <a:srgbClr val="2D2D2D"/>
+                  <a:srgbClr val="EF7C00"/>
                 </a:solidFill>
                 <a:latin typeface="Calibri"/>
               </a:defRPr>
@@ -5693,7 +6234,7 @@
               </a:spcAft>
               <a:defRPr sz="1500">
                 <a:solidFill>
-                  <a:srgbClr val="2D2D2D"/>
+                  <a:srgbClr val="EF7C00"/>
                 </a:solidFill>
                 <a:latin typeface="Calibri"/>
               </a:defRPr>
@@ -5709,7 +6250,7 @@
               </a:spcAft>
               <a:defRPr sz="1500">
                 <a:solidFill>
-                  <a:srgbClr val="2D2D2D"/>
+                  <a:srgbClr val="EF7C00"/>
                 </a:solidFill>
                 <a:latin typeface="Calibri"/>
               </a:defRPr>
@@ -5725,7 +6266,7 @@
               </a:spcAft>
               <a:defRPr sz="1500">
                 <a:solidFill>
-                  <a:srgbClr val="2D2D2D"/>
+                  <a:srgbClr val="EF7C00"/>
                 </a:solidFill>
                 <a:latin typeface="Calibri"/>
               </a:defRPr>
@@ -5738,20 +6279,20 @@
       </p:sp>
       <p:sp>
         <p:nvSpPr>
-          <p:cNvPr id="10" name="Rounded Rectangle 9"/>
+          <p:cNvPr id="15" name="Rounded Rectangle 14"/>
           <p:cNvSpPr/>
           <p:nvPr/>
         </p:nvSpPr>
         <p:spPr>
           <a:xfrm>
-            <a:off x="7315200" y="4297680"/>
-            <a:ext cx="3474720" cy="411480"/>
+            <a:off x="7315200" y="4389120"/>
+            <a:ext cx="3200400" cy="411480"/>
           </a:xfrm>
           <a:prstGeom prst="roundRect">
             <a:avLst/>
           </a:prstGeom>
           <a:solidFill>
-            <a:srgbClr val="F57C00"/>
+            <a:srgbClr val="EF7C00"/>
           </a:solidFill>
           <a:ln>
             <a:noFill/>
@@ -5790,20 +6331,20 @@
       </p:sp>
       <p:sp>
         <p:nvSpPr>
-          <p:cNvPr id="11" name="Rectangle 10"/>
+          <p:cNvPr id="16" name="Rectangle 15"/>
           <p:cNvSpPr/>
           <p:nvPr/>
         </p:nvSpPr>
         <p:spPr>
           <a:xfrm>
-            <a:off x="5989320" y="1097280"/>
+            <a:off x="5989320" y="1188720"/>
             <a:ext cx="36576" cy="3657600"/>
           </a:xfrm>
           <a:prstGeom prst="rect">
             <a:avLst/>
           </a:prstGeom>
           <a:solidFill>
-            <a:srgbClr val="666666"/>
+            <a:srgbClr val="CCCCCC"/>
           </a:solidFill>
           <a:ln>
             <a:noFill/>
@@ -5833,13 +6374,13 @@
       </p:sp>
       <p:sp>
         <p:nvSpPr>
-          <p:cNvPr id="12" name="TextBox 11"/>
+          <p:cNvPr id="17" name="TextBox 16"/>
           <p:cNvSpPr txBox="1"/>
           <p:nvPr/>
         </p:nvSpPr>
         <p:spPr>
           <a:xfrm>
-            <a:off x="457200" y="5029200"/>
+            <a:off x="1188720" y="5029200"/>
             <a:ext cx="4572000" cy="274320"/>
           </a:xfrm>
           <a:prstGeom prst="rect">
@@ -5869,13 +6410,13 @@
       </p:sp>
       <p:sp>
         <p:nvSpPr>
-          <p:cNvPr id="13" name="TextBox 12"/>
+          <p:cNvPr id="18" name="TextBox 17"/>
           <p:cNvSpPr txBox="1"/>
           <p:nvPr/>
         </p:nvSpPr>
         <p:spPr>
           <a:xfrm>
-            <a:off x="457200" y="5349240"/>
+            <a:off x="1188720" y="5349240"/>
             <a:ext cx="5486400" cy="914400"/>
           </a:xfrm>
           <a:prstGeom prst="rect">
@@ -5895,7 +6436,7 @@
               </a:spcAft>
               <a:defRPr sz="1100">
                 <a:solidFill>
-                  <a:srgbClr val="666666"/>
+                  <a:srgbClr val="CCCCCC"/>
                 </a:solidFill>
                 <a:latin typeface="Consolas"/>
               </a:defRPr>
@@ -5911,7 +6452,7 @@
               </a:spcAft>
               <a:defRPr sz="1100">
                 <a:solidFill>
-                  <a:srgbClr val="666666"/>
+                  <a:srgbClr val="CCCCCC"/>
                 </a:solidFill>
                 <a:latin typeface="Consolas"/>
               </a:defRPr>
@@ -5927,7 +6468,7 @@
               </a:spcAft>
               <a:defRPr sz="1100">
                 <a:solidFill>
-                  <a:srgbClr val="666666"/>
+                  <a:srgbClr val="CCCCCC"/>
                 </a:solidFill>
                 <a:latin typeface="Consolas"/>
               </a:defRPr>
@@ -5935,49 +6476,6 @@
             <a:r>
               <a:t>Each model: fit(), predict(), save(), load()</a:t>
             </a:r>
-          </a:p>
-        </p:txBody>
-      </p:sp>
-      <p:sp>
-        <p:nvSpPr>
-          <p:cNvPr id="14" name="Rectangle 13"/>
-          <p:cNvSpPr/>
-          <p:nvPr/>
-        </p:nvSpPr>
-        <p:spPr>
-          <a:xfrm>
-            <a:off x="0" y="6803136"/>
-            <a:ext cx="12191695" cy="54864"/>
-          </a:xfrm>
-          <a:prstGeom prst="rect">
-            <a:avLst/>
-          </a:prstGeom>
-          <a:solidFill>
-            <a:srgbClr val="007ACC"/>
-          </a:solidFill>
-          <a:ln>
-            <a:noFill/>
-          </a:ln>
-        </p:spPr>
-        <p:style>
-          <a:lnRef idx="1">
-            <a:schemeClr val="accent1"/>
-          </a:lnRef>
-          <a:fillRef idx="3">
-            <a:schemeClr val="accent1"/>
-          </a:fillRef>
-          <a:effectRef idx="2">
-            <a:schemeClr val="accent1"/>
-          </a:effectRef>
-          <a:fontRef idx="minor">
-            <a:schemeClr val="lt1"/>
-          </a:fontRef>
-        </p:style>
-        <p:txBody>
-          <a:bodyPr rtlCol="0" anchor="ctr"/>
-          <a:lstStyle/>
-          <a:p>
-            <a:pPr algn="ctr"/>
           </a:p>
         </p:txBody>
       </p:sp>
@@ -5995,7 +6493,7 @@
     <p:bg>
       <p:bgPr>
         <a:solidFill>
-          <a:srgbClr val="FFFFFF"/>
+          <a:srgbClr val="003D7C"/>
         </a:solidFill>
         <a:effectLst/>
       </p:bgPr>
@@ -6016,9 +6514,1148 @@
         <p:spPr>
           <a:xfrm>
             <a:off x="0" y="0"/>
-            <a:ext cx="12191695" cy="914400"/>
+            <a:ext cx="1005840" cy="822960"/>
           </a:xfrm>
           <a:prstGeom prst="rect">
+            <a:avLst/>
+          </a:prstGeom>
+          <a:solidFill>
+            <a:srgbClr val="FFE033"/>
+          </a:solidFill>
+          <a:ln>
+            <a:noFill/>
+          </a:ln>
+        </p:spPr>
+        <p:style>
+          <a:lnRef idx="1">
+            <a:schemeClr val="accent1"/>
+          </a:lnRef>
+          <a:fillRef idx="3">
+            <a:schemeClr val="accent1"/>
+          </a:fillRef>
+          <a:effectRef idx="2">
+            <a:schemeClr val="accent1"/>
+          </a:effectRef>
+          <a:fontRef idx="minor">
+            <a:schemeClr val="lt1"/>
+          </a:fontRef>
+        </p:style>
+        <p:txBody>
+          <a:bodyPr rtlCol="0" anchor="ctr"/>
+          <a:lstStyle/>
+          <a:p>
+            <a:pPr algn="ctr"/>
+          </a:p>
+        </p:txBody>
+      </p:sp>
+      <p:sp>
+        <p:nvSpPr>
+          <p:cNvPr id="3" name="Rectangle 2"/>
+          <p:cNvSpPr/>
+          <p:nvPr/>
+        </p:nvSpPr>
+        <p:spPr>
+          <a:xfrm>
+            <a:off x="457200" y="822960"/>
+            <a:ext cx="54864" cy="5303520"/>
+          </a:xfrm>
+          <a:prstGeom prst="rect">
+            <a:avLst/>
+          </a:prstGeom>
+          <a:solidFill>
+            <a:srgbClr val="EF7C00"/>
+          </a:solidFill>
+          <a:ln>
+            <a:noFill/>
+          </a:ln>
+        </p:spPr>
+        <p:style>
+          <a:lnRef idx="1">
+            <a:schemeClr val="accent1"/>
+          </a:lnRef>
+          <a:fillRef idx="3">
+            <a:schemeClr val="accent1"/>
+          </a:fillRef>
+          <a:effectRef idx="2">
+            <a:schemeClr val="accent1"/>
+          </a:effectRef>
+          <a:fontRef idx="minor">
+            <a:schemeClr val="lt1"/>
+          </a:fontRef>
+        </p:style>
+        <p:txBody>
+          <a:bodyPr rtlCol="0" anchor="ctr"/>
+          <a:lstStyle/>
+          <a:p>
+            <a:pPr algn="ctr"/>
+          </a:p>
+        </p:txBody>
+      </p:sp>
+      <p:sp>
+        <p:nvSpPr>
+          <p:cNvPr id="4" name="TextBox 3"/>
+          <p:cNvSpPr txBox="1"/>
+          <p:nvPr/>
+        </p:nvSpPr>
+        <p:spPr>
+          <a:xfrm>
+            <a:off x="10332720" y="137160"/>
+            <a:ext cx="1645920" cy="457200"/>
+          </a:xfrm>
+          <a:prstGeom prst="rect">
+            <a:avLst/>
+          </a:prstGeom>
+          <a:noFill/>
+        </p:spPr>
+        <p:txBody>
+          <a:bodyPr wrap="square">
+            <a:spAutoFit/>
+          </a:bodyPr>
+          <a:lstStyle/>
+          <a:p>
+            <a:pPr algn="r">
+              <a:defRPr sz="2400" b="1">
+                <a:solidFill>
+                  <a:srgbClr val="FFFFFF"/>
+                </a:solidFill>
+                <a:latin typeface="Arial"/>
+              </a:defRPr>
+            </a:pPr>
+            <a:r>
+              <a:t>NUS</a:t>
+            </a:r>
+          </a:p>
+        </p:txBody>
+      </p:sp>
+      <p:sp>
+        <p:nvSpPr>
+          <p:cNvPr id="5" name="TextBox 4"/>
+          <p:cNvSpPr txBox="1"/>
+          <p:nvPr/>
+        </p:nvSpPr>
+        <p:spPr>
+          <a:xfrm>
+            <a:off x="10332720" y="457200"/>
+            <a:ext cx="1645920" cy="320040"/>
+          </a:xfrm>
+          <a:prstGeom prst="rect">
+            <a:avLst/>
+          </a:prstGeom>
+          <a:noFill/>
+        </p:spPr>
+        <p:txBody>
+          <a:bodyPr wrap="square">
+            <a:spAutoFit/>
+          </a:bodyPr>
+          <a:lstStyle/>
+          <a:p>
+            <a:pPr algn="r">
+              <a:defRPr sz="800" b="0">
+                <a:solidFill>
+                  <a:srgbClr val="FFFFFF"/>
+                </a:solidFill>
+                <a:latin typeface="Arial"/>
+              </a:defRPr>
+            </a:pPr>
+            <a:r>
+              <a:t>National University</a:t>
+            </a:r>
+            <a:br/>
+            <a:r>
+              <a:t>of Singapore</a:t>
+            </a:r>
+          </a:p>
+        </p:txBody>
+      </p:sp>
+      <p:sp>
+        <p:nvSpPr>
+          <p:cNvPr id="6" name="TextBox 5"/>
+          <p:cNvSpPr txBox="1"/>
+          <p:nvPr/>
+        </p:nvSpPr>
+        <p:spPr>
+          <a:xfrm>
+            <a:off x="1188720" y="91440"/>
+            <a:ext cx="8686800" cy="640080"/>
+          </a:xfrm>
+          <a:prstGeom prst="rect">
+            <a:avLst/>
+          </a:prstGeom>
+          <a:noFill/>
+        </p:spPr>
+        <p:txBody>
+          <a:bodyPr wrap="square">
+            <a:spAutoFit/>
+          </a:bodyPr>
+          <a:lstStyle/>
+          <a:p>
+            <a:pPr algn="l">
+              <a:defRPr sz="3200" b="1">
+                <a:solidFill>
+                  <a:srgbClr val="FFFFFF"/>
+                </a:solidFill>
+                <a:latin typeface="Calibri"/>
+              </a:defRPr>
+            </a:pPr>
+            <a:r>
+              <a:t>3. Hybrid Machine Learning / Ensemble Approach</a:t>
+            </a:r>
+          </a:p>
+        </p:txBody>
+      </p:sp>
+      <p:sp>
+        <p:nvSpPr>
+          <p:cNvPr id="7" name="Rectangle 6"/>
+          <p:cNvSpPr/>
+          <p:nvPr/>
+        </p:nvSpPr>
+        <p:spPr>
+          <a:xfrm>
+            <a:off x="0" y="6172200"/>
+            <a:ext cx="12191695" cy="54864"/>
+          </a:xfrm>
+          <a:prstGeom prst="rect">
+            <a:avLst/>
+          </a:prstGeom>
+          <a:solidFill>
+            <a:srgbClr val="EF7C00"/>
+          </a:solidFill>
+          <a:ln>
+            <a:noFill/>
+          </a:ln>
+        </p:spPr>
+        <p:style>
+          <a:lnRef idx="1">
+            <a:schemeClr val="accent1"/>
+          </a:lnRef>
+          <a:fillRef idx="3">
+            <a:schemeClr val="accent1"/>
+          </a:fillRef>
+          <a:effectRef idx="2">
+            <a:schemeClr val="accent1"/>
+          </a:effectRef>
+          <a:fontRef idx="minor">
+            <a:schemeClr val="lt1"/>
+          </a:fontRef>
+        </p:style>
+        <p:txBody>
+          <a:bodyPr rtlCol="0" anchor="ctr"/>
+          <a:lstStyle/>
+          <a:p>
+            <a:pPr algn="ctr"/>
+          </a:p>
+        </p:txBody>
+      </p:sp>
+      <p:sp>
+        <p:nvSpPr>
+          <p:cNvPr id="8" name="TextBox 7"/>
+          <p:cNvSpPr txBox="1"/>
+          <p:nvPr/>
+        </p:nvSpPr>
+        <p:spPr>
+          <a:xfrm>
+            <a:off x="274320" y="6400800"/>
+            <a:ext cx="7315200" cy="274320"/>
+          </a:xfrm>
+          <a:prstGeom prst="rect">
+            <a:avLst/>
+          </a:prstGeom>
+          <a:noFill/>
+        </p:spPr>
+        <p:txBody>
+          <a:bodyPr wrap="square">
+            <a:spAutoFit/>
+          </a:bodyPr>
+          <a:lstStyle/>
+          <a:p>
+            <a:pPr algn="l">
+              <a:defRPr sz="800" b="0">
+                <a:solidFill>
+                  <a:srgbClr val="FFFFFF"/>
+                </a:solidFill>
+                <a:latin typeface="Calibri"/>
+              </a:defRPr>
+            </a:pPr>
+            <a:r>
+              <a:t>© Copyright National University of Singapore. All Rights Reserved.</a:t>
+            </a:r>
+          </a:p>
+        </p:txBody>
+      </p:sp>
+      <p:sp>
+        <p:nvSpPr>
+          <p:cNvPr id="9" name="Oval 8"/>
+          <p:cNvSpPr/>
+          <p:nvPr/>
+        </p:nvSpPr>
+        <p:spPr>
+          <a:xfrm>
+            <a:off x="274320" y="137160"/>
+            <a:ext cx="548640" cy="548640"/>
+          </a:xfrm>
+          <a:prstGeom prst="ellipse">
+            <a:avLst/>
+          </a:prstGeom>
+          <a:solidFill>
+            <a:srgbClr val="28A745"/>
+          </a:solidFill>
+          <a:ln>
+            <a:noFill/>
+          </a:ln>
+        </p:spPr>
+        <p:style>
+          <a:lnRef idx="1">
+            <a:schemeClr val="accent1"/>
+          </a:lnRef>
+          <a:fillRef idx="3">
+            <a:schemeClr val="accent1"/>
+          </a:fillRef>
+          <a:effectRef idx="2">
+            <a:schemeClr val="accent1"/>
+          </a:effectRef>
+          <a:fontRef idx="minor">
+            <a:schemeClr val="lt1"/>
+          </a:fontRef>
+        </p:style>
+        <p:txBody>
+          <a:bodyPr rtlCol="0" anchor="ctr"/>
+          <a:lstStyle/>
+          <a:p>
+            <a:pPr algn="ctr">
+              <a:defRPr sz="2800" b="1">
+                <a:solidFill>
+                  <a:srgbClr val="FFFFFF"/>
+                </a:solidFill>
+              </a:defRPr>
+            </a:pPr>
+            <a:r>
+              <a:t>✓</a:t>
+            </a:r>
+          </a:p>
+        </p:txBody>
+      </p:sp>
+      <p:sp>
+        <p:nvSpPr>
+          <p:cNvPr id="10" name="TextBox 9"/>
+          <p:cNvSpPr txBox="1"/>
+          <p:nvPr/>
+        </p:nvSpPr>
+        <p:spPr>
+          <a:xfrm>
+            <a:off x="1188720" y="1188720"/>
+            <a:ext cx="10058400" cy="365760"/>
+          </a:xfrm>
+          <a:prstGeom prst="rect">
+            <a:avLst/>
+          </a:prstGeom>
+          <a:noFill/>
+        </p:spPr>
+        <p:txBody>
+          <a:bodyPr wrap="square">
+            <a:spAutoFit/>
+          </a:bodyPr>
+          <a:lstStyle/>
+          <a:p>
+            <a:pPr algn="l">
+              <a:defRPr sz="2000" b="1">
+                <a:solidFill>
+                  <a:srgbClr val="6F42C1"/>
+                </a:solidFill>
+                <a:latin typeface="Calibri"/>
+              </a:defRPr>
+            </a:pPr>
+            <a:r>
+              <a:t>Tier 3 — 3 Ensemble Models</a:t>
+            </a:r>
+          </a:p>
+        </p:txBody>
+      </p:sp>
+      <p:sp>
+        <p:nvSpPr>
+          <p:cNvPr id="11" name="Rounded Rectangle 10"/>
+          <p:cNvSpPr/>
+          <p:nvPr/>
+        </p:nvSpPr>
+        <p:spPr>
+          <a:xfrm>
+            <a:off x="1188720" y="1645920"/>
+            <a:ext cx="3200400" cy="411480"/>
+          </a:xfrm>
+          <a:prstGeom prst="roundRect">
+            <a:avLst/>
+          </a:prstGeom>
+          <a:solidFill>
+            <a:srgbClr val="007ACC"/>
+          </a:solidFill>
+          <a:ln>
+            <a:noFill/>
+          </a:ln>
+        </p:spPr>
+        <p:style>
+          <a:lnRef idx="1">
+            <a:schemeClr val="accent1"/>
+          </a:lnRef>
+          <a:fillRef idx="3">
+            <a:schemeClr val="accent1"/>
+          </a:fillRef>
+          <a:effectRef idx="2">
+            <a:schemeClr val="accent1"/>
+          </a:effectRef>
+          <a:fontRef idx="minor">
+            <a:schemeClr val="lt1"/>
+          </a:fontRef>
+        </p:style>
+        <p:txBody>
+          <a:bodyPr rtlCol="0" anchor="ctr" wrap="square"/>
+          <a:lstStyle/>
+          <a:p>
+            <a:pPr algn="ctr">
+              <a:defRPr sz="1600" b="1">
+                <a:solidFill>
+                  <a:srgbClr val="FFFFFF"/>
+                </a:solidFill>
+              </a:defRPr>
+            </a:pPr>
+            <a:r>
+              <a:t>Voting Ensemble</a:t>
+            </a:r>
+          </a:p>
+        </p:txBody>
+      </p:sp>
+      <p:sp>
+        <p:nvSpPr>
+          <p:cNvPr id="12" name="Rounded Rectangle 11"/>
+          <p:cNvSpPr/>
+          <p:nvPr/>
+        </p:nvSpPr>
+        <p:spPr>
+          <a:xfrm>
+            <a:off x="1188720" y="2148840"/>
+            <a:ext cx="3200400" cy="1463040"/>
+          </a:xfrm>
+          <a:prstGeom prst="roundRect">
+            <a:avLst/>
+          </a:prstGeom>
+          <a:solidFill>
+            <a:srgbClr val="F0F4F8"/>
+          </a:solidFill>
+          <a:ln>
+            <a:noFill/>
+          </a:ln>
+        </p:spPr>
+        <p:style>
+          <a:lnRef idx="1">
+            <a:schemeClr val="accent1"/>
+          </a:lnRef>
+          <a:fillRef idx="3">
+            <a:schemeClr val="accent1"/>
+          </a:fillRef>
+          <a:effectRef idx="2">
+            <a:schemeClr val="accent1"/>
+          </a:effectRef>
+          <a:fontRef idx="minor">
+            <a:schemeClr val="lt1"/>
+          </a:fontRef>
+        </p:style>
+        <p:txBody>
+          <a:bodyPr rtlCol="0" anchor="ctr" wrap="square" lIns="137160" rIns="137160" tIns="91440" bIns="91440"/>
+          <a:lstStyle/>
+          <a:p>
+            <a:pPr algn="ctr">
+              <a:spcAft>
+                <a:spcPts val="200"/>
+              </a:spcAft>
+              <a:defRPr sz="1300">
+                <a:solidFill>
+                  <a:srgbClr val="EF7C00"/>
+                </a:solidFill>
+                <a:latin typeface="Calibri"/>
+              </a:defRPr>
+            </a:pPr>
+            <a:r>
+              <a:t>Combines SVM + Random Forest</a:t>
+            </a:r>
+          </a:p>
+          <a:p>
+            <a:pPr algn="ctr">
+              <a:spcAft>
+                <a:spcPts val="200"/>
+              </a:spcAft>
+              <a:defRPr sz="1300">
+                <a:solidFill>
+                  <a:srgbClr val="EF7C00"/>
+                </a:solidFill>
+                <a:latin typeface="Calibri"/>
+              </a:defRPr>
+            </a:pPr>
+            <a:r>
+              <a:t>+ MLP predictions</a:t>
+            </a:r>
+          </a:p>
+          <a:p>
+            <a:pPr algn="ctr">
+              <a:spcAft>
+                <a:spcPts val="200"/>
+              </a:spcAft>
+              <a:defRPr sz="1300">
+                <a:solidFill>
+                  <a:srgbClr val="EF7C00"/>
+                </a:solidFill>
+                <a:latin typeface="Calibri"/>
+              </a:defRPr>
+            </a:pPr>
+          </a:p>
+          <a:p>
+            <a:pPr algn="ctr">
+              <a:spcAft>
+                <a:spcPts val="200"/>
+              </a:spcAft>
+              <a:defRPr sz="1300">
+                <a:solidFill>
+                  <a:srgbClr val="EF7C00"/>
+                </a:solidFill>
+                <a:latin typeface="Calibri"/>
+              </a:defRPr>
+            </a:pPr>
+            <a:r>
+              <a:t>Soft voting: averages</a:t>
+            </a:r>
+          </a:p>
+          <a:p>
+            <a:pPr algn="ctr">
+              <a:spcAft>
+                <a:spcPts val="200"/>
+              </a:spcAft>
+              <a:defRPr sz="1300">
+                <a:solidFill>
+                  <a:srgbClr val="EF7C00"/>
+                </a:solidFill>
+                <a:latin typeface="Calibri"/>
+              </a:defRPr>
+            </a:pPr>
+            <a:r>
+              <a:t>probability outputs from</a:t>
+            </a:r>
+          </a:p>
+          <a:p>
+            <a:pPr algn="ctr">
+              <a:spcAft>
+                <a:spcPts val="200"/>
+              </a:spcAft>
+              <a:defRPr sz="1300">
+                <a:solidFill>
+                  <a:srgbClr val="EF7C00"/>
+                </a:solidFill>
+                <a:latin typeface="Calibri"/>
+              </a:defRPr>
+            </a:pPr>
+            <a:r>
+              <a:t>all 3 base models</a:t>
+            </a:r>
+          </a:p>
+        </p:txBody>
+      </p:sp>
+      <p:sp>
+        <p:nvSpPr>
+          <p:cNvPr id="13" name="Rounded Rectangle 12"/>
+          <p:cNvSpPr/>
+          <p:nvPr/>
+        </p:nvSpPr>
+        <p:spPr>
+          <a:xfrm>
+            <a:off x="4663440" y="1645920"/>
+            <a:ext cx="3200400" cy="411480"/>
+          </a:xfrm>
+          <a:prstGeom prst="roundRect">
+            <a:avLst/>
+          </a:prstGeom>
+          <a:solidFill>
+            <a:srgbClr val="28A745"/>
+          </a:solidFill>
+          <a:ln>
+            <a:noFill/>
+          </a:ln>
+        </p:spPr>
+        <p:style>
+          <a:lnRef idx="1">
+            <a:schemeClr val="accent1"/>
+          </a:lnRef>
+          <a:fillRef idx="3">
+            <a:schemeClr val="accent1"/>
+          </a:fillRef>
+          <a:effectRef idx="2">
+            <a:schemeClr val="accent1"/>
+          </a:effectRef>
+          <a:fontRef idx="minor">
+            <a:schemeClr val="lt1"/>
+          </a:fontRef>
+        </p:style>
+        <p:txBody>
+          <a:bodyPr rtlCol="0" anchor="ctr" wrap="square"/>
+          <a:lstStyle/>
+          <a:p>
+            <a:pPr algn="ctr">
+              <a:defRPr sz="1600" b="1">
+                <a:solidFill>
+                  <a:srgbClr val="FFFFFF"/>
+                </a:solidFill>
+              </a:defRPr>
+            </a:pPr>
+            <a:r>
+              <a:t>Stacking Ensemble</a:t>
+            </a:r>
+          </a:p>
+        </p:txBody>
+      </p:sp>
+      <p:sp>
+        <p:nvSpPr>
+          <p:cNvPr id="14" name="Rounded Rectangle 13"/>
+          <p:cNvSpPr/>
+          <p:nvPr/>
+        </p:nvSpPr>
+        <p:spPr>
+          <a:xfrm>
+            <a:off x="4663440" y="2148840"/>
+            <a:ext cx="3200400" cy="1463040"/>
+          </a:xfrm>
+          <a:prstGeom prst="roundRect">
+            <a:avLst/>
+          </a:prstGeom>
+          <a:solidFill>
+            <a:srgbClr val="F0F4F8"/>
+          </a:solidFill>
+          <a:ln>
+            <a:noFill/>
+          </a:ln>
+        </p:spPr>
+        <p:style>
+          <a:lnRef idx="1">
+            <a:schemeClr val="accent1"/>
+          </a:lnRef>
+          <a:fillRef idx="3">
+            <a:schemeClr val="accent1"/>
+          </a:fillRef>
+          <a:effectRef idx="2">
+            <a:schemeClr val="accent1"/>
+          </a:effectRef>
+          <a:fontRef idx="minor">
+            <a:schemeClr val="lt1"/>
+          </a:fontRef>
+        </p:style>
+        <p:txBody>
+          <a:bodyPr rtlCol="0" anchor="ctr" wrap="square" lIns="137160" rIns="137160" tIns="91440" bIns="91440"/>
+          <a:lstStyle/>
+          <a:p>
+            <a:pPr algn="ctr">
+              <a:spcAft>
+                <a:spcPts val="200"/>
+              </a:spcAft>
+              <a:defRPr sz="1300">
+                <a:solidFill>
+                  <a:srgbClr val="EF7C00"/>
+                </a:solidFill>
+                <a:latin typeface="Calibri"/>
+              </a:defRPr>
+            </a:pPr>
+            <a:r>
+              <a:t>SVM + RF + MLP produce</a:t>
+            </a:r>
+          </a:p>
+          <a:p>
+            <a:pPr algn="ctr">
+              <a:spcAft>
+                <a:spcPts val="200"/>
+              </a:spcAft>
+              <a:defRPr sz="1300">
+                <a:solidFill>
+                  <a:srgbClr val="EF7C00"/>
+                </a:solidFill>
+                <a:latin typeface="Calibri"/>
+              </a:defRPr>
+            </a:pPr>
+            <a:r>
+              <a:t>probability outputs</a:t>
+            </a:r>
+          </a:p>
+          <a:p>
+            <a:pPr algn="ctr">
+              <a:spcAft>
+                <a:spcPts val="200"/>
+              </a:spcAft>
+              <a:defRPr sz="1300">
+                <a:solidFill>
+                  <a:srgbClr val="EF7C00"/>
+                </a:solidFill>
+                <a:latin typeface="Calibri"/>
+              </a:defRPr>
+            </a:pPr>
+          </a:p>
+          <a:p>
+            <a:pPr algn="ctr">
+              <a:spcAft>
+                <a:spcPts val="200"/>
+              </a:spcAft>
+              <a:defRPr sz="1300">
+                <a:solidFill>
+                  <a:srgbClr val="EF7C00"/>
+                </a:solidFill>
+                <a:latin typeface="Calibri"/>
+              </a:defRPr>
+            </a:pPr>
+            <a:r>
+              <a:t>Logistic Regression</a:t>
+            </a:r>
+          </a:p>
+          <a:p>
+            <a:pPr algn="ctr">
+              <a:spcAft>
+                <a:spcPts val="200"/>
+              </a:spcAft>
+              <a:defRPr sz="1300">
+                <a:solidFill>
+                  <a:srgbClr val="EF7C00"/>
+                </a:solidFill>
+                <a:latin typeface="Calibri"/>
+              </a:defRPr>
+            </a:pPr>
+            <a:r>
+              <a:t>meta-learner combines</a:t>
+            </a:r>
+          </a:p>
+          <a:p>
+            <a:pPr algn="ctr">
+              <a:spcAft>
+                <a:spcPts val="200"/>
+              </a:spcAft>
+              <a:defRPr sz="1300">
+                <a:solidFill>
+                  <a:srgbClr val="EF7C00"/>
+                </a:solidFill>
+                <a:latin typeface="Calibri"/>
+              </a:defRPr>
+            </a:pPr>
+            <a:r>
+              <a:t>stacked probabilities</a:t>
+            </a:r>
+          </a:p>
+        </p:txBody>
+      </p:sp>
+      <p:sp>
+        <p:nvSpPr>
+          <p:cNvPr id="15" name="Rounded Rectangle 14"/>
+          <p:cNvSpPr/>
+          <p:nvPr/>
+        </p:nvSpPr>
+        <p:spPr>
+          <a:xfrm>
+            <a:off x="8138160" y="1645920"/>
+            <a:ext cx="3200400" cy="411480"/>
+          </a:xfrm>
+          <a:prstGeom prst="roundRect">
+            <a:avLst/>
+          </a:prstGeom>
+          <a:solidFill>
+            <a:srgbClr val="EF7C00"/>
+          </a:solidFill>
+          <a:ln>
+            <a:noFill/>
+          </a:ln>
+        </p:spPr>
+        <p:style>
+          <a:lnRef idx="1">
+            <a:schemeClr val="accent1"/>
+          </a:lnRef>
+          <a:fillRef idx="3">
+            <a:schemeClr val="accent1"/>
+          </a:fillRef>
+          <a:effectRef idx="2">
+            <a:schemeClr val="accent1"/>
+          </a:effectRef>
+          <a:fontRef idx="minor">
+            <a:schemeClr val="lt1"/>
+          </a:fontRef>
+        </p:style>
+        <p:txBody>
+          <a:bodyPr rtlCol="0" anchor="ctr" wrap="square"/>
+          <a:lstStyle/>
+          <a:p>
+            <a:pPr algn="ctr">
+              <a:defRPr sz="1600" b="1">
+                <a:solidFill>
+                  <a:srgbClr val="FFFFFF"/>
+                </a:solidFill>
+              </a:defRPr>
+            </a:pPr>
+            <a:r>
+              <a:t>Late Fusion</a:t>
+            </a:r>
+          </a:p>
+        </p:txBody>
+      </p:sp>
+      <p:sp>
+        <p:nvSpPr>
+          <p:cNvPr id="16" name="Rounded Rectangle 15"/>
+          <p:cNvSpPr/>
+          <p:nvPr/>
+        </p:nvSpPr>
+        <p:spPr>
+          <a:xfrm>
+            <a:off x="8138160" y="2148840"/>
+            <a:ext cx="3200400" cy="1463040"/>
+          </a:xfrm>
+          <a:prstGeom prst="roundRect">
+            <a:avLst/>
+          </a:prstGeom>
+          <a:solidFill>
+            <a:srgbClr val="F0F4F8"/>
+          </a:solidFill>
+          <a:ln>
+            <a:noFill/>
+          </a:ln>
+        </p:spPr>
+        <p:style>
+          <a:lnRef idx="1">
+            <a:schemeClr val="accent1"/>
+          </a:lnRef>
+          <a:fillRef idx="3">
+            <a:schemeClr val="accent1"/>
+          </a:fillRef>
+          <a:effectRef idx="2">
+            <a:schemeClr val="accent1"/>
+          </a:effectRef>
+          <a:fontRef idx="minor">
+            <a:schemeClr val="lt1"/>
+          </a:fontRef>
+        </p:style>
+        <p:txBody>
+          <a:bodyPr rtlCol="0" anchor="ctr" wrap="square" lIns="137160" rIns="137160" tIns="91440" bIns="91440"/>
+          <a:lstStyle/>
+          <a:p>
+            <a:pPr algn="ctr">
+              <a:spcAft>
+                <a:spcPts val="200"/>
+              </a:spcAft>
+              <a:defRPr sz="1300">
+                <a:solidFill>
+                  <a:srgbClr val="EF7C00"/>
+                </a:solidFill>
+                <a:latin typeface="Calibri"/>
+              </a:defRPr>
+            </a:pPr>
+            <a:r>
+              <a:t>SVM on text features +</a:t>
+            </a:r>
+          </a:p>
+          <a:p>
+            <a:pPr algn="ctr">
+              <a:spcAft>
+                <a:spcPts val="200"/>
+              </a:spcAft>
+              <a:defRPr sz="1300">
+                <a:solidFill>
+                  <a:srgbClr val="EF7C00"/>
+                </a:solidFill>
+                <a:latin typeface="Calibri"/>
+              </a:defRPr>
+            </a:pPr>
+            <a:r>
+              <a:t>RF on visual features</a:t>
+            </a:r>
+          </a:p>
+          <a:p>
+            <a:pPr algn="ctr">
+              <a:spcAft>
+                <a:spcPts val="200"/>
+              </a:spcAft>
+              <a:defRPr sz="1300">
+                <a:solidFill>
+                  <a:srgbClr val="EF7C00"/>
+                </a:solidFill>
+                <a:latin typeface="Calibri"/>
+              </a:defRPr>
+            </a:pPr>
+          </a:p>
+          <a:p>
+            <a:pPr algn="ctr">
+              <a:spcAft>
+                <a:spcPts val="200"/>
+              </a:spcAft>
+              <a:defRPr sz="1300">
+                <a:solidFill>
+                  <a:srgbClr val="EF7C00"/>
+                </a:solidFill>
+                <a:latin typeface="Calibri"/>
+              </a:defRPr>
+            </a:pPr>
+            <a:r>
+              <a:t>Meta-learner fuses</a:t>
+            </a:r>
+          </a:p>
+          <a:p>
+            <a:pPr algn="ctr">
+              <a:spcAft>
+                <a:spcPts val="200"/>
+              </a:spcAft>
+              <a:defRPr sz="1300">
+                <a:solidFill>
+                  <a:srgbClr val="EF7C00"/>
+                </a:solidFill>
+                <a:latin typeface="Calibri"/>
+              </a:defRPr>
+            </a:pPr>
+            <a:r>
+              <a:t>modality-specific</a:t>
+            </a:r>
+          </a:p>
+          <a:p>
+            <a:pPr algn="ctr">
+              <a:spcAft>
+                <a:spcPts val="200"/>
+              </a:spcAft>
+              <a:defRPr sz="1300">
+                <a:solidFill>
+                  <a:srgbClr val="EF7C00"/>
+                </a:solidFill>
+                <a:latin typeface="Calibri"/>
+              </a:defRPr>
+            </a:pPr>
+            <a:r>
+              <a:t>prediction branches</a:t>
+            </a:r>
+          </a:p>
+        </p:txBody>
+      </p:sp>
+      <p:sp>
+        <p:nvSpPr>
+          <p:cNvPr id="17" name="TextBox 16"/>
+          <p:cNvSpPr txBox="1"/>
+          <p:nvPr/>
+        </p:nvSpPr>
+        <p:spPr>
+          <a:xfrm>
+            <a:off x="1188720" y="3840480"/>
+            <a:ext cx="10058400" cy="320040"/>
+          </a:xfrm>
+          <a:prstGeom prst="rect">
+            <a:avLst/>
+          </a:prstGeom>
+          <a:noFill/>
+        </p:spPr>
+        <p:txBody>
+          <a:bodyPr wrap="square">
+            <a:spAutoFit/>
+          </a:bodyPr>
+          <a:lstStyle/>
+          <a:p>
+            <a:pPr algn="l">
+              <a:defRPr sz="1700" b="1">
+                <a:solidFill>
+                  <a:srgbClr val="6F42C1"/>
+                </a:solidFill>
+                <a:latin typeface="Calibri"/>
+              </a:defRPr>
+            </a:pPr>
+            <a:r>
+              <a:t>Hybrid = Combines Classical ML (Tier 1) + Deep Learning (Tier 2)</a:t>
+            </a:r>
+          </a:p>
+        </p:txBody>
+      </p:sp>
+      <p:sp>
+        <p:nvSpPr>
+          <p:cNvPr id="18" name="Rounded Rectangle 17"/>
+          <p:cNvSpPr/>
+          <p:nvPr/>
+        </p:nvSpPr>
+        <p:spPr>
+          <a:xfrm>
+            <a:off x="1188720" y="4297680"/>
+            <a:ext cx="2286000" cy="457200"/>
+          </a:xfrm>
+          <a:prstGeom prst="roundRect">
+            <a:avLst/>
+          </a:prstGeom>
+          <a:solidFill>
+            <a:srgbClr val="007ACC"/>
+          </a:solidFill>
+          <a:ln>
+            <a:noFill/>
+          </a:ln>
+        </p:spPr>
+        <p:style>
+          <a:lnRef idx="1">
+            <a:schemeClr val="accent1"/>
+          </a:lnRef>
+          <a:fillRef idx="3">
+            <a:schemeClr val="accent1"/>
+          </a:fillRef>
+          <a:effectRef idx="2">
+            <a:schemeClr val="accent1"/>
+          </a:effectRef>
+          <a:fontRef idx="minor">
+            <a:schemeClr val="lt1"/>
+          </a:fontRef>
+        </p:style>
+        <p:txBody>
+          <a:bodyPr rtlCol="0" anchor="ctr" wrap="square"/>
+          <a:lstStyle/>
+          <a:p>
+            <a:pPr algn="ctr">
+              <a:defRPr sz="1400" b="1">
+                <a:solidFill>
+                  <a:srgbClr val="FFFFFF"/>
+                </a:solidFill>
+              </a:defRPr>
+            </a:pPr>
+            <a:r>
+              <a:t>Tier 1: Classical ML</a:t>
+            </a:r>
+          </a:p>
+        </p:txBody>
+      </p:sp>
+      <p:sp>
+        <p:nvSpPr>
+          <p:cNvPr id="19" name="Rounded Rectangle 18"/>
+          <p:cNvSpPr/>
+          <p:nvPr/>
+        </p:nvSpPr>
+        <p:spPr>
+          <a:xfrm>
+            <a:off x="3931920" y="4297680"/>
+            <a:ext cx="2286000" cy="457200"/>
+          </a:xfrm>
+          <a:prstGeom prst="roundRect">
+            <a:avLst/>
+          </a:prstGeom>
+          <a:solidFill>
+            <a:srgbClr val="EF7C00"/>
+          </a:solidFill>
+          <a:ln>
+            <a:noFill/>
+          </a:ln>
+        </p:spPr>
+        <p:style>
+          <a:lnRef idx="1">
+            <a:schemeClr val="accent1"/>
+          </a:lnRef>
+          <a:fillRef idx="3">
+            <a:schemeClr val="accent1"/>
+          </a:fillRef>
+          <a:effectRef idx="2">
+            <a:schemeClr val="accent1"/>
+          </a:effectRef>
+          <a:fontRef idx="minor">
+            <a:schemeClr val="lt1"/>
+          </a:fontRef>
+        </p:style>
+        <p:txBody>
+          <a:bodyPr rtlCol="0" anchor="ctr" wrap="square"/>
+          <a:lstStyle/>
+          <a:p>
+            <a:pPr algn="ctr">
+              <a:defRPr sz="1400" b="1">
+                <a:solidFill>
+                  <a:srgbClr val="FFFFFF"/>
+                </a:solidFill>
+              </a:defRPr>
+            </a:pPr>
+            <a:r>
+              <a:t>Tier 2: Deep Learning</a:t>
+            </a:r>
+          </a:p>
+        </p:txBody>
+      </p:sp>
+      <p:sp>
+        <p:nvSpPr>
+          <p:cNvPr id="20" name="Rectangle 19"/>
+          <p:cNvSpPr/>
+          <p:nvPr/>
+        </p:nvSpPr>
+        <p:spPr>
+          <a:xfrm>
+            <a:off x="6492240" y="4434840"/>
+            <a:ext cx="914400" cy="36576"/>
+          </a:xfrm>
+          <a:prstGeom prst="rect">
+            <a:avLst/>
+          </a:prstGeom>
+          <a:solidFill>
+            <a:srgbClr val="FFFFFF"/>
+          </a:solidFill>
+          <a:ln>
+            <a:noFill/>
+          </a:ln>
+        </p:spPr>
+        <p:style>
+          <a:lnRef idx="1">
+            <a:schemeClr val="accent1"/>
+          </a:lnRef>
+          <a:fillRef idx="3">
+            <a:schemeClr val="accent1"/>
+          </a:fillRef>
+          <a:effectRef idx="2">
+            <a:schemeClr val="accent1"/>
+          </a:effectRef>
+          <a:fontRef idx="minor">
+            <a:schemeClr val="lt1"/>
+          </a:fontRef>
+        </p:style>
+        <p:txBody>
+          <a:bodyPr rtlCol="0" anchor="ctr"/>
+          <a:lstStyle/>
+          <a:p>
+            <a:pPr algn="ctr"/>
+          </a:p>
+        </p:txBody>
+      </p:sp>
+      <p:sp>
+        <p:nvSpPr>
+          <p:cNvPr id="21" name="TextBox 20"/>
+          <p:cNvSpPr txBox="1"/>
+          <p:nvPr/>
+        </p:nvSpPr>
+        <p:spPr>
+          <a:xfrm>
+            <a:off x="6583680" y="4251960"/>
+            <a:ext cx="731520" cy="274320"/>
+          </a:xfrm>
+          <a:prstGeom prst="rect">
+            <a:avLst/>
+          </a:prstGeom>
+          <a:noFill/>
+        </p:spPr>
+        <p:txBody>
+          <a:bodyPr wrap="square">
+            <a:spAutoFit/>
+          </a:bodyPr>
+          <a:lstStyle/>
+          <a:p>
+            <a:pPr algn="ctr">
+              <a:defRPr sz="1400" b="0">
+                <a:solidFill>
+                  <a:srgbClr val="FFFFFF"/>
+                </a:solidFill>
+                <a:latin typeface="Calibri"/>
+              </a:defRPr>
+            </a:pPr>
+            <a:r>
+              <a:t>▶</a:t>
+            </a:r>
+          </a:p>
+        </p:txBody>
+      </p:sp>
+      <p:sp>
+        <p:nvSpPr>
+          <p:cNvPr id="22" name="Rounded Rectangle 21"/>
+          <p:cNvSpPr/>
+          <p:nvPr/>
+        </p:nvSpPr>
+        <p:spPr>
+          <a:xfrm>
+            <a:off x="7589520" y="4297680"/>
+            <a:ext cx="2560320" cy="457200"/>
+          </a:xfrm>
+          <a:prstGeom prst="roundRect">
             <a:avLst/>
           </a:prstGeom>
           <a:solidFill>
@@ -6043,61 +7680,34 @@
           </a:fontRef>
         </p:style>
         <p:txBody>
-          <a:bodyPr rtlCol="0" anchor="ctr"/>
-          <a:lstStyle/>
-          <a:p>
-            <a:pPr algn="ctr"/>
-          </a:p>
-        </p:txBody>
-      </p:sp>
-      <p:sp>
-        <p:nvSpPr>
-          <p:cNvPr id="3" name="TextBox 2"/>
-          <p:cNvSpPr txBox="1"/>
-          <p:nvPr/>
-        </p:nvSpPr>
-        <p:spPr>
-          <a:xfrm>
-            <a:off x="457200" y="137160"/>
-            <a:ext cx="11277295" cy="640080"/>
-          </a:xfrm>
-          <a:prstGeom prst="rect">
-            <a:avLst/>
-          </a:prstGeom>
-          <a:noFill/>
-        </p:spPr>
-        <p:txBody>
-          <a:bodyPr wrap="square">
-            <a:spAutoFit/>
-          </a:bodyPr>
+          <a:bodyPr rtlCol="0" anchor="ctr" wrap="square"/>
           <a:lstStyle/>
           <a:p>
             <a:pPr algn="ctr">
-              <a:defRPr sz="2800" b="1">
+              <a:defRPr sz="1400" b="1">
                 <a:solidFill>
                   <a:srgbClr val="FFFFFF"/>
                 </a:solidFill>
-                <a:latin typeface="Calibri"/>
-              </a:defRPr>
-            </a:pPr>
-            <a:r>
-              <a:t>3. Hybrid Machine Learning / Ensemble Approach</a:t>
-            </a:r>
-          </a:p>
-        </p:txBody>
-      </p:sp>
-      <p:sp>
-        <p:nvSpPr>
-          <p:cNvPr id="4" name="Oval 3"/>
+              </a:defRPr>
+            </a:pPr>
+            <a:r>
+              <a:t>Tier 3: Ensemble</a:t>
+            </a:r>
+          </a:p>
+        </p:txBody>
+      </p:sp>
+      <p:sp>
+        <p:nvSpPr>
+          <p:cNvPr id="23" name="Rounded Rectangle 22"/>
           <p:cNvSpPr/>
           <p:nvPr/>
         </p:nvSpPr>
         <p:spPr>
           <a:xfrm>
-            <a:off x="274320" y="137160"/>
-            <a:ext cx="548640" cy="548640"/>
-          </a:xfrm>
-          <a:prstGeom prst="ellipse">
+            <a:off x="1188720" y="5029200"/>
+            <a:ext cx="9601200" cy="502920"/>
+          </a:xfrm>
+          <a:prstGeom prst="roundRect">
             <a:avLst/>
           </a:prstGeom>
           <a:solidFill>
@@ -6122,32 +7732,32 @@
           </a:fontRef>
         </p:style>
         <p:txBody>
-          <a:bodyPr rtlCol="0" anchor="ctr"/>
+          <a:bodyPr rtlCol="0" anchor="ctr" wrap="square"/>
           <a:lstStyle/>
           <a:p>
             <a:pPr algn="ctr">
-              <a:defRPr sz="2800" b="1">
+              <a:defRPr sz="1700" b="1">
                 <a:solidFill>
                   <a:srgbClr val="FFFFFF"/>
                 </a:solidFill>
               </a:defRPr>
             </a:pPr>
             <a:r>
-              <a:t>✓</a:t>
-            </a:r>
-          </a:p>
-        </p:txBody>
-      </p:sp>
-      <p:sp>
-        <p:nvSpPr>
-          <p:cNvPr id="5" name="TextBox 4"/>
+              <a:t>Key Insight: Stacking achieved the BEST F1 score (0.292) across all 14 models</a:t>
+            </a:r>
+          </a:p>
+        </p:txBody>
+      </p:sp>
+      <p:sp>
+        <p:nvSpPr>
+          <p:cNvPr id="24" name="TextBox 23"/>
           <p:cNvSpPr txBox="1"/>
           <p:nvPr/>
         </p:nvSpPr>
         <p:spPr>
           <a:xfrm>
-            <a:off x="457200" y="1051560"/>
-            <a:ext cx="10972800" cy="365760"/>
+            <a:off x="1188720" y="5669280"/>
+            <a:ext cx="10058400" cy="274320"/>
           </a:xfrm>
           <a:prstGeom prst="rect">
             <a:avLst/>
@@ -6161,943 +7771,29 @@
           <a:lstStyle/>
           <a:p>
             <a:pPr algn="l">
-              <a:defRPr sz="2000" b="1">
-                <a:solidFill>
-                  <a:srgbClr val="6F42C1"/>
-                </a:solidFill>
-                <a:latin typeface="Calibri"/>
-              </a:defRPr>
-            </a:pPr>
-            <a:r>
-              <a:t>Tier 3 — 3 Ensemble Models</a:t>
-            </a:r>
-          </a:p>
-        </p:txBody>
-      </p:sp>
-      <p:sp>
-        <p:nvSpPr>
-          <p:cNvPr id="6" name="Rounded Rectangle 5"/>
-          <p:cNvSpPr/>
-          <p:nvPr/>
-        </p:nvSpPr>
-        <p:spPr>
-          <a:xfrm>
-            <a:off x="457200" y="1508760"/>
-            <a:ext cx="3474720" cy="411480"/>
-          </a:xfrm>
-          <a:prstGeom prst="roundRect">
-            <a:avLst/>
-          </a:prstGeom>
-          <a:solidFill>
-            <a:srgbClr val="007ACC"/>
-          </a:solidFill>
-          <a:ln>
-            <a:noFill/>
-          </a:ln>
-        </p:spPr>
-        <p:style>
-          <a:lnRef idx="1">
-            <a:schemeClr val="accent1"/>
-          </a:lnRef>
-          <a:fillRef idx="3">
-            <a:schemeClr val="accent1"/>
-          </a:fillRef>
-          <a:effectRef idx="2">
-            <a:schemeClr val="accent1"/>
-          </a:effectRef>
-          <a:fontRef idx="minor">
-            <a:schemeClr val="lt1"/>
-          </a:fontRef>
-        </p:style>
-        <p:txBody>
-          <a:bodyPr rtlCol="0" anchor="ctr" wrap="square"/>
-          <a:lstStyle/>
-          <a:p>
-            <a:pPr algn="ctr">
-              <a:defRPr sz="1600" b="1">
-                <a:solidFill>
-                  <a:srgbClr val="FFFFFF"/>
-                </a:solidFill>
-              </a:defRPr>
-            </a:pPr>
-            <a:r>
-              <a:t>Voting Ensemble</a:t>
-            </a:r>
-          </a:p>
-        </p:txBody>
-      </p:sp>
-      <p:sp>
-        <p:nvSpPr>
-          <p:cNvPr id="7" name="Rounded Rectangle 6"/>
-          <p:cNvSpPr/>
-          <p:nvPr/>
-        </p:nvSpPr>
-        <p:spPr>
-          <a:xfrm>
-            <a:off x="457200" y="2011680"/>
-            <a:ext cx="3474720" cy="1463040"/>
-          </a:xfrm>
-          <a:prstGeom prst="roundRect">
-            <a:avLst/>
-          </a:prstGeom>
-          <a:solidFill>
-            <a:srgbClr val="F0F4F8"/>
-          </a:solidFill>
-          <a:ln>
-            <a:noFill/>
-          </a:ln>
-        </p:spPr>
-        <p:style>
-          <a:lnRef idx="1">
-            <a:schemeClr val="accent1"/>
-          </a:lnRef>
-          <a:fillRef idx="3">
-            <a:schemeClr val="accent1"/>
-          </a:fillRef>
-          <a:effectRef idx="2">
-            <a:schemeClr val="accent1"/>
-          </a:effectRef>
-          <a:fontRef idx="minor">
-            <a:schemeClr val="lt1"/>
-          </a:fontRef>
-        </p:style>
-        <p:txBody>
-          <a:bodyPr rtlCol="0" anchor="ctr" wrap="square" lIns="137160" rIns="137160" tIns="91440" bIns="91440"/>
-          <a:lstStyle/>
-          <a:p>
-            <a:pPr algn="ctr">
-              <a:spcAft>
-                <a:spcPts val="200"/>
-              </a:spcAft>
-              <a:defRPr sz="1300">
-                <a:solidFill>
-                  <a:srgbClr val="2D2D2D"/>
-                </a:solidFill>
-                <a:latin typeface="Calibri"/>
-              </a:defRPr>
-            </a:pPr>
-            <a:r>
-              <a:t>Combines SVM + Random Forest</a:t>
-            </a:r>
-          </a:p>
-          <a:p>
-            <a:pPr algn="ctr">
-              <a:spcAft>
-                <a:spcPts val="200"/>
-              </a:spcAft>
-              <a:defRPr sz="1300">
-                <a:solidFill>
-                  <a:srgbClr val="2D2D2D"/>
-                </a:solidFill>
-                <a:latin typeface="Calibri"/>
-              </a:defRPr>
-            </a:pPr>
-            <a:r>
-              <a:t>+ MLP predictions</a:t>
-            </a:r>
-          </a:p>
-          <a:p>
-            <a:pPr algn="ctr">
-              <a:spcAft>
-                <a:spcPts val="200"/>
-              </a:spcAft>
-              <a:defRPr sz="1300">
-                <a:solidFill>
-                  <a:srgbClr val="2D2D2D"/>
-                </a:solidFill>
-                <a:latin typeface="Calibri"/>
-              </a:defRPr>
-            </a:pPr>
-          </a:p>
-          <a:p>
-            <a:pPr algn="ctr">
-              <a:spcAft>
-                <a:spcPts val="200"/>
-              </a:spcAft>
-              <a:defRPr sz="1300">
-                <a:solidFill>
-                  <a:srgbClr val="2D2D2D"/>
-                </a:solidFill>
-                <a:latin typeface="Calibri"/>
-              </a:defRPr>
-            </a:pPr>
-            <a:r>
-              <a:t>Soft voting: averages</a:t>
-            </a:r>
-          </a:p>
-          <a:p>
-            <a:pPr algn="ctr">
-              <a:spcAft>
-                <a:spcPts val="200"/>
-              </a:spcAft>
-              <a:defRPr sz="1300">
-                <a:solidFill>
-                  <a:srgbClr val="2D2D2D"/>
-                </a:solidFill>
-                <a:latin typeface="Calibri"/>
-              </a:defRPr>
-            </a:pPr>
-            <a:r>
-              <a:t>probability outputs from</a:t>
-            </a:r>
-          </a:p>
-          <a:p>
-            <a:pPr algn="ctr">
-              <a:spcAft>
-                <a:spcPts val="200"/>
-              </a:spcAft>
-              <a:defRPr sz="1300">
-                <a:solidFill>
-                  <a:srgbClr val="2D2D2D"/>
-                </a:solidFill>
-                <a:latin typeface="Calibri"/>
-              </a:defRPr>
-            </a:pPr>
-            <a:r>
-              <a:t>all 3 base models</a:t>
-            </a:r>
-          </a:p>
-        </p:txBody>
-      </p:sp>
-      <p:sp>
-        <p:nvSpPr>
-          <p:cNvPr id="8" name="Rounded Rectangle 7"/>
-          <p:cNvSpPr/>
-          <p:nvPr/>
-        </p:nvSpPr>
-        <p:spPr>
-          <a:xfrm>
-            <a:off x="4297680" y="1508760"/>
-            <a:ext cx="3474720" cy="411480"/>
-          </a:xfrm>
-          <a:prstGeom prst="roundRect">
-            <a:avLst/>
-          </a:prstGeom>
-          <a:solidFill>
-            <a:srgbClr val="28A745"/>
-          </a:solidFill>
-          <a:ln>
-            <a:noFill/>
-          </a:ln>
-        </p:spPr>
-        <p:style>
-          <a:lnRef idx="1">
-            <a:schemeClr val="accent1"/>
-          </a:lnRef>
-          <a:fillRef idx="3">
-            <a:schemeClr val="accent1"/>
-          </a:fillRef>
-          <a:effectRef idx="2">
-            <a:schemeClr val="accent1"/>
-          </a:effectRef>
-          <a:fontRef idx="minor">
-            <a:schemeClr val="lt1"/>
-          </a:fontRef>
-        </p:style>
-        <p:txBody>
-          <a:bodyPr rtlCol="0" anchor="ctr" wrap="square"/>
-          <a:lstStyle/>
-          <a:p>
-            <a:pPr algn="ctr">
-              <a:defRPr sz="1600" b="1">
-                <a:solidFill>
-                  <a:srgbClr val="FFFFFF"/>
-                </a:solidFill>
-              </a:defRPr>
-            </a:pPr>
-            <a:r>
-              <a:t>Stacking Ensemble</a:t>
-            </a:r>
-          </a:p>
-        </p:txBody>
-      </p:sp>
-      <p:sp>
-        <p:nvSpPr>
-          <p:cNvPr id="9" name="Rounded Rectangle 8"/>
-          <p:cNvSpPr/>
-          <p:nvPr/>
-        </p:nvSpPr>
-        <p:spPr>
-          <a:xfrm>
-            <a:off x="4297680" y="2011680"/>
-            <a:ext cx="3474720" cy="1463040"/>
-          </a:xfrm>
-          <a:prstGeom prst="roundRect">
-            <a:avLst/>
-          </a:prstGeom>
-          <a:solidFill>
-            <a:srgbClr val="F0F4F8"/>
-          </a:solidFill>
-          <a:ln>
-            <a:noFill/>
-          </a:ln>
-        </p:spPr>
-        <p:style>
-          <a:lnRef idx="1">
-            <a:schemeClr val="accent1"/>
-          </a:lnRef>
-          <a:fillRef idx="3">
-            <a:schemeClr val="accent1"/>
-          </a:fillRef>
-          <a:effectRef idx="2">
-            <a:schemeClr val="accent1"/>
-          </a:effectRef>
-          <a:fontRef idx="minor">
-            <a:schemeClr val="lt1"/>
-          </a:fontRef>
-        </p:style>
-        <p:txBody>
-          <a:bodyPr rtlCol="0" anchor="ctr" wrap="square" lIns="137160" rIns="137160" tIns="91440" bIns="91440"/>
-          <a:lstStyle/>
-          <a:p>
-            <a:pPr algn="ctr">
-              <a:spcAft>
-                <a:spcPts val="200"/>
-              </a:spcAft>
-              <a:defRPr sz="1300">
-                <a:solidFill>
-                  <a:srgbClr val="2D2D2D"/>
-                </a:solidFill>
-                <a:latin typeface="Calibri"/>
-              </a:defRPr>
-            </a:pPr>
-            <a:r>
-              <a:t>SVM + RF + MLP produce</a:t>
-            </a:r>
-          </a:p>
-          <a:p>
-            <a:pPr algn="ctr">
-              <a:spcAft>
-                <a:spcPts val="200"/>
-              </a:spcAft>
-              <a:defRPr sz="1300">
-                <a:solidFill>
-                  <a:srgbClr val="2D2D2D"/>
-                </a:solidFill>
-                <a:latin typeface="Calibri"/>
-              </a:defRPr>
-            </a:pPr>
-            <a:r>
-              <a:t>probability outputs</a:t>
-            </a:r>
-          </a:p>
-          <a:p>
-            <a:pPr algn="ctr">
-              <a:spcAft>
-                <a:spcPts val="200"/>
-              </a:spcAft>
-              <a:defRPr sz="1300">
-                <a:solidFill>
-                  <a:srgbClr val="2D2D2D"/>
-                </a:solidFill>
-                <a:latin typeface="Calibri"/>
-              </a:defRPr>
-            </a:pPr>
-          </a:p>
-          <a:p>
-            <a:pPr algn="ctr">
-              <a:spcAft>
-                <a:spcPts val="200"/>
-              </a:spcAft>
-              <a:defRPr sz="1300">
-                <a:solidFill>
-                  <a:srgbClr val="2D2D2D"/>
-                </a:solidFill>
-                <a:latin typeface="Calibri"/>
-              </a:defRPr>
-            </a:pPr>
-            <a:r>
-              <a:t>Logistic Regression</a:t>
-            </a:r>
-          </a:p>
-          <a:p>
-            <a:pPr algn="ctr">
-              <a:spcAft>
-                <a:spcPts val="200"/>
-              </a:spcAft>
-              <a:defRPr sz="1300">
-                <a:solidFill>
-                  <a:srgbClr val="2D2D2D"/>
-                </a:solidFill>
-                <a:latin typeface="Calibri"/>
-              </a:defRPr>
-            </a:pPr>
-            <a:r>
-              <a:t>meta-learner combines</a:t>
-            </a:r>
-          </a:p>
-          <a:p>
-            <a:pPr algn="ctr">
-              <a:spcAft>
-                <a:spcPts val="200"/>
-              </a:spcAft>
-              <a:defRPr sz="1300">
-                <a:solidFill>
-                  <a:srgbClr val="2D2D2D"/>
-                </a:solidFill>
-                <a:latin typeface="Calibri"/>
-              </a:defRPr>
-            </a:pPr>
-            <a:r>
-              <a:t>stacked probabilities</a:t>
-            </a:r>
-          </a:p>
-        </p:txBody>
-      </p:sp>
-      <p:sp>
-        <p:nvSpPr>
-          <p:cNvPr id="10" name="Rounded Rectangle 9"/>
-          <p:cNvSpPr/>
-          <p:nvPr/>
-        </p:nvSpPr>
-        <p:spPr>
-          <a:xfrm>
-            <a:off x="8138160" y="1508760"/>
-            <a:ext cx="3474720" cy="411480"/>
-          </a:xfrm>
-          <a:prstGeom prst="roundRect">
-            <a:avLst/>
-          </a:prstGeom>
-          <a:solidFill>
-            <a:srgbClr val="F57C00"/>
-          </a:solidFill>
-          <a:ln>
-            <a:noFill/>
-          </a:ln>
-        </p:spPr>
-        <p:style>
-          <a:lnRef idx="1">
-            <a:schemeClr val="accent1"/>
-          </a:lnRef>
-          <a:fillRef idx="3">
-            <a:schemeClr val="accent1"/>
-          </a:fillRef>
-          <a:effectRef idx="2">
-            <a:schemeClr val="accent1"/>
-          </a:effectRef>
-          <a:fontRef idx="minor">
-            <a:schemeClr val="lt1"/>
-          </a:fontRef>
-        </p:style>
-        <p:txBody>
-          <a:bodyPr rtlCol="0" anchor="ctr" wrap="square"/>
-          <a:lstStyle/>
-          <a:p>
-            <a:pPr algn="ctr">
-              <a:defRPr sz="1600" b="1">
-                <a:solidFill>
-                  <a:srgbClr val="FFFFFF"/>
-                </a:solidFill>
-              </a:defRPr>
-            </a:pPr>
-            <a:r>
-              <a:t>Late Fusion</a:t>
-            </a:r>
-          </a:p>
-        </p:txBody>
-      </p:sp>
-      <p:sp>
-        <p:nvSpPr>
-          <p:cNvPr id="11" name="Rounded Rectangle 10"/>
-          <p:cNvSpPr/>
-          <p:nvPr/>
-        </p:nvSpPr>
-        <p:spPr>
-          <a:xfrm>
-            <a:off x="8138160" y="2011680"/>
-            <a:ext cx="3474720" cy="1463040"/>
-          </a:xfrm>
-          <a:prstGeom prst="roundRect">
-            <a:avLst/>
-          </a:prstGeom>
-          <a:solidFill>
-            <a:srgbClr val="F0F4F8"/>
-          </a:solidFill>
-          <a:ln>
-            <a:noFill/>
-          </a:ln>
-        </p:spPr>
-        <p:style>
-          <a:lnRef idx="1">
-            <a:schemeClr val="accent1"/>
-          </a:lnRef>
-          <a:fillRef idx="3">
-            <a:schemeClr val="accent1"/>
-          </a:fillRef>
-          <a:effectRef idx="2">
-            <a:schemeClr val="accent1"/>
-          </a:effectRef>
-          <a:fontRef idx="minor">
-            <a:schemeClr val="lt1"/>
-          </a:fontRef>
-        </p:style>
-        <p:txBody>
-          <a:bodyPr rtlCol="0" anchor="ctr" wrap="square" lIns="137160" rIns="137160" tIns="91440" bIns="91440"/>
-          <a:lstStyle/>
-          <a:p>
-            <a:pPr algn="ctr">
-              <a:spcAft>
-                <a:spcPts val="200"/>
-              </a:spcAft>
-              <a:defRPr sz="1300">
-                <a:solidFill>
-                  <a:srgbClr val="2D2D2D"/>
-                </a:solidFill>
-                <a:latin typeface="Calibri"/>
-              </a:defRPr>
-            </a:pPr>
-            <a:r>
-              <a:t>SVM on text features +</a:t>
-            </a:r>
-          </a:p>
-          <a:p>
-            <a:pPr algn="ctr">
-              <a:spcAft>
-                <a:spcPts val="200"/>
-              </a:spcAft>
-              <a:defRPr sz="1300">
-                <a:solidFill>
-                  <a:srgbClr val="2D2D2D"/>
-                </a:solidFill>
-                <a:latin typeface="Calibri"/>
-              </a:defRPr>
-            </a:pPr>
-            <a:r>
-              <a:t>RF on visual features</a:t>
-            </a:r>
-          </a:p>
-          <a:p>
-            <a:pPr algn="ctr">
-              <a:spcAft>
-                <a:spcPts val="200"/>
-              </a:spcAft>
-              <a:defRPr sz="1300">
-                <a:solidFill>
-                  <a:srgbClr val="2D2D2D"/>
-                </a:solidFill>
-                <a:latin typeface="Calibri"/>
-              </a:defRPr>
-            </a:pPr>
-          </a:p>
-          <a:p>
-            <a:pPr algn="ctr">
-              <a:spcAft>
-                <a:spcPts val="200"/>
-              </a:spcAft>
-              <a:defRPr sz="1300">
-                <a:solidFill>
-                  <a:srgbClr val="2D2D2D"/>
-                </a:solidFill>
-                <a:latin typeface="Calibri"/>
-              </a:defRPr>
-            </a:pPr>
-            <a:r>
-              <a:t>Meta-learner fuses</a:t>
-            </a:r>
-          </a:p>
-          <a:p>
-            <a:pPr algn="ctr">
-              <a:spcAft>
-                <a:spcPts val="200"/>
-              </a:spcAft>
-              <a:defRPr sz="1300">
-                <a:solidFill>
-                  <a:srgbClr val="2D2D2D"/>
-                </a:solidFill>
-                <a:latin typeface="Calibri"/>
-              </a:defRPr>
-            </a:pPr>
-            <a:r>
-              <a:t>modality-specific</a:t>
-            </a:r>
-          </a:p>
-          <a:p>
-            <a:pPr algn="ctr">
-              <a:spcAft>
-                <a:spcPts val="200"/>
-              </a:spcAft>
-              <a:defRPr sz="1300">
-                <a:solidFill>
-                  <a:srgbClr val="2D2D2D"/>
-                </a:solidFill>
-                <a:latin typeface="Calibri"/>
-              </a:defRPr>
-            </a:pPr>
-            <a:r>
-              <a:t>prediction branches</a:t>
-            </a:r>
-          </a:p>
-        </p:txBody>
-      </p:sp>
-      <p:sp>
-        <p:nvSpPr>
-          <p:cNvPr id="12" name="TextBox 11"/>
+              <a:defRPr sz="1300" b="1">
+                <a:solidFill>
+                  <a:srgbClr val="007ACC"/>
+                </a:solidFill>
+                <a:latin typeface="Calibri"/>
+              </a:defRPr>
+            </a:pPr>
+            <a:r>
+              <a:t>Where in the code:</a:t>
+            </a:r>
+          </a:p>
+        </p:txBody>
+      </p:sp>
+      <p:sp>
+        <p:nvSpPr>
+          <p:cNvPr id="25" name="TextBox 24"/>
           <p:cNvSpPr txBox="1"/>
           <p:nvPr/>
         </p:nvSpPr>
         <p:spPr>
           <a:xfrm>
-            <a:off x="457200" y="3749039"/>
-            <a:ext cx="10972800" cy="320040"/>
-          </a:xfrm>
-          <a:prstGeom prst="rect">
-            <a:avLst/>
-          </a:prstGeom>
-          <a:noFill/>
-        </p:spPr>
-        <p:txBody>
-          <a:bodyPr wrap="square">
-            <a:spAutoFit/>
-          </a:bodyPr>
-          <a:lstStyle/>
-          <a:p>
-            <a:pPr algn="l">
-              <a:defRPr sz="1700" b="1">
-                <a:solidFill>
-                  <a:srgbClr val="6F42C1"/>
-                </a:solidFill>
-                <a:latin typeface="Calibri"/>
-              </a:defRPr>
-            </a:pPr>
-            <a:r>
-              <a:t>Hybrid = Combines Classical ML (Tier 1) + Deep Learning (Tier 2)</a:t>
-            </a:r>
-          </a:p>
-        </p:txBody>
-      </p:sp>
-      <p:sp>
-        <p:nvSpPr>
-          <p:cNvPr id="13" name="Rounded Rectangle 12"/>
-          <p:cNvSpPr/>
-          <p:nvPr/>
-        </p:nvSpPr>
-        <p:spPr>
-          <a:xfrm>
-            <a:off x="914400" y="4206240"/>
-            <a:ext cx="2286000" cy="457200"/>
-          </a:xfrm>
-          <a:prstGeom prst="roundRect">
-            <a:avLst/>
-          </a:prstGeom>
-          <a:solidFill>
-            <a:srgbClr val="007ACC"/>
-          </a:solidFill>
-          <a:ln>
-            <a:noFill/>
-          </a:ln>
-        </p:spPr>
-        <p:style>
-          <a:lnRef idx="1">
-            <a:schemeClr val="accent1"/>
-          </a:lnRef>
-          <a:fillRef idx="3">
-            <a:schemeClr val="accent1"/>
-          </a:fillRef>
-          <a:effectRef idx="2">
-            <a:schemeClr val="accent1"/>
-          </a:effectRef>
-          <a:fontRef idx="minor">
-            <a:schemeClr val="lt1"/>
-          </a:fontRef>
-        </p:style>
-        <p:txBody>
-          <a:bodyPr rtlCol="0" anchor="ctr" wrap="square"/>
-          <a:lstStyle/>
-          <a:p>
-            <a:pPr algn="ctr">
-              <a:defRPr sz="1400" b="1">
-                <a:solidFill>
-                  <a:srgbClr val="FFFFFF"/>
-                </a:solidFill>
-              </a:defRPr>
-            </a:pPr>
-            <a:r>
-              <a:t>Tier 1: Classical ML</a:t>
-            </a:r>
-          </a:p>
-        </p:txBody>
-      </p:sp>
-      <p:sp>
-        <p:nvSpPr>
-          <p:cNvPr id="14" name="Rounded Rectangle 13"/>
-          <p:cNvSpPr/>
-          <p:nvPr/>
-        </p:nvSpPr>
-        <p:spPr>
-          <a:xfrm>
-            <a:off x="3657600" y="4206240"/>
-            <a:ext cx="2286000" cy="457200"/>
-          </a:xfrm>
-          <a:prstGeom prst="roundRect">
-            <a:avLst/>
-          </a:prstGeom>
-          <a:solidFill>
-            <a:srgbClr val="F57C00"/>
-          </a:solidFill>
-          <a:ln>
-            <a:noFill/>
-          </a:ln>
-        </p:spPr>
-        <p:style>
-          <a:lnRef idx="1">
-            <a:schemeClr val="accent1"/>
-          </a:lnRef>
-          <a:fillRef idx="3">
-            <a:schemeClr val="accent1"/>
-          </a:fillRef>
-          <a:effectRef idx="2">
-            <a:schemeClr val="accent1"/>
-          </a:effectRef>
-          <a:fontRef idx="minor">
-            <a:schemeClr val="lt1"/>
-          </a:fontRef>
-        </p:style>
-        <p:txBody>
-          <a:bodyPr rtlCol="0" anchor="ctr" wrap="square"/>
-          <a:lstStyle/>
-          <a:p>
-            <a:pPr algn="ctr">
-              <a:defRPr sz="1400" b="1">
-                <a:solidFill>
-                  <a:srgbClr val="FFFFFF"/>
-                </a:solidFill>
-              </a:defRPr>
-            </a:pPr>
-            <a:r>
-              <a:t>Tier 2: Deep Learning</a:t>
-            </a:r>
-          </a:p>
-        </p:txBody>
-      </p:sp>
-      <p:sp>
-        <p:nvSpPr>
-          <p:cNvPr id="15" name="Rectangle 14"/>
-          <p:cNvSpPr/>
-          <p:nvPr/>
-        </p:nvSpPr>
-        <p:spPr>
-          <a:xfrm>
-            <a:off x="6217920" y="4343400"/>
-            <a:ext cx="914400" cy="36576"/>
-          </a:xfrm>
-          <a:prstGeom prst="rect">
-            <a:avLst/>
-          </a:prstGeom>
-          <a:solidFill>
-            <a:srgbClr val="2D2D2D"/>
-          </a:solidFill>
-          <a:ln>
-            <a:noFill/>
-          </a:ln>
-        </p:spPr>
-        <p:style>
-          <a:lnRef idx="1">
-            <a:schemeClr val="accent1"/>
-          </a:lnRef>
-          <a:fillRef idx="3">
-            <a:schemeClr val="accent1"/>
-          </a:fillRef>
-          <a:effectRef idx="2">
-            <a:schemeClr val="accent1"/>
-          </a:effectRef>
-          <a:fontRef idx="minor">
-            <a:schemeClr val="lt1"/>
-          </a:fontRef>
-        </p:style>
-        <p:txBody>
-          <a:bodyPr rtlCol="0" anchor="ctr"/>
-          <a:lstStyle/>
-          <a:p>
-            <a:pPr algn="ctr"/>
-          </a:p>
-        </p:txBody>
-      </p:sp>
-      <p:sp>
-        <p:nvSpPr>
-          <p:cNvPr id="16" name="TextBox 15"/>
-          <p:cNvSpPr txBox="1"/>
-          <p:nvPr/>
-        </p:nvSpPr>
-        <p:spPr>
-          <a:xfrm>
-            <a:off x="6309360" y="4160520"/>
-            <a:ext cx="731520" cy="274320"/>
-          </a:xfrm>
-          <a:prstGeom prst="rect">
-            <a:avLst/>
-          </a:prstGeom>
-          <a:noFill/>
-        </p:spPr>
-        <p:txBody>
-          <a:bodyPr wrap="square">
-            <a:spAutoFit/>
-          </a:bodyPr>
-          <a:lstStyle/>
-          <a:p>
-            <a:pPr algn="ctr">
-              <a:defRPr sz="1400" b="0">
-                <a:solidFill>
-                  <a:srgbClr val="2D2D2D"/>
-                </a:solidFill>
-                <a:latin typeface="Calibri"/>
-              </a:defRPr>
-            </a:pPr>
-            <a:r>
-              <a:t>▶</a:t>
-            </a:r>
-          </a:p>
-        </p:txBody>
-      </p:sp>
-      <p:sp>
-        <p:nvSpPr>
-          <p:cNvPr id="17" name="Rounded Rectangle 16"/>
-          <p:cNvSpPr/>
-          <p:nvPr/>
-        </p:nvSpPr>
-        <p:spPr>
-          <a:xfrm>
-            <a:off x="7315200" y="4206240"/>
-            <a:ext cx="2560320" cy="457200"/>
-          </a:xfrm>
-          <a:prstGeom prst="roundRect">
-            <a:avLst/>
-          </a:prstGeom>
-          <a:solidFill>
-            <a:srgbClr val="6F42C1"/>
-          </a:solidFill>
-          <a:ln>
-            <a:noFill/>
-          </a:ln>
-        </p:spPr>
-        <p:style>
-          <a:lnRef idx="1">
-            <a:schemeClr val="accent1"/>
-          </a:lnRef>
-          <a:fillRef idx="3">
-            <a:schemeClr val="accent1"/>
-          </a:fillRef>
-          <a:effectRef idx="2">
-            <a:schemeClr val="accent1"/>
-          </a:effectRef>
-          <a:fontRef idx="minor">
-            <a:schemeClr val="lt1"/>
-          </a:fontRef>
-        </p:style>
-        <p:txBody>
-          <a:bodyPr rtlCol="0" anchor="ctr" wrap="square"/>
-          <a:lstStyle/>
-          <a:p>
-            <a:pPr algn="ctr">
-              <a:defRPr sz="1400" b="1">
-                <a:solidFill>
-                  <a:srgbClr val="FFFFFF"/>
-                </a:solidFill>
-              </a:defRPr>
-            </a:pPr>
-            <a:r>
-              <a:t>Tier 3: Ensemble</a:t>
-            </a:r>
-          </a:p>
-        </p:txBody>
-      </p:sp>
-      <p:sp>
-        <p:nvSpPr>
-          <p:cNvPr id="18" name="Rounded Rectangle 17"/>
-          <p:cNvSpPr/>
-          <p:nvPr/>
-        </p:nvSpPr>
-        <p:spPr>
-          <a:xfrm>
-            <a:off x="1371600" y="4937760"/>
-            <a:ext cx="9448495" cy="502920"/>
-          </a:xfrm>
-          <a:prstGeom prst="roundRect">
-            <a:avLst/>
-          </a:prstGeom>
-          <a:solidFill>
-            <a:srgbClr val="28A745"/>
-          </a:solidFill>
-          <a:ln>
-            <a:noFill/>
-          </a:ln>
-        </p:spPr>
-        <p:style>
-          <a:lnRef idx="1">
-            <a:schemeClr val="accent1"/>
-          </a:lnRef>
-          <a:fillRef idx="3">
-            <a:schemeClr val="accent1"/>
-          </a:fillRef>
-          <a:effectRef idx="2">
-            <a:schemeClr val="accent1"/>
-          </a:effectRef>
-          <a:fontRef idx="minor">
-            <a:schemeClr val="lt1"/>
-          </a:fontRef>
-        </p:style>
-        <p:txBody>
-          <a:bodyPr rtlCol="0" anchor="ctr" wrap="square"/>
-          <a:lstStyle/>
-          <a:p>
-            <a:pPr algn="ctr">
-              <a:defRPr sz="1700" b="1">
-                <a:solidFill>
-                  <a:srgbClr val="FFFFFF"/>
-                </a:solidFill>
-              </a:defRPr>
-            </a:pPr>
-            <a:r>
-              <a:t>Key Insight: Stacking achieved the BEST F1 score (0.292) across all 14 models</a:t>
-            </a:r>
-          </a:p>
-        </p:txBody>
-      </p:sp>
-      <p:sp>
-        <p:nvSpPr>
-          <p:cNvPr id="19" name="TextBox 18"/>
-          <p:cNvSpPr txBox="1"/>
-          <p:nvPr/>
-        </p:nvSpPr>
-        <p:spPr>
-          <a:xfrm>
-            <a:off x="457200" y="5623560"/>
-            <a:ext cx="10972800" cy="274320"/>
-          </a:xfrm>
-          <a:prstGeom prst="rect">
-            <a:avLst/>
-          </a:prstGeom>
-          <a:noFill/>
-        </p:spPr>
-        <p:txBody>
-          <a:bodyPr wrap="square">
-            <a:spAutoFit/>
-          </a:bodyPr>
-          <a:lstStyle/>
-          <a:p>
-            <a:pPr algn="l">
-              <a:defRPr sz="1300" b="1">
-                <a:solidFill>
-                  <a:srgbClr val="007ACC"/>
-                </a:solidFill>
-                <a:latin typeface="Calibri"/>
-              </a:defRPr>
-            </a:pPr>
-            <a:r>
-              <a:t>Where in the code:</a:t>
-            </a:r>
-          </a:p>
-        </p:txBody>
-      </p:sp>
-      <p:sp>
-        <p:nvSpPr>
-          <p:cNvPr id="20" name="TextBox 19"/>
-          <p:cNvSpPr txBox="1"/>
-          <p:nvPr/>
-        </p:nvSpPr>
-        <p:spPr>
-          <a:xfrm>
-            <a:off x="457200" y="5897880"/>
-            <a:ext cx="10972800" cy="685800"/>
+            <a:off x="1188720" y="5943600"/>
+            <a:ext cx="10058400" cy="685800"/>
           </a:xfrm>
           <a:prstGeom prst="rect">
             <a:avLst/>
@@ -7116,7 +7812,7 @@
               </a:spcAft>
               <a:defRPr sz="1100">
                 <a:solidFill>
-                  <a:srgbClr val="666666"/>
+                  <a:srgbClr val="CCCCCC"/>
                 </a:solidFill>
                 <a:latin typeface="Consolas"/>
               </a:defRPr>
@@ -7132,7 +7828,7 @@
               </a:spcAft>
               <a:defRPr sz="1100">
                 <a:solidFill>
-                  <a:srgbClr val="666666"/>
+                  <a:srgbClr val="CCCCCC"/>
                 </a:solidFill>
                 <a:latin typeface="Consolas"/>
               </a:defRPr>
@@ -7148,7 +7844,7 @@
               </a:spcAft>
               <a:defRPr sz="1100">
                 <a:solidFill>
-                  <a:srgbClr val="666666"/>
+                  <a:srgbClr val="CCCCCC"/>
                 </a:solidFill>
                 <a:latin typeface="Consolas"/>
               </a:defRPr>
@@ -7156,49 +7852,6 @@
             <a:r>
               <a:t>classifiers/tier3/late_fusion.py: modality-specific branches + fusion</a:t>
             </a:r>
-          </a:p>
-        </p:txBody>
-      </p:sp>
-      <p:sp>
-        <p:nvSpPr>
-          <p:cNvPr id="21" name="Rectangle 20"/>
-          <p:cNvSpPr/>
-          <p:nvPr/>
-        </p:nvSpPr>
-        <p:spPr>
-          <a:xfrm>
-            <a:off x="0" y="6803136"/>
-            <a:ext cx="12191695" cy="54864"/>
-          </a:xfrm>
-          <a:prstGeom prst="rect">
-            <a:avLst/>
-          </a:prstGeom>
-          <a:solidFill>
-            <a:srgbClr val="6F42C1"/>
-          </a:solidFill>
-          <a:ln>
-            <a:noFill/>
-          </a:ln>
-        </p:spPr>
-        <p:style>
-          <a:lnRef idx="1">
-            <a:schemeClr val="accent1"/>
-          </a:lnRef>
-          <a:fillRef idx="3">
-            <a:schemeClr val="accent1"/>
-          </a:fillRef>
-          <a:effectRef idx="2">
-            <a:schemeClr val="accent1"/>
-          </a:effectRef>
-          <a:fontRef idx="minor">
-            <a:schemeClr val="lt1"/>
-          </a:fontRef>
-        </p:style>
-        <p:txBody>
-          <a:bodyPr rtlCol="0" anchor="ctr"/>
-          <a:lstStyle/>
-          <a:p>
-            <a:pPr algn="ctr"/>
           </a:p>
         </p:txBody>
       </p:sp>
@@ -7216,7 +7869,7 @@
     <p:bg>
       <p:bgPr>
         <a:solidFill>
-          <a:srgbClr val="FFFFFF"/>
+          <a:srgbClr val="003D7C"/>
         </a:solidFill>
         <a:effectLst/>
       </p:bgPr>
@@ -7237,13 +7890,13 @@
         <p:spPr>
           <a:xfrm>
             <a:off x="0" y="0"/>
-            <a:ext cx="12191695" cy="914400"/>
+            <a:ext cx="1005840" cy="822960"/>
           </a:xfrm>
           <a:prstGeom prst="rect">
             <a:avLst/>
           </a:prstGeom>
           <a:solidFill>
-            <a:srgbClr val="F57C00"/>
+            <a:srgbClr val="FFE033"/>
           </a:solidFill>
           <a:ln>
             <a:noFill/>
@@ -7273,14 +7926,57 @@
       </p:sp>
       <p:sp>
         <p:nvSpPr>
-          <p:cNvPr id="3" name="TextBox 2"/>
+          <p:cNvPr id="3" name="Rectangle 2"/>
+          <p:cNvSpPr/>
+          <p:nvPr/>
+        </p:nvSpPr>
+        <p:spPr>
+          <a:xfrm>
+            <a:off x="457200" y="822960"/>
+            <a:ext cx="54864" cy="5303520"/>
+          </a:xfrm>
+          <a:prstGeom prst="rect">
+            <a:avLst/>
+          </a:prstGeom>
+          <a:solidFill>
+            <a:srgbClr val="EF7C00"/>
+          </a:solidFill>
+          <a:ln>
+            <a:noFill/>
+          </a:ln>
+        </p:spPr>
+        <p:style>
+          <a:lnRef idx="1">
+            <a:schemeClr val="accent1"/>
+          </a:lnRef>
+          <a:fillRef idx="3">
+            <a:schemeClr val="accent1"/>
+          </a:fillRef>
+          <a:effectRef idx="2">
+            <a:schemeClr val="accent1"/>
+          </a:effectRef>
+          <a:fontRef idx="minor">
+            <a:schemeClr val="lt1"/>
+          </a:fontRef>
+        </p:style>
+        <p:txBody>
+          <a:bodyPr rtlCol="0" anchor="ctr"/>
+          <a:lstStyle/>
+          <a:p>
+            <a:pPr algn="ctr"/>
+          </a:p>
+        </p:txBody>
+      </p:sp>
+      <p:sp>
+        <p:nvSpPr>
+          <p:cNvPr id="4" name="TextBox 3"/>
           <p:cNvSpPr txBox="1"/>
           <p:nvPr/>
         </p:nvSpPr>
         <p:spPr>
           <a:xfrm>
-            <a:off x="457200" y="137160"/>
-            <a:ext cx="11277295" cy="640080"/>
+            <a:off x="10332720" y="137160"/>
+            <a:ext cx="1645920" cy="457200"/>
           </a:xfrm>
           <a:prstGeom prst="rect">
             <a:avLst/>
@@ -7293,11 +7989,87 @@
           </a:bodyPr>
           <a:lstStyle/>
           <a:p>
-            <a:pPr algn="ctr">
-              <a:defRPr sz="2800" b="1">
+            <a:pPr algn="r">
+              <a:defRPr sz="2400" b="1">
                 <a:solidFill>
                   <a:srgbClr val="FFFFFF"/>
                 </a:solidFill>
+                <a:latin typeface="Arial"/>
+              </a:defRPr>
+            </a:pPr>
+            <a:r>
+              <a:t>NUS</a:t>
+            </a:r>
+          </a:p>
+        </p:txBody>
+      </p:sp>
+      <p:sp>
+        <p:nvSpPr>
+          <p:cNvPr id="5" name="TextBox 4"/>
+          <p:cNvSpPr txBox="1"/>
+          <p:nvPr/>
+        </p:nvSpPr>
+        <p:spPr>
+          <a:xfrm>
+            <a:off x="10332720" y="457200"/>
+            <a:ext cx="1645920" cy="320040"/>
+          </a:xfrm>
+          <a:prstGeom prst="rect">
+            <a:avLst/>
+          </a:prstGeom>
+          <a:noFill/>
+        </p:spPr>
+        <p:txBody>
+          <a:bodyPr wrap="square">
+            <a:spAutoFit/>
+          </a:bodyPr>
+          <a:lstStyle/>
+          <a:p>
+            <a:pPr algn="r">
+              <a:defRPr sz="800" b="0">
+                <a:solidFill>
+                  <a:srgbClr val="FFFFFF"/>
+                </a:solidFill>
+                <a:latin typeface="Arial"/>
+              </a:defRPr>
+            </a:pPr>
+            <a:r>
+              <a:t>National University</a:t>
+            </a:r>
+            <a:br/>
+            <a:r>
+              <a:t>of Singapore</a:t>
+            </a:r>
+          </a:p>
+        </p:txBody>
+      </p:sp>
+      <p:sp>
+        <p:nvSpPr>
+          <p:cNvPr id="6" name="TextBox 5"/>
+          <p:cNvSpPr txBox="1"/>
+          <p:nvPr/>
+        </p:nvSpPr>
+        <p:spPr>
+          <a:xfrm>
+            <a:off x="1188720" y="91440"/>
+            <a:ext cx="8686800" cy="640080"/>
+          </a:xfrm>
+          <a:prstGeom prst="rect">
+            <a:avLst/>
+          </a:prstGeom>
+          <a:noFill/>
+        </p:spPr>
+        <p:txBody>
+          <a:bodyPr wrap="square">
+            <a:spAutoFit/>
+          </a:bodyPr>
+          <a:lstStyle/>
+          <a:p>
+            <a:pPr algn="l">
+              <a:defRPr sz="3200" b="1">
+                <a:solidFill>
+                  <a:srgbClr val="FFFFFF"/>
+                </a:solidFill>
                 <a:latin typeface="Calibri"/>
               </a:defRPr>
             </a:pPr>
@@ -7309,7 +8081,86 @@
       </p:sp>
       <p:sp>
         <p:nvSpPr>
-          <p:cNvPr id="4" name="Oval 3"/>
+          <p:cNvPr id="7" name="Rectangle 6"/>
+          <p:cNvSpPr/>
+          <p:nvPr/>
+        </p:nvSpPr>
+        <p:spPr>
+          <a:xfrm>
+            <a:off x="0" y="6172200"/>
+            <a:ext cx="12191695" cy="54864"/>
+          </a:xfrm>
+          <a:prstGeom prst="rect">
+            <a:avLst/>
+          </a:prstGeom>
+          <a:solidFill>
+            <a:srgbClr val="EF7C00"/>
+          </a:solidFill>
+          <a:ln>
+            <a:noFill/>
+          </a:ln>
+        </p:spPr>
+        <p:style>
+          <a:lnRef idx="1">
+            <a:schemeClr val="accent1"/>
+          </a:lnRef>
+          <a:fillRef idx="3">
+            <a:schemeClr val="accent1"/>
+          </a:fillRef>
+          <a:effectRef idx="2">
+            <a:schemeClr val="accent1"/>
+          </a:effectRef>
+          <a:fontRef idx="minor">
+            <a:schemeClr val="lt1"/>
+          </a:fontRef>
+        </p:style>
+        <p:txBody>
+          <a:bodyPr rtlCol="0" anchor="ctr"/>
+          <a:lstStyle/>
+          <a:p>
+            <a:pPr algn="ctr"/>
+          </a:p>
+        </p:txBody>
+      </p:sp>
+      <p:sp>
+        <p:nvSpPr>
+          <p:cNvPr id="8" name="TextBox 7"/>
+          <p:cNvSpPr txBox="1"/>
+          <p:nvPr/>
+        </p:nvSpPr>
+        <p:spPr>
+          <a:xfrm>
+            <a:off x="274320" y="6400800"/>
+            <a:ext cx="7315200" cy="274320"/>
+          </a:xfrm>
+          <a:prstGeom prst="rect">
+            <a:avLst/>
+          </a:prstGeom>
+          <a:noFill/>
+        </p:spPr>
+        <p:txBody>
+          <a:bodyPr wrap="square">
+            <a:spAutoFit/>
+          </a:bodyPr>
+          <a:lstStyle/>
+          <a:p>
+            <a:pPr algn="l">
+              <a:defRPr sz="800" b="0">
+                <a:solidFill>
+                  <a:srgbClr val="FFFFFF"/>
+                </a:solidFill>
+                <a:latin typeface="Calibri"/>
+              </a:defRPr>
+            </a:pPr>
+            <a:r>
+              <a:t>© Copyright National University of Singapore. All Rights Reserved.</a:t>
+            </a:r>
+          </a:p>
+        </p:txBody>
+      </p:sp>
+      <p:sp>
+        <p:nvSpPr>
+          <p:cNvPr id="9" name="Oval 8"/>
           <p:cNvSpPr/>
           <p:nvPr/>
         </p:nvSpPr>
@@ -7361,14 +8212,14 @@
       </p:sp>
       <p:sp>
         <p:nvSpPr>
-          <p:cNvPr id="5" name="Rounded Rectangle 4"/>
+          <p:cNvPr id="10" name="Rounded Rectangle 9"/>
           <p:cNvSpPr/>
           <p:nvPr/>
         </p:nvSpPr>
         <p:spPr>
           <a:xfrm>
-            <a:off x="365760" y="1051560"/>
-            <a:ext cx="5486400" cy="411480"/>
+            <a:off x="1188720" y="1188720"/>
+            <a:ext cx="5029200" cy="411480"/>
           </a:xfrm>
           <a:prstGeom prst="roundRect">
             <a:avLst/>
@@ -7413,14 +8264,14 @@
       </p:sp>
       <p:sp>
         <p:nvSpPr>
-          <p:cNvPr id="6" name="Rounded Rectangle 5"/>
+          <p:cNvPr id="11" name="Rounded Rectangle 10"/>
           <p:cNvSpPr/>
           <p:nvPr/>
         </p:nvSpPr>
         <p:spPr>
           <a:xfrm>
-            <a:off x="365760" y="1508760"/>
-            <a:ext cx="5486400" cy="1463040"/>
+            <a:off x="1188720" y="1645920"/>
+            <a:ext cx="5029200" cy="1463040"/>
           </a:xfrm>
           <a:prstGeom prst="roundRect">
             <a:avLst/>
@@ -7456,7 +8307,7 @@
               </a:spcAft>
               <a:defRPr sz="1300">
                 <a:solidFill>
-                  <a:srgbClr val="2D2D2D"/>
+                  <a:srgbClr val="EF7C00"/>
                 </a:solidFill>
                 <a:latin typeface="Calibri"/>
               </a:defRPr>
@@ -7472,7 +8323,7 @@
               </a:spcAft>
               <a:defRPr sz="1300">
                 <a:solidFill>
-                  <a:srgbClr val="2D2D2D"/>
+                  <a:srgbClr val="EF7C00"/>
                 </a:solidFill>
                 <a:latin typeface="Calibri"/>
               </a:defRPr>
@@ -7488,7 +8339,7 @@
               </a:spcAft>
               <a:defRPr sz="1300">
                 <a:solidFill>
-                  <a:srgbClr val="2D2D2D"/>
+                  <a:srgbClr val="EF7C00"/>
                 </a:solidFill>
                 <a:latin typeface="Calibri"/>
               </a:defRPr>
@@ -7504,7 +8355,7 @@
               </a:spcAft>
               <a:defRPr sz="1300">
                 <a:solidFill>
-                  <a:srgbClr val="2D2D2D"/>
+                  <a:srgbClr val="EF7C00"/>
                 </a:solidFill>
                 <a:latin typeface="Calibri"/>
               </a:defRPr>
@@ -7520,7 +8371,7 @@
               </a:spcAft>
               <a:defRPr sz="1300">
                 <a:solidFill>
-                  <a:srgbClr val="2D2D2D"/>
+                  <a:srgbClr val="EF7C00"/>
                 </a:solidFill>
                 <a:latin typeface="Calibri"/>
               </a:defRPr>
@@ -7533,14 +8384,14 @@
       </p:sp>
       <p:sp>
         <p:nvSpPr>
-          <p:cNvPr id="7" name="Rounded Rectangle 6"/>
+          <p:cNvPr id="12" name="Rounded Rectangle 11"/>
           <p:cNvSpPr/>
           <p:nvPr/>
         </p:nvSpPr>
         <p:spPr>
           <a:xfrm>
-            <a:off x="6035040" y="1051560"/>
-            <a:ext cx="5486400" cy="411480"/>
+            <a:off x="6675120" y="1188720"/>
+            <a:ext cx="5029200" cy="411480"/>
           </a:xfrm>
           <a:prstGeom prst="roundRect">
             <a:avLst/>
@@ -7585,14 +8436,14 @@
       </p:sp>
       <p:sp>
         <p:nvSpPr>
-          <p:cNvPr id="8" name="Rounded Rectangle 7"/>
+          <p:cNvPr id="13" name="Rounded Rectangle 12"/>
           <p:cNvSpPr/>
           <p:nvPr/>
         </p:nvSpPr>
         <p:spPr>
           <a:xfrm>
-            <a:off x="6035040" y="1508760"/>
-            <a:ext cx="5486400" cy="1463040"/>
+            <a:off x="6675120" y="1645920"/>
+            <a:ext cx="5029200" cy="1463040"/>
           </a:xfrm>
           <a:prstGeom prst="roundRect">
             <a:avLst/>
@@ -7628,7 +8479,7 @@
               </a:spcAft>
               <a:defRPr sz="1300">
                 <a:solidFill>
-                  <a:srgbClr val="2D2D2D"/>
+                  <a:srgbClr val="EF7C00"/>
                 </a:solidFill>
                 <a:latin typeface="Calibri"/>
               </a:defRPr>
@@ -7644,7 +8495,7 @@
               </a:spcAft>
               <a:defRPr sz="1300">
                 <a:solidFill>
-                  <a:srgbClr val="2D2D2D"/>
+                  <a:srgbClr val="EF7C00"/>
                 </a:solidFill>
                 <a:latin typeface="Calibri"/>
               </a:defRPr>
@@ -7660,7 +8511,7 @@
               </a:spcAft>
               <a:defRPr sz="1300">
                 <a:solidFill>
-                  <a:srgbClr val="2D2D2D"/>
+                  <a:srgbClr val="EF7C00"/>
                 </a:solidFill>
                 <a:latin typeface="Calibri"/>
               </a:defRPr>
@@ -7676,7 +8527,7 @@
               </a:spcAft>
               <a:defRPr sz="1300">
                 <a:solidFill>
-                  <a:srgbClr val="2D2D2D"/>
+                  <a:srgbClr val="EF7C00"/>
                 </a:solidFill>
                 <a:latin typeface="Calibri"/>
               </a:defRPr>
@@ -7689,20 +8540,20 @@
       </p:sp>
       <p:sp>
         <p:nvSpPr>
-          <p:cNvPr id="9" name="Rounded Rectangle 8"/>
+          <p:cNvPr id="14" name="Rounded Rectangle 13"/>
           <p:cNvSpPr/>
           <p:nvPr/>
         </p:nvSpPr>
         <p:spPr>
           <a:xfrm>
-            <a:off x="365760" y="3246120"/>
-            <a:ext cx="5486400" cy="411480"/>
+            <a:off x="1188720" y="3383280"/>
+            <a:ext cx="5029200" cy="411480"/>
           </a:xfrm>
           <a:prstGeom prst="roundRect">
             <a:avLst/>
           </a:prstGeom>
           <a:solidFill>
-            <a:srgbClr val="F57C00"/>
+            <a:srgbClr val="EF7C00"/>
           </a:solidFill>
           <a:ln>
             <a:noFill/>
@@ -7741,14 +8592,14 @@
       </p:sp>
       <p:sp>
         <p:nvSpPr>
-          <p:cNvPr id="10" name="Rounded Rectangle 9"/>
+          <p:cNvPr id="15" name="Rounded Rectangle 14"/>
           <p:cNvSpPr/>
           <p:nvPr/>
         </p:nvSpPr>
         <p:spPr>
           <a:xfrm>
-            <a:off x="365760" y="3703320"/>
-            <a:ext cx="5486400" cy="1463040"/>
+            <a:off x="1188720" y="3840480"/>
+            <a:ext cx="5029200" cy="1463040"/>
           </a:xfrm>
           <a:prstGeom prst="roundRect">
             <a:avLst/>
@@ -7784,7 +8635,7 @@
               </a:spcAft>
               <a:defRPr sz="1300">
                 <a:solidFill>
-                  <a:srgbClr val="2D2D2D"/>
+                  <a:srgbClr val="EF7C00"/>
                 </a:solidFill>
                 <a:latin typeface="Calibri"/>
               </a:defRPr>
@@ -7800,7 +8651,7 @@
               </a:spcAft>
               <a:defRPr sz="1300">
                 <a:solidFill>
-                  <a:srgbClr val="2D2D2D"/>
+                  <a:srgbClr val="EF7C00"/>
                 </a:solidFill>
                 <a:latin typeface="Calibri"/>
               </a:defRPr>
@@ -7816,7 +8667,7 @@
               </a:spcAft>
               <a:defRPr sz="1300">
                 <a:solidFill>
-                  <a:srgbClr val="2D2D2D"/>
+                  <a:srgbClr val="EF7C00"/>
                 </a:solidFill>
                 <a:latin typeface="Calibri"/>
               </a:defRPr>
@@ -7832,7 +8683,7 @@
               </a:spcAft>
               <a:defRPr sz="1300">
                 <a:solidFill>
-                  <a:srgbClr val="2D2D2D"/>
+                  <a:srgbClr val="EF7C00"/>
                 </a:solidFill>
                 <a:latin typeface="Calibri"/>
               </a:defRPr>
@@ -7848,7 +8699,7 @@
               </a:spcAft>
               <a:defRPr sz="1300">
                 <a:solidFill>
-                  <a:srgbClr val="2D2D2D"/>
+                  <a:srgbClr val="EF7C00"/>
                 </a:solidFill>
                 <a:latin typeface="Calibri"/>
               </a:defRPr>
@@ -7861,14 +8712,14 @@
       </p:sp>
       <p:sp>
         <p:nvSpPr>
-          <p:cNvPr id="11" name="Rounded Rectangle 10"/>
+          <p:cNvPr id="16" name="Rounded Rectangle 15"/>
           <p:cNvSpPr/>
           <p:nvPr/>
         </p:nvSpPr>
         <p:spPr>
           <a:xfrm>
-            <a:off x="6035040" y="3246120"/>
-            <a:ext cx="5486400" cy="411480"/>
+            <a:off x="6675120" y="3383280"/>
+            <a:ext cx="5029200" cy="411480"/>
           </a:xfrm>
           <a:prstGeom prst="roundRect">
             <a:avLst/>
@@ -7913,14 +8764,14 @@
       </p:sp>
       <p:sp>
         <p:nvSpPr>
-          <p:cNvPr id="12" name="Rounded Rectangle 11"/>
+          <p:cNvPr id="17" name="Rounded Rectangle 16"/>
           <p:cNvSpPr/>
           <p:nvPr/>
         </p:nvSpPr>
         <p:spPr>
           <a:xfrm>
-            <a:off x="6035040" y="3703320"/>
-            <a:ext cx="5486400" cy="1463040"/>
+            <a:off x="6675120" y="3840480"/>
+            <a:ext cx="5029200" cy="1463040"/>
           </a:xfrm>
           <a:prstGeom prst="roundRect">
             <a:avLst/>
@@ -7956,7 +8807,7 @@
               </a:spcAft>
               <a:defRPr sz="1300">
                 <a:solidFill>
-                  <a:srgbClr val="2D2D2D"/>
+                  <a:srgbClr val="EF7C00"/>
                 </a:solidFill>
                 <a:latin typeface="Calibri"/>
               </a:defRPr>
@@ -7972,7 +8823,7 @@
               </a:spcAft>
               <a:defRPr sz="1300">
                 <a:solidFill>
-                  <a:srgbClr val="2D2D2D"/>
+                  <a:srgbClr val="EF7C00"/>
                 </a:solidFill>
                 <a:latin typeface="Calibri"/>
               </a:defRPr>
@@ -7988,7 +8839,7 @@
               </a:spcAft>
               <a:defRPr sz="1300">
                 <a:solidFill>
-                  <a:srgbClr val="2D2D2D"/>
+                  <a:srgbClr val="EF7C00"/>
                 </a:solidFill>
                 <a:latin typeface="Calibri"/>
               </a:defRPr>
@@ -8004,7 +8855,7 @@
               </a:spcAft>
               <a:defRPr sz="1300">
                 <a:solidFill>
-                  <a:srgbClr val="2D2D2D"/>
+                  <a:srgbClr val="EF7C00"/>
                 </a:solidFill>
                 <a:latin typeface="Calibri"/>
               </a:defRPr>
@@ -8020,7 +8871,7 @@
               </a:spcAft>
               <a:defRPr sz="1300">
                 <a:solidFill>
-                  <a:srgbClr val="2D2D2D"/>
+                  <a:srgbClr val="EF7C00"/>
                 </a:solidFill>
                 <a:latin typeface="Calibri"/>
               </a:defRPr>
@@ -8033,20 +8884,20 @@
       </p:sp>
       <p:sp>
         <p:nvSpPr>
-          <p:cNvPr id="13" name="Rounded Rectangle 12"/>
+          <p:cNvPr id="18" name="Rounded Rectangle 17"/>
           <p:cNvSpPr/>
           <p:nvPr/>
         </p:nvSpPr>
         <p:spPr>
           <a:xfrm>
-            <a:off x="365760" y="5257800"/>
-            <a:ext cx="11430000" cy="411480"/>
+            <a:off x="1188720" y="5349240"/>
+            <a:ext cx="10058400" cy="411480"/>
           </a:xfrm>
           <a:prstGeom prst="roundRect">
             <a:avLst/>
           </a:prstGeom>
           <a:solidFill>
-            <a:srgbClr val="1B1B2F"/>
+            <a:srgbClr val="002A55"/>
           </a:solidFill>
           <a:ln>
             <a:noFill/>
@@ -8085,14 +8936,14 @@
       </p:sp>
       <p:sp>
         <p:nvSpPr>
-          <p:cNvPr id="14" name="TextBox 13"/>
+          <p:cNvPr id="19" name="TextBox 18"/>
           <p:cNvSpPr txBox="1"/>
           <p:nvPr/>
         </p:nvSpPr>
         <p:spPr>
           <a:xfrm>
-            <a:off x="365760" y="5760720"/>
-            <a:ext cx="5486400" cy="320040"/>
+            <a:off x="1188720" y="5806440"/>
+            <a:ext cx="5029200" cy="320040"/>
           </a:xfrm>
           <a:prstGeom prst="rect">
             <a:avLst/>
@@ -8108,7 +8959,7 @@
             <a:pPr algn="l">
               <a:defRPr sz="1300" b="0">
                 <a:solidFill>
-                  <a:srgbClr val="666666"/>
+                  <a:srgbClr val="CCCCCC"/>
                 </a:solidFill>
                 <a:latin typeface="Calibri"/>
               </a:defRPr>
@@ -8121,14 +8972,14 @@
       </p:sp>
       <p:sp>
         <p:nvSpPr>
-          <p:cNvPr id="15" name="TextBox 14"/>
+          <p:cNvPr id="20" name="TextBox 19"/>
           <p:cNvSpPr txBox="1"/>
           <p:nvPr/>
         </p:nvSpPr>
         <p:spPr>
           <a:xfrm>
-            <a:off x="365760" y="5989320"/>
-            <a:ext cx="5486400" cy="320040"/>
+            <a:off x="6675120" y="5806440"/>
+            <a:ext cx="4572000" cy="320040"/>
           </a:xfrm>
           <a:prstGeom prst="rect">
             <a:avLst/>
@@ -8144,7 +8995,7 @@
             <a:pPr algn="l">
               <a:defRPr sz="1300" b="0">
                 <a:solidFill>
-                  <a:srgbClr val="666666"/>
+                  <a:srgbClr val="CCCCCC"/>
                 </a:solidFill>
                 <a:latin typeface="Calibri"/>
               </a:defRPr>
@@ -8152,188 +9003,6 @@
             <a:r>
               <a:t>Output: classified activity labels + workflow step descriptions</a:t>
             </a:r>
-          </a:p>
-        </p:txBody>
-      </p:sp>
-      <p:sp>
-        <p:nvSpPr>
-          <p:cNvPr id="16" name="TextBox 15"/>
-          <p:cNvSpPr txBox="1"/>
-          <p:nvPr/>
-        </p:nvSpPr>
-        <p:spPr>
-          <a:xfrm>
-            <a:off x="6400800" y="5715000"/>
-            <a:ext cx="5303520" cy="274320"/>
-          </a:xfrm>
-          <a:prstGeom prst="rect">
-            <a:avLst/>
-          </a:prstGeom>
-          <a:noFill/>
-        </p:spPr>
-        <p:txBody>
-          <a:bodyPr wrap="square">
-            <a:spAutoFit/>
-          </a:bodyPr>
-          <a:lstStyle/>
-          <a:p>
-            <a:pPr algn="l">
-              <a:defRPr sz="1300" b="1">
-                <a:solidFill>
-                  <a:srgbClr val="007ACC"/>
-                </a:solidFill>
-                <a:latin typeface="Calibri"/>
-              </a:defRPr>
-            </a:pPr>
-            <a:r>
-              <a:t>Where in the code:</a:t>
-            </a:r>
-          </a:p>
-        </p:txBody>
-      </p:sp>
-      <p:sp>
-        <p:nvSpPr>
-          <p:cNvPr id="17" name="TextBox 16"/>
-          <p:cNvSpPr txBox="1"/>
-          <p:nvPr/>
-        </p:nvSpPr>
-        <p:spPr>
-          <a:xfrm>
-            <a:off x="6400800" y="5989320"/>
-            <a:ext cx="5303520" cy="1143000"/>
-          </a:xfrm>
-          <a:prstGeom prst="rect">
-            <a:avLst/>
-          </a:prstGeom>
-          <a:noFill/>
-        </p:spPr>
-        <p:txBody>
-          <a:bodyPr wrap="square">
-            <a:spAutoFit/>
-          </a:bodyPr>
-          <a:lstStyle/>
-          <a:p>
-            <a:pPr>
-              <a:spcAft>
-                <a:spcPts val="300"/>
-              </a:spcAft>
-              <a:defRPr sz="1100">
-                <a:solidFill>
-                  <a:srgbClr val="666666"/>
-                </a:solidFill>
-                <a:latin typeface="Consolas"/>
-              </a:defRPr>
-            </a:pPr>
-            <a:r>
-              <a:t>pipeline/ocr_extractor.py: text sensing</a:t>
-            </a:r>
-          </a:p>
-          <a:p>
-            <a:pPr>
-              <a:spcAft>
-                <a:spcPts val="300"/>
-              </a:spcAft>
-              <a:defRPr sz="1100">
-                <a:solidFill>
-                  <a:srgbClr val="666666"/>
-                </a:solidFill>
-                <a:latin typeface="Consolas"/>
-              </a:defRPr>
-            </a:pPr>
-            <a:r>
-              <a:t>pipeline/ui_detector.py: UI element sensing</a:t>
-            </a:r>
-          </a:p>
-          <a:p>
-            <a:pPr>
-              <a:spcAft>
-                <a:spcPts val="300"/>
-              </a:spcAft>
-              <a:defRPr sz="1100">
-                <a:solidFill>
-                  <a:srgbClr val="666666"/>
-                </a:solidFill>
-                <a:latin typeface="Consolas"/>
-              </a:defRPr>
-            </a:pPr>
-            <a:r>
-              <a:t>pipeline/visual_features.py: visual pattern sensing</a:t>
-            </a:r>
-          </a:p>
-          <a:p>
-            <a:pPr>
-              <a:spcAft>
-                <a:spcPts val="300"/>
-              </a:spcAft>
-              <a:defRPr sz="1100">
-                <a:solidFill>
-                  <a:srgbClr val="666666"/>
-                </a:solidFill>
-                <a:latin typeface="Consolas"/>
-              </a:defRPr>
-            </a:pPr>
-            <a:r>
-              <a:t>pipeline/interaction_features.py: behavioral sensing</a:t>
-            </a:r>
-          </a:p>
-          <a:p>
-            <a:pPr>
-              <a:spcAft>
-                <a:spcPts val="300"/>
-              </a:spcAft>
-              <a:defRPr sz="1100">
-                <a:solidFill>
-                  <a:srgbClr val="666666"/>
-                </a:solidFill>
-                <a:latin typeface="Consolas"/>
-              </a:defRPr>
-            </a:pPr>
-            <a:r>
-              <a:t>pipeline/feature_assembler.py: multimodal fusion</a:t>
-            </a:r>
-          </a:p>
-        </p:txBody>
-      </p:sp>
-      <p:sp>
-        <p:nvSpPr>
-          <p:cNvPr id="18" name="Rectangle 17"/>
-          <p:cNvSpPr/>
-          <p:nvPr/>
-        </p:nvSpPr>
-        <p:spPr>
-          <a:xfrm>
-            <a:off x="0" y="6803136"/>
-            <a:ext cx="12191695" cy="54864"/>
-          </a:xfrm>
-          <a:prstGeom prst="rect">
-            <a:avLst/>
-          </a:prstGeom>
-          <a:solidFill>
-            <a:srgbClr val="F57C00"/>
-          </a:solidFill>
-          <a:ln>
-            <a:noFill/>
-          </a:ln>
-        </p:spPr>
-        <p:style>
-          <a:lnRef idx="1">
-            <a:schemeClr val="accent1"/>
-          </a:lnRef>
-          <a:fillRef idx="3">
-            <a:schemeClr val="accent1"/>
-          </a:fillRef>
-          <a:effectRef idx="2">
-            <a:schemeClr val="accent1"/>
-          </a:effectRef>
-          <a:fontRef idx="minor">
-            <a:schemeClr val="lt1"/>
-          </a:fontRef>
-        </p:style>
-        <p:txBody>
-          <a:bodyPr rtlCol="0" anchor="ctr"/>
-          <a:lstStyle/>
-          <a:p>
-            <a:pPr algn="ctr"/>
           </a:p>
         </p:txBody>
       </p:sp>
@@ -8351,7 +9020,7 @@
     <p:bg>
       <p:bgPr>
         <a:solidFill>
-          <a:srgbClr val="FFFFFF"/>
+          <a:srgbClr val="003D7C"/>
         </a:solidFill>
         <a:effectLst/>
       </p:bgPr>
@@ -8372,13 +9041,13 @@
         <p:spPr>
           <a:xfrm>
             <a:off x="0" y="0"/>
-            <a:ext cx="12191695" cy="914400"/>
+            <a:ext cx="1005840" cy="822960"/>
           </a:xfrm>
           <a:prstGeom prst="rect">
             <a:avLst/>
           </a:prstGeom>
           <a:solidFill>
-            <a:srgbClr val="1B1B2F"/>
+            <a:srgbClr val="FFE033"/>
           </a:solidFill>
           <a:ln>
             <a:noFill/>
@@ -8408,14 +9077,57 @@
       </p:sp>
       <p:sp>
         <p:nvSpPr>
-          <p:cNvPr id="3" name="TextBox 2"/>
+          <p:cNvPr id="3" name="Rectangle 2"/>
+          <p:cNvSpPr/>
+          <p:nvPr/>
+        </p:nvSpPr>
+        <p:spPr>
+          <a:xfrm>
+            <a:off x="457200" y="822960"/>
+            <a:ext cx="54864" cy="5303520"/>
+          </a:xfrm>
+          <a:prstGeom prst="rect">
+            <a:avLst/>
+          </a:prstGeom>
+          <a:solidFill>
+            <a:srgbClr val="EF7C00"/>
+          </a:solidFill>
+          <a:ln>
+            <a:noFill/>
+          </a:ln>
+        </p:spPr>
+        <p:style>
+          <a:lnRef idx="1">
+            <a:schemeClr val="accent1"/>
+          </a:lnRef>
+          <a:fillRef idx="3">
+            <a:schemeClr val="accent1"/>
+          </a:fillRef>
+          <a:effectRef idx="2">
+            <a:schemeClr val="accent1"/>
+          </a:effectRef>
+          <a:fontRef idx="minor">
+            <a:schemeClr val="lt1"/>
+          </a:fontRef>
+        </p:style>
+        <p:txBody>
+          <a:bodyPr rtlCol="0" anchor="ctr"/>
+          <a:lstStyle/>
+          <a:p>
+            <a:pPr algn="ctr"/>
+          </a:p>
+        </p:txBody>
+      </p:sp>
+      <p:sp>
+        <p:nvSpPr>
+          <p:cNvPr id="4" name="TextBox 3"/>
           <p:cNvSpPr txBox="1"/>
           <p:nvPr/>
         </p:nvSpPr>
         <p:spPr>
           <a:xfrm>
-            <a:off x="457200" y="137160"/>
-            <a:ext cx="11277295" cy="640080"/>
+            <a:off x="10332720" y="137160"/>
+            <a:ext cx="1645920" cy="457200"/>
           </a:xfrm>
           <a:prstGeom prst="rect">
             <a:avLst/>
@@ -8428,7 +9140,83 @@
           </a:bodyPr>
           <a:lstStyle/>
           <a:p>
-            <a:pPr algn="ctr">
+            <a:pPr algn="r">
+              <a:defRPr sz="2400" b="1">
+                <a:solidFill>
+                  <a:srgbClr val="FFFFFF"/>
+                </a:solidFill>
+                <a:latin typeface="Arial"/>
+              </a:defRPr>
+            </a:pPr>
+            <a:r>
+              <a:t>NUS</a:t>
+            </a:r>
+          </a:p>
+        </p:txBody>
+      </p:sp>
+      <p:sp>
+        <p:nvSpPr>
+          <p:cNvPr id="5" name="TextBox 4"/>
+          <p:cNvSpPr txBox="1"/>
+          <p:nvPr/>
+        </p:nvSpPr>
+        <p:spPr>
+          <a:xfrm>
+            <a:off x="10332720" y="457200"/>
+            <a:ext cx="1645920" cy="320040"/>
+          </a:xfrm>
+          <a:prstGeom prst="rect">
+            <a:avLst/>
+          </a:prstGeom>
+          <a:noFill/>
+        </p:spPr>
+        <p:txBody>
+          <a:bodyPr wrap="square">
+            <a:spAutoFit/>
+          </a:bodyPr>
+          <a:lstStyle/>
+          <a:p>
+            <a:pPr algn="r">
+              <a:defRPr sz="800" b="0">
+                <a:solidFill>
+                  <a:srgbClr val="FFFFFF"/>
+                </a:solidFill>
+                <a:latin typeface="Arial"/>
+              </a:defRPr>
+            </a:pPr>
+            <a:r>
+              <a:t>National University</a:t>
+            </a:r>
+            <a:br/>
+            <a:r>
+              <a:t>of Singapore</a:t>
+            </a:r>
+          </a:p>
+        </p:txBody>
+      </p:sp>
+      <p:sp>
+        <p:nvSpPr>
+          <p:cNvPr id="6" name="TextBox 5"/>
+          <p:cNvSpPr txBox="1"/>
+          <p:nvPr/>
+        </p:nvSpPr>
+        <p:spPr>
+          <a:xfrm>
+            <a:off x="1188720" y="91440"/>
+            <a:ext cx="8686800" cy="640080"/>
+          </a:xfrm>
+          <a:prstGeom prst="rect">
+            <a:avLst/>
+          </a:prstGeom>
+          <a:noFill/>
+        </p:spPr>
+        <p:txBody>
+          <a:bodyPr wrap="square">
+            <a:spAutoFit/>
+          </a:bodyPr>
+          <a:lstStyle/>
+          <a:p>
+            <a:pPr algn="l">
               <a:defRPr sz="3200" b="1">
                 <a:solidFill>
                   <a:srgbClr val="FFFFFF"/>
@@ -8444,14 +9232,93 @@
       </p:sp>
       <p:sp>
         <p:nvSpPr>
-          <p:cNvPr id="4" name="Rounded Rectangle 3"/>
+          <p:cNvPr id="7" name="Rectangle 6"/>
           <p:cNvSpPr/>
           <p:nvPr/>
         </p:nvSpPr>
         <p:spPr>
           <a:xfrm>
-            <a:off x="457200" y="1143000"/>
-            <a:ext cx="5486400" cy="457200"/>
+            <a:off x="0" y="6172200"/>
+            <a:ext cx="12191695" cy="54864"/>
+          </a:xfrm>
+          <a:prstGeom prst="rect">
+            <a:avLst/>
+          </a:prstGeom>
+          <a:solidFill>
+            <a:srgbClr val="EF7C00"/>
+          </a:solidFill>
+          <a:ln>
+            <a:noFill/>
+          </a:ln>
+        </p:spPr>
+        <p:style>
+          <a:lnRef idx="1">
+            <a:schemeClr val="accent1"/>
+          </a:lnRef>
+          <a:fillRef idx="3">
+            <a:schemeClr val="accent1"/>
+          </a:fillRef>
+          <a:effectRef idx="2">
+            <a:schemeClr val="accent1"/>
+          </a:effectRef>
+          <a:fontRef idx="minor">
+            <a:schemeClr val="lt1"/>
+          </a:fontRef>
+        </p:style>
+        <p:txBody>
+          <a:bodyPr rtlCol="0" anchor="ctr"/>
+          <a:lstStyle/>
+          <a:p>
+            <a:pPr algn="ctr"/>
+          </a:p>
+        </p:txBody>
+      </p:sp>
+      <p:sp>
+        <p:nvSpPr>
+          <p:cNvPr id="8" name="TextBox 7"/>
+          <p:cNvSpPr txBox="1"/>
+          <p:nvPr/>
+        </p:nvSpPr>
+        <p:spPr>
+          <a:xfrm>
+            <a:off x="274320" y="6400800"/>
+            <a:ext cx="7315200" cy="274320"/>
+          </a:xfrm>
+          <a:prstGeom prst="rect">
+            <a:avLst/>
+          </a:prstGeom>
+          <a:noFill/>
+        </p:spPr>
+        <p:txBody>
+          <a:bodyPr wrap="square">
+            <a:spAutoFit/>
+          </a:bodyPr>
+          <a:lstStyle/>
+          <a:p>
+            <a:pPr algn="l">
+              <a:defRPr sz="800" b="0">
+                <a:solidFill>
+                  <a:srgbClr val="FFFFFF"/>
+                </a:solidFill>
+                <a:latin typeface="Calibri"/>
+              </a:defRPr>
+            </a:pPr>
+            <a:r>
+              <a:t>© Copyright National University of Singapore. All Rights Reserved.</a:t>
+            </a:r>
+          </a:p>
+        </p:txBody>
+      </p:sp>
+      <p:sp>
+        <p:nvSpPr>
+          <p:cNvPr id="9" name="Rounded Rectangle 8"/>
+          <p:cNvSpPr/>
+          <p:nvPr/>
+        </p:nvSpPr>
+        <p:spPr>
+          <a:xfrm>
+            <a:off x="1188720" y="1188720"/>
+            <a:ext cx="5029200" cy="457200"/>
           </a:xfrm>
           <a:prstGeom prst="roundRect">
             <a:avLst/>
@@ -8496,14 +9363,14 @@
       </p:sp>
       <p:sp>
         <p:nvSpPr>
-          <p:cNvPr id="5" name="Rounded Rectangle 4"/>
+          <p:cNvPr id="10" name="Rounded Rectangle 9"/>
           <p:cNvSpPr/>
           <p:nvPr/>
         </p:nvSpPr>
         <p:spPr>
           <a:xfrm>
-            <a:off x="457200" y="1645920"/>
-            <a:ext cx="5486400" cy="1554480"/>
+            <a:off x="1188720" y="1691640"/>
+            <a:ext cx="5029200" cy="1554480"/>
           </a:xfrm>
           <a:prstGeom prst="roundRect">
             <a:avLst/>
@@ -8539,7 +9406,7 @@
               </a:spcAft>
               <a:defRPr sz="1400">
                 <a:solidFill>
-                  <a:srgbClr val="2D2D2D"/>
+                  <a:srgbClr val="EF7C00"/>
                 </a:solidFill>
                 <a:latin typeface="Calibri"/>
               </a:defRPr>
@@ -8555,7 +9422,7 @@
               </a:spcAft>
               <a:defRPr sz="1400">
                 <a:solidFill>
-                  <a:srgbClr val="2D2D2D"/>
+                  <a:srgbClr val="EF7C00"/>
                 </a:solidFill>
                 <a:latin typeface="Calibri"/>
               </a:defRPr>
@@ -8571,7 +9438,7 @@
               </a:spcAft>
               <a:defRPr sz="1400">
                 <a:solidFill>
-                  <a:srgbClr val="2D2D2D"/>
+                  <a:srgbClr val="EF7C00"/>
                 </a:solidFill>
                 <a:latin typeface="Calibri"/>
               </a:defRPr>
@@ -8587,7 +9454,7 @@
               </a:spcAft>
               <a:defRPr sz="1400">
                 <a:solidFill>
-                  <a:srgbClr val="2D2D2D"/>
+                  <a:srgbClr val="EF7C00"/>
                 </a:solidFill>
                 <a:latin typeface="Calibri"/>
               </a:defRPr>
@@ -8600,14 +9467,14 @@
       </p:sp>
       <p:sp>
         <p:nvSpPr>
-          <p:cNvPr id="6" name="Rounded Rectangle 5"/>
+          <p:cNvPr id="11" name="Rounded Rectangle 10"/>
           <p:cNvSpPr/>
           <p:nvPr/>
         </p:nvSpPr>
         <p:spPr>
           <a:xfrm>
-            <a:off x="6126480" y="1143000"/>
-            <a:ext cx="5486400" cy="457200"/>
+            <a:off x="6675120" y="1188720"/>
+            <a:ext cx="5029200" cy="457200"/>
           </a:xfrm>
           <a:prstGeom prst="roundRect">
             <a:avLst/>
@@ -8652,14 +9519,14 @@
       </p:sp>
       <p:sp>
         <p:nvSpPr>
-          <p:cNvPr id="7" name="Rounded Rectangle 6"/>
+          <p:cNvPr id="12" name="Rounded Rectangle 11"/>
           <p:cNvSpPr/>
           <p:nvPr/>
         </p:nvSpPr>
         <p:spPr>
           <a:xfrm>
-            <a:off x="6126480" y="1645920"/>
-            <a:ext cx="5486400" cy="1554480"/>
+            <a:off x="6675120" y="1691640"/>
+            <a:ext cx="5029200" cy="1554480"/>
           </a:xfrm>
           <a:prstGeom prst="roundRect">
             <a:avLst/>
@@ -8695,7 +9562,7 @@
               </a:spcAft>
               <a:defRPr sz="1400">
                 <a:solidFill>
-                  <a:srgbClr val="2D2D2D"/>
+                  <a:srgbClr val="EF7C00"/>
                 </a:solidFill>
                 <a:latin typeface="Calibri"/>
               </a:defRPr>
@@ -8711,7 +9578,7 @@
               </a:spcAft>
               <a:defRPr sz="1400">
                 <a:solidFill>
-                  <a:srgbClr val="2D2D2D"/>
+                  <a:srgbClr val="EF7C00"/>
                 </a:solidFill>
                 <a:latin typeface="Calibri"/>
               </a:defRPr>
@@ -8727,7 +9594,7 @@
               </a:spcAft>
               <a:defRPr sz="1400">
                 <a:solidFill>
-                  <a:srgbClr val="2D2D2D"/>
+                  <a:srgbClr val="EF7C00"/>
                 </a:solidFill>
                 <a:latin typeface="Calibri"/>
               </a:defRPr>
@@ -8743,7 +9610,7 @@
               </a:spcAft>
               <a:defRPr sz="1400">
                 <a:solidFill>
-                  <a:srgbClr val="2D2D2D"/>
+                  <a:srgbClr val="EF7C00"/>
                 </a:solidFill>
                 <a:latin typeface="Calibri"/>
               </a:defRPr>
@@ -8756,14 +9623,14 @@
       </p:sp>
       <p:sp>
         <p:nvSpPr>
-          <p:cNvPr id="8" name="Rounded Rectangle 7"/>
+          <p:cNvPr id="13" name="Rounded Rectangle 12"/>
           <p:cNvSpPr/>
           <p:nvPr/>
         </p:nvSpPr>
         <p:spPr>
           <a:xfrm>
-            <a:off x="457200" y="3520440"/>
-            <a:ext cx="5486400" cy="457200"/>
+            <a:off x="1188720" y="3566160"/>
+            <a:ext cx="5029200" cy="457200"/>
           </a:xfrm>
           <a:prstGeom prst="roundRect">
             <a:avLst/>
@@ -8808,14 +9675,14 @@
       </p:sp>
       <p:sp>
         <p:nvSpPr>
-          <p:cNvPr id="9" name="Rounded Rectangle 8"/>
+          <p:cNvPr id="14" name="Rounded Rectangle 13"/>
           <p:cNvSpPr/>
           <p:nvPr/>
         </p:nvSpPr>
         <p:spPr>
           <a:xfrm>
-            <a:off x="457200" y="4023360"/>
-            <a:ext cx="5486400" cy="1554480"/>
+            <a:off x="1188720" y="4069080"/>
+            <a:ext cx="5029200" cy="1554480"/>
           </a:xfrm>
           <a:prstGeom prst="roundRect">
             <a:avLst/>
@@ -8851,7 +9718,7 @@
               </a:spcAft>
               <a:defRPr sz="1400">
                 <a:solidFill>
-                  <a:srgbClr val="2D2D2D"/>
+                  <a:srgbClr val="EF7C00"/>
                 </a:solidFill>
                 <a:latin typeface="Calibri"/>
               </a:defRPr>
@@ -8867,7 +9734,7 @@
               </a:spcAft>
               <a:defRPr sz="1400">
                 <a:solidFill>
-                  <a:srgbClr val="2D2D2D"/>
+                  <a:srgbClr val="EF7C00"/>
                 </a:solidFill>
                 <a:latin typeface="Calibri"/>
               </a:defRPr>
@@ -8883,7 +9750,7 @@
               </a:spcAft>
               <a:defRPr sz="1400">
                 <a:solidFill>
-                  <a:srgbClr val="2D2D2D"/>
+                  <a:srgbClr val="EF7C00"/>
                 </a:solidFill>
                 <a:latin typeface="Calibri"/>
               </a:defRPr>
@@ -8899,7 +9766,7 @@
               </a:spcAft>
               <a:defRPr sz="1400">
                 <a:solidFill>
-                  <a:srgbClr val="2D2D2D"/>
+                  <a:srgbClr val="EF7C00"/>
                 </a:solidFill>
                 <a:latin typeface="Calibri"/>
               </a:defRPr>
@@ -8912,20 +9779,20 @@
       </p:sp>
       <p:sp>
         <p:nvSpPr>
-          <p:cNvPr id="10" name="Rounded Rectangle 9"/>
+          <p:cNvPr id="15" name="Rounded Rectangle 14"/>
           <p:cNvSpPr/>
           <p:nvPr/>
         </p:nvSpPr>
         <p:spPr>
           <a:xfrm>
-            <a:off x="6126480" y="3520440"/>
-            <a:ext cx="5486400" cy="457200"/>
+            <a:off x="6675120" y="3566160"/>
+            <a:ext cx="5029200" cy="457200"/>
           </a:xfrm>
           <a:prstGeom prst="roundRect">
             <a:avLst/>
           </a:prstGeom>
           <a:solidFill>
-            <a:srgbClr val="F57C00"/>
+            <a:srgbClr val="EF7C00"/>
           </a:solidFill>
           <a:ln>
             <a:noFill/>
@@ -8964,14 +9831,14 @@
       </p:sp>
       <p:sp>
         <p:nvSpPr>
-          <p:cNvPr id="11" name="Rounded Rectangle 10"/>
+          <p:cNvPr id="16" name="Rounded Rectangle 15"/>
           <p:cNvSpPr/>
           <p:nvPr/>
         </p:nvSpPr>
         <p:spPr>
           <a:xfrm>
-            <a:off x="6126480" y="4023360"/>
-            <a:ext cx="5486400" cy="1554480"/>
+            <a:off x="6675120" y="4069080"/>
+            <a:ext cx="5029200" cy="1554480"/>
           </a:xfrm>
           <a:prstGeom prst="roundRect">
             <a:avLst/>
@@ -9007,7 +9874,7 @@
               </a:spcAft>
               <a:defRPr sz="1400">
                 <a:solidFill>
-                  <a:srgbClr val="2D2D2D"/>
+                  <a:srgbClr val="EF7C00"/>
                 </a:solidFill>
                 <a:latin typeface="Calibri"/>
               </a:defRPr>
@@ -9023,7 +9890,7 @@
               </a:spcAft>
               <a:defRPr sz="1400">
                 <a:solidFill>
-                  <a:srgbClr val="2D2D2D"/>
+                  <a:srgbClr val="EF7C00"/>
                 </a:solidFill>
                 <a:latin typeface="Calibri"/>
               </a:defRPr>
@@ -9039,7 +9906,7 @@
               </a:spcAft>
               <a:defRPr sz="1400">
                 <a:solidFill>
-                  <a:srgbClr val="2D2D2D"/>
+                  <a:srgbClr val="EF7C00"/>
                 </a:solidFill>
                 <a:latin typeface="Calibri"/>
               </a:defRPr>
@@ -9055,7 +9922,7 @@
               </a:spcAft>
               <a:defRPr sz="1400">
                 <a:solidFill>
-                  <a:srgbClr val="2D2D2D"/>
+                  <a:srgbClr val="EF7C00"/>
                 </a:solidFill>
                 <a:latin typeface="Calibri"/>
               </a:defRPr>
@@ -9068,57 +9935,14 @@
       </p:sp>
       <p:sp>
         <p:nvSpPr>
-          <p:cNvPr id="12" name="Rectangle 11"/>
-          <p:cNvSpPr/>
-          <p:nvPr/>
-        </p:nvSpPr>
-        <p:spPr>
-          <a:xfrm>
-            <a:off x="0" y="5852160"/>
-            <a:ext cx="12191695" cy="950976"/>
-          </a:xfrm>
-          <a:prstGeom prst="rect">
-            <a:avLst/>
-          </a:prstGeom>
-          <a:solidFill>
-            <a:srgbClr val="1B1B2F"/>
-          </a:solidFill>
-          <a:ln>
-            <a:noFill/>
-          </a:ln>
-        </p:spPr>
-        <p:style>
-          <a:lnRef idx="1">
-            <a:schemeClr val="accent1"/>
-          </a:lnRef>
-          <a:fillRef idx="3">
-            <a:schemeClr val="accent1"/>
-          </a:fillRef>
-          <a:effectRef idx="2">
-            <a:schemeClr val="accent1"/>
-          </a:effectRef>
-          <a:fontRef idx="minor">
-            <a:schemeClr val="lt1"/>
-          </a:fontRef>
-        </p:style>
-        <p:txBody>
-          <a:bodyPr rtlCol="0" anchor="ctr"/>
-          <a:lstStyle/>
-          <a:p>
-            <a:pPr algn="ctr"/>
-          </a:p>
-        </p:txBody>
-      </p:sp>
-      <p:sp>
-        <p:nvSpPr>
-          <p:cNvPr id="13" name="TextBox 12"/>
+          <p:cNvPr id="17" name="TextBox 16"/>
           <p:cNvSpPr txBox="1"/>
           <p:nvPr/>
         </p:nvSpPr>
         <p:spPr>
           <a:xfrm>
-            <a:off x="457200" y="5943600"/>
-            <a:ext cx="11277295" cy="365760"/>
+            <a:off x="1188720" y="5623560"/>
+            <a:ext cx="10058400" cy="365760"/>
           </a:xfrm>
           <a:prstGeom prst="rect">
             <a:avLst/>
@@ -9134,7 +9958,7 @@
             <a:pPr algn="ctr">
               <a:defRPr sz="1800" b="1">
                 <a:solidFill>
-                  <a:srgbClr val="FFFFFF"/>
+                  <a:srgbClr val="EF7C00"/>
                 </a:solidFill>
                 <a:latin typeface="Calibri"/>
               </a:defRPr>
@@ -9147,14 +9971,14 @@
       </p:sp>
       <p:sp>
         <p:nvSpPr>
-          <p:cNvPr id="14" name="TextBox 13"/>
+          <p:cNvPr id="18" name="TextBox 17"/>
           <p:cNvSpPr txBox="1"/>
           <p:nvPr/>
         </p:nvSpPr>
         <p:spPr>
           <a:xfrm>
-            <a:off x="457200" y="6309360"/>
-            <a:ext cx="11277295" cy="365760"/>
+            <a:off x="1188720" y="5943600"/>
+            <a:ext cx="10058400" cy="365760"/>
           </a:xfrm>
           <a:prstGeom prst="rect">
             <a:avLst/>
@@ -9170,7 +9994,7 @@
             <a:pPr algn="ctr">
               <a:defRPr sz="1500" b="0">
                 <a:solidFill>
-                  <a:srgbClr val="666666"/>
+                  <a:srgbClr val="CCCCCC"/>
                 </a:solidFill>
                 <a:latin typeface="Calibri"/>
               </a:defRPr>
@@ -9178,49 +10002,6 @@
             <a:r>
               <a:t>Full-stack implementation: React frontend, FastAPI backend, Docker deployment, AWS infrastructure</a:t>
             </a:r>
-          </a:p>
-        </p:txBody>
-      </p:sp>
-      <p:sp>
-        <p:nvSpPr>
-          <p:cNvPr id="15" name="Rectangle 14"/>
-          <p:cNvSpPr/>
-          <p:nvPr/>
-        </p:nvSpPr>
-        <p:spPr>
-          <a:xfrm>
-            <a:off x="0" y="6803136"/>
-            <a:ext cx="12191695" cy="54864"/>
-          </a:xfrm>
-          <a:prstGeom prst="rect">
-            <a:avLst/>
-          </a:prstGeom>
-          <a:solidFill>
-            <a:srgbClr val="007ACC"/>
-          </a:solidFill>
-          <a:ln>
-            <a:noFill/>
-          </a:ln>
-        </p:spPr>
-        <p:style>
-          <a:lnRef idx="1">
-            <a:schemeClr val="accent1"/>
-          </a:lnRef>
-          <a:fillRef idx="3">
-            <a:schemeClr val="accent1"/>
-          </a:fillRef>
-          <a:effectRef idx="2">
-            <a:schemeClr val="accent1"/>
-          </a:effectRef>
-          <a:fontRef idx="minor">
-            <a:schemeClr val="lt1"/>
-          </a:fontRef>
-        </p:style>
-        <p:txBody>
-          <a:bodyPr rtlCol="0" anchor="ctr"/>
-          <a:lstStyle/>
-          <a:p>
-            <a:pPr algn="ctr"/>
           </a:p>
         </p:txBody>
       </p:sp>
